--- a/exports/pptx/lessons/middle-module-07-eleven-multiplication/day-02-carry-case.pptx
+++ b/exports/pptx/lessons/middle-module-07-eleven-multiplication/day-02-carry-case.pptx
@@ -18,9 +18,17 @@
     <p:sldId id="266" r:id="rId12"/>
     <p:sldId id="267" r:id="rId13"/>
     <p:sldId id="268" r:id="rId14"/>
+    <p:sldId id="269" r:id="rId15"/>
+    <p:sldId id="270" r:id="rId16"/>
+    <p:sldId id="271" r:id="rId17"/>
+    <p:sldId id="272" r:id="rId18"/>
+    <p:sldId id="273" r:id="rId19"/>
+    <p:sldId id="274" r:id="rId20"/>
+    <p:sldId id="275" r:id="rId21"/>
+    <p:sldId id="276" r:id="rId22"/>
   </p:sldIdLst>
   <p:notesMasterIdLst>
-    <p:notesMasterId r:id="rId15"/>
+    <p:notesMasterId r:id="rId23"/>
   </p:notesMasterIdLst>
   <p:sldSz cx="9144000" cy="5143500"/>
   <p:notesSz cx="5143500" cy="9144000"/>
@@ -908,6 +916,534 @@
 </p:notes>
 </file>
 
+<file path=ppt/notesSlides/notesSlide14.xml><?xml version="1.0" encoding="utf-8"?>
+<p:notes xmlns:a="http://schemas.openxmlformats.org/drawingml/2006/main" xmlns:r="http://schemas.openxmlformats.org/officeDocument/2006/relationships" xmlns:p="http://schemas.openxmlformats.org/presentationml/2006/main">
+  <p:cSld>
+    <p:spTree>
+      <p:nvGrpSpPr>
+        <p:cNvPr id="1" name=""/>
+        <p:cNvGrpSpPr/>
+        <p:nvPr/>
+      </p:nvGrpSpPr>
+      <p:grpSpPr>
+        <a:xfrm>
+          <a:off x="0" y="0"/>
+          <a:ext cx="0" cy="0"/>
+          <a:chOff x="0" y="0"/>
+          <a:chExt cx="0" cy="0"/>
+        </a:xfrm>
+      </p:grpSpPr>
+      <p:sp>
+        <p:nvSpPr>
+          <p:cNvPr id="2" name="Slide Image Placeholder 1"/>
+          <p:cNvSpPr>
+            <a:spLocks noGrp="1" noRot="1" noChangeAspect="1"/>
+          </p:cNvSpPr>
+          <p:nvPr>
+            <p:ph type="sldImg"/>
+          </p:nvPr>
+        </p:nvSpPr>
+        <p:spPr/>
+      </p:sp>
+      <p:sp>
+        <p:nvSpPr>
+          <p:cNvPr id="3" name="Notes Placeholder 2"/>
+          <p:cNvSpPr>
+            <a:spLocks noGrp="1"/>
+          </p:cNvSpPr>
+          <p:nvPr>
+            <p:ph type="body" idx="1"/>
+          </p:nvPr>
+        </p:nvSpPr>
+        <p:spPr/>
+        <p:txBody>
+          <a:bodyPr/>
+          <a:lstStyle/>
+          <a:p>
+            <a:r>
+              <a:rPr lang="en-US" dirty="0"/>
+              <a:t/>
+            </a:r>
+            <a:endParaRPr lang="en-US" dirty="0"/>
+          </a:p>
+        </p:txBody>
+      </p:sp>
+      <p:sp>
+        <p:nvSpPr>
+          <p:cNvPr id="4" name="Slide Number Placeholder 3"/>
+          <p:cNvSpPr>
+            <a:spLocks noGrp="1"/>
+          </p:cNvSpPr>
+          <p:nvPr>
+            <p:ph type="sldNum" sz="quarter" idx="10"/>
+          </p:nvPr>
+        </p:nvSpPr>
+        <p:spPr/>
+        <p:txBody>
+          <a:bodyPr/>
+          <a:lstStyle/>
+          <a:p>
+            <a:fld id="{F7021451-1387-4CA6-816F-3879F97B5CBC}" type="slidenum">
+              <a:rPr lang="en-US"/>
+              <a:t>14</a:t>
+            </a:fld>
+            <a:endParaRPr lang="en-US"/>
+          </a:p>
+        </p:txBody>
+      </p:sp>
+    </p:spTree>
+    <p:extLst>
+      <p:ext uri="{BB962C8B-B14F-4D97-AF65-F5344CB8AC3E}">
+        <p14:creationId xmlns:p14="http://schemas.microsoft.com/office/powerpoint/2010/main" val="1024086991"/>
+      </p:ext>
+    </p:extLst>
+  </p:cSld>
+  <p:clrMapOvr>
+    <a:masterClrMapping/>
+  </p:clrMapOvr>
+</p:notes>
+</file>
+
+<file path=ppt/notesSlides/notesSlide15.xml><?xml version="1.0" encoding="utf-8"?>
+<p:notes xmlns:a="http://schemas.openxmlformats.org/drawingml/2006/main" xmlns:r="http://schemas.openxmlformats.org/officeDocument/2006/relationships" xmlns:p="http://schemas.openxmlformats.org/presentationml/2006/main">
+  <p:cSld>
+    <p:spTree>
+      <p:nvGrpSpPr>
+        <p:cNvPr id="1" name=""/>
+        <p:cNvGrpSpPr/>
+        <p:nvPr/>
+      </p:nvGrpSpPr>
+      <p:grpSpPr>
+        <a:xfrm>
+          <a:off x="0" y="0"/>
+          <a:ext cx="0" cy="0"/>
+          <a:chOff x="0" y="0"/>
+          <a:chExt cx="0" cy="0"/>
+        </a:xfrm>
+      </p:grpSpPr>
+      <p:sp>
+        <p:nvSpPr>
+          <p:cNvPr id="2" name="Slide Image Placeholder 1"/>
+          <p:cNvSpPr>
+            <a:spLocks noGrp="1" noRot="1" noChangeAspect="1"/>
+          </p:cNvSpPr>
+          <p:nvPr>
+            <p:ph type="sldImg"/>
+          </p:nvPr>
+        </p:nvSpPr>
+        <p:spPr/>
+      </p:sp>
+      <p:sp>
+        <p:nvSpPr>
+          <p:cNvPr id="3" name="Notes Placeholder 2"/>
+          <p:cNvSpPr>
+            <a:spLocks noGrp="1"/>
+          </p:cNvSpPr>
+          <p:nvPr>
+            <p:ph type="body" idx="1"/>
+          </p:nvPr>
+        </p:nvSpPr>
+        <p:spPr/>
+        <p:txBody>
+          <a:bodyPr/>
+          <a:lstStyle/>
+          <a:p>
+            <a:r>
+              <a:rPr lang="en-US" dirty="0"/>
+              <a:t/>
+            </a:r>
+            <a:endParaRPr lang="en-US" dirty="0"/>
+          </a:p>
+        </p:txBody>
+      </p:sp>
+      <p:sp>
+        <p:nvSpPr>
+          <p:cNvPr id="4" name="Slide Number Placeholder 3"/>
+          <p:cNvSpPr>
+            <a:spLocks noGrp="1"/>
+          </p:cNvSpPr>
+          <p:nvPr>
+            <p:ph type="sldNum" sz="quarter" idx="10"/>
+          </p:nvPr>
+        </p:nvSpPr>
+        <p:spPr/>
+        <p:txBody>
+          <a:bodyPr/>
+          <a:lstStyle/>
+          <a:p>
+            <a:fld id="{F7021451-1387-4CA6-816F-3879F97B5CBC}" type="slidenum">
+              <a:rPr lang="en-US"/>
+              <a:t>15</a:t>
+            </a:fld>
+            <a:endParaRPr lang="en-US"/>
+          </a:p>
+        </p:txBody>
+      </p:sp>
+    </p:spTree>
+    <p:extLst>
+      <p:ext uri="{BB962C8B-B14F-4D97-AF65-F5344CB8AC3E}">
+        <p14:creationId xmlns:p14="http://schemas.microsoft.com/office/powerpoint/2010/main" val="1024086991"/>
+      </p:ext>
+    </p:extLst>
+  </p:cSld>
+  <p:clrMapOvr>
+    <a:masterClrMapping/>
+  </p:clrMapOvr>
+</p:notes>
+</file>
+
+<file path=ppt/notesSlides/notesSlide16.xml><?xml version="1.0" encoding="utf-8"?>
+<p:notes xmlns:a="http://schemas.openxmlformats.org/drawingml/2006/main" xmlns:r="http://schemas.openxmlformats.org/officeDocument/2006/relationships" xmlns:p="http://schemas.openxmlformats.org/presentationml/2006/main">
+  <p:cSld>
+    <p:spTree>
+      <p:nvGrpSpPr>
+        <p:cNvPr id="1" name=""/>
+        <p:cNvGrpSpPr/>
+        <p:nvPr/>
+      </p:nvGrpSpPr>
+      <p:grpSpPr>
+        <a:xfrm>
+          <a:off x="0" y="0"/>
+          <a:ext cx="0" cy="0"/>
+          <a:chOff x="0" y="0"/>
+          <a:chExt cx="0" cy="0"/>
+        </a:xfrm>
+      </p:grpSpPr>
+      <p:sp>
+        <p:nvSpPr>
+          <p:cNvPr id="2" name="Slide Image Placeholder 1"/>
+          <p:cNvSpPr>
+            <a:spLocks noGrp="1" noRot="1" noChangeAspect="1"/>
+          </p:cNvSpPr>
+          <p:nvPr>
+            <p:ph type="sldImg"/>
+          </p:nvPr>
+        </p:nvSpPr>
+        <p:spPr/>
+      </p:sp>
+      <p:sp>
+        <p:nvSpPr>
+          <p:cNvPr id="3" name="Notes Placeholder 2"/>
+          <p:cNvSpPr>
+            <a:spLocks noGrp="1"/>
+          </p:cNvSpPr>
+          <p:nvPr>
+            <p:ph type="body" idx="1"/>
+          </p:nvPr>
+        </p:nvSpPr>
+        <p:spPr/>
+        <p:txBody>
+          <a:bodyPr/>
+          <a:lstStyle/>
+          <a:p>
+            <a:r>
+              <a:rPr lang="en-US" dirty="0"/>
+              <a:t/>
+            </a:r>
+            <a:endParaRPr lang="en-US" dirty="0"/>
+          </a:p>
+        </p:txBody>
+      </p:sp>
+      <p:sp>
+        <p:nvSpPr>
+          <p:cNvPr id="4" name="Slide Number Placeholder 3"/>
+          <p:cNvSpPr>
+            <a:spLocks noGrp="1"/>
+          </p:cNvSpPr>
+          <p:nvPr>
+            <p:ph type="sldNum" sz="quarter" idx="10"/>
+          </p:nvPr>
+        </p:nvSpPr>
+        <p:spPr/>
+        <p:txBody>
+          <a:bodyPr/>
+          <a:lstStyle/>
+          <a:p>
+            <a:fld id="{F7021451-1387-4CA6-816F-3879F97B5CBC}" type="slidenum">
+              <a:rPr lang="en-US"/>
+              <a:t>16</a:t>
+            </a:fld>
+            <a:endParaRPr lang="en-US"/>
+          </a:p>
+        </p:txBody>
+      </p:sp>
+    </p:spTree>
+    <p:extLst>
+      <p:ext uri="{BB962C8B-B14F-4D97-AF65-F5344CB8AC3E}">
+        <p14:creationId xmlns:p14="http://schemas.microsoft.com/office/powerpoint/2010/main" val="1024086991"/>
+      </p:ext>
+    </p:extLst>
+  </p:cSld>
+  <p:clrMapOvr>
+    <a:masterClrMapping/>
+  </p:clrMapOvr>
+</p:notes>
+</file>
+
+<file path=ppt/notesSlides/notesSlide17.xml><?xml version="1.0" encoding="utf-8"?>
+<p:notes xmlns:a="http://schemas.openxmlformats.org/drawingml/2006/main" xmlns:r="http://schemas.openxmlformats.org/officeDocument/2006/relationships" xmlns:p="http://schemas.openxmlformats.org/presentationml/2006/main">
+  <p:cSld>
+    <p:spTree>
+      <p:nvGrpSpPr>
+        <p:cNvPr id="1" name=""/>
+        <p:cNvGrpSpPr/>
+        <p:nvPr/>
+      </p:nvGrpSpPr>
+      <p:grpSpPr>
+        <a:xfrm>
+          <a:off x="0" y="0"/>
+          <a:ext cx="0" cy="0"/>
+          <a:chOff x="0" y="0"/>
+          <a:chExt cx="0" cy="0"/>
+        </a:xfrm>
+      </p:grpSpPr>
+      <p:sp>
+        <p:nvSpPr>
+          <p:cNvPr id="2" name="Slide Image Placeholder 1"/>
+          <p:cNvSpPr>
+            <a:spLocks noGrp="1" noRot="1" noChangeAspect="1"/>
+          </p:cNvSpPr>
+          <p:nvPr>
+            <p:ph type="sldImg"/>
+          </p:nvPr>
+        </p:nvSpPr>
+        <p:spPr/>
+      </p:sp>
+      <p:sp>
+        <p:nvSpPr>
+          <p:cNvPr id="3" name="Notes Placeholder 2"/>
+          <p:cNvSpPr>
+            <a:spLocks noGrp="1"/>
+          </p:cNvSpPr>
+          <p:nvPr>
+            <p:ph type="body" idx="1"/>
+          </p:nvPr>
+        </p:nvSpPr>
+        <p:spPr/>
+        <p:txBody>
+          <a:bodyPr/>
+          <a:lstStyle/>
+          <a:p>
+            <a:r>
+              <a:rPr lang="en-US" dirty="0"/>
+              <a:t/>
+            </a:r>
+            <a:endParaRPr lang="en-US" dirty="0"/>
+          </a:p>
+        </p:txBody>
+      </p:sp>
+      <p:sp>
+        <p:nvSpPr>
+          <p:cNvPr id="4" name="Slide Number Placeholder 3"/>
+          <p:cNvSpPr>
+            <a:spLocks noGrp="1"/>
+          </p:cNvSpPr>
+          <p:nvPr>
+            <p:ph type="sldNum" sz="quarter" idx="10"/>
+          </p:nvPr>
+        </p:nvSpPr>
+        <p:spPr/>
+        <p:txBody>
+          <a:bodyPr/>
+          <a:lstStyle/>
+          <a:p>
+            <a:fld id="{F7021451-1387-4CA6-816F-3879F97B5CBC}" type="slidenum">
+              <a:rPr lang="en-US"/>
+              <a:t>17</a:t>
+            </a:fld>
+            <a:endParaRPr lang="en-US"/>
+          </a:p>
+        </p:txBody>
+      </p:sp>
+    </p:spTree>
+    <p:extLst>
+      <p:ext uri="{BB962C8B-B14F-4D97-AF65-F5344CB8AC3E}">
+        <p14:creationId xmlns:p14="http://schemas.microsoft.com/office/powerpoint/2010/main" val="1024086991"/>
+      </p:ext>
+    </p:extLst>
+  </p:cSld>
+  <p:clrMapOvr>
+    <a:masterClrMapping/>
+  </p:clrMapOvr>
+</p:notes>
+</file>
+
+<file path=ppt/notesSlides/notesSlide18.xml><?xml version="1.0" encoding="utf-8"?>
+<p:notes xmlns:a="http://schemas.openxmlformats.org/drawingml/2006/main" xmlns:r="http://schemas.openxmlformats.org/officeDocument/2006/relationships" xmlns:p="http://schemas.openxmlformats.org/presentationml/2006/main">
+  <p:cSld>
+    <p:spTree>
+      <p:nvGrpSpPr>
+        <p:cNvPr id="1" name=""/>
+        <p:cNvGrpSpPr/>
+        <p:nvPr/>
+      </p:nvGrpSpPr>
+      <p:grpSpPr>
+        <a:xfrm>
+          <a:off x="0" y="0"/>
+          <a:ext cx="0" cy="0"/>
+          <a:chOff x="0" y="0"/>
+          <a:chExt cx="0" cy="0"/>
+        </a:xfrm>
+      </p:grpSpPr>
+      <p:sp>
+        <p:nvSpPr>
+          <p:cNvPr id="2" name="Slide Image Placeholder 1"/>
+          <p:cNvSpPr>
+            <a:spLocks noGrp="1" noRot="1" noChangeAspect="1"/>
+          </p:cNvSpPr>
+          <p:nvPr>
+            <p:ph type="sldImg"/>
+          </p:nvPr>
+        </p:nvSpPr>
+        <p:spPr/>
+      </p:sp>
+      <p:sp>
+        <p:nvSpPr>
+          <p:cNvPr id="3" name="Notes Placeholder 2"/>
+          <p:cNvSpPr>
+            <a:spLocks noGrp="1"/>
+          </p:cNvSpPr>
+          <p:nvPr>
+            <p:ph type="body" idx="1"/>
+          </p:nvPr>
+        </p:nvSpPr>
+        <p:spPr/>
+        <p:txBody>
+          <a:bodyPr/>
+          <a:lstStyle/>
+          <a:p>
+            <a:r>
+              <a:rPr lang="en-US" dirty="0"/>
+              <a:t/>
+            </a:r>
+            <a:endParaRPr lang="en-US" dirty="0"/>
+          </a:p>
+        </p:txBody>
+      </p:sp>
+      <p:sp>
+        <p:nvSpPr>
+          <p:cNvPr id="4" name="Slide Number Placeholder 3"/>
+          <p:cNvSpPr>
+            <a:spLocks noGrp="1"/>
+          </p:cNvSpPr>
+          <p:nvPr>
+            <p:ph type="sldNum" sz="quarter" idx="10"/>
+          </p:nvPr>
+        </p:nvSpPr>
+        <p:spPr/>
+        <p:txBody>
+          <a:bodyPr/>
+          <a:lstStyle/>
+          <a:p>
+            <a:fld id="{F7021451-1387-4CA6-816F-3879F97B5CBC}" type="slidenum">
+              <a:rPr lang="en-US"/>
+              <a:t>18</a:t>
+            </a:fld>
+            <a:endParaRPr lang="en-US"/>
+          </a:p>
+        </p:txBody>
+      </p:sp>
+    </p:spTree>
+    <p:extLst>
+      <p:ext uri="{BB962C8B-B14F-4D97-AF65-F5344CB8AC3E}">
+        <p14:creationId xmlns:p14="http://schemas.microsoft.com/office/powerpoint/2010/main" val="1024086991"/>
+      </p:ext>
+    </p:extLst>
+  </p:cSld>
+  <p:clrMapOvr>
+    <a:masterClrMapping/>
+  </p:clrMapOvr>
+</p:notes>
+</file>
+
+<file path=ppt/notesSlides/notesSlide19.xml><?xml version="1.0" encoding="utf-8"?>
+<p:notes xmlns:a="http://schemas.openxmlformats.org/drawingml/2006/main" xmlns:r="http://schemas.openxmlformats.org/officeDocument/2006/relationships" xmlns:p="http://schemas.openxmlformats.org/presentationml/2006/main">
+  <p:cSld>
+    <p:spTree>
+      <p:nvGrpSpPr>
+        <p:cNvPr id="1" name=""/>
+        <p:cNvGrpSpPr/>
+        <p:nvPr/>
+      </p:nvGrpSpPr>
+      <p:grpSpPr>
+        <a:xfrm>
+          <a:off x="0" y="0"/>
+          <a:ext cx="0" cy="0"/>
+          <a:chOff x="0" y="0"/>
+          <a:chExt cx="0" cy="0"/>
+        </a:xfrm>
+      </p:grpSpPr>
+      <p:sp>
+        <p:nvSpPr>
+          <p:cNvPr id="2" name="Slide Image Placeholder 1"/>
+          <p:cNvSpPr>
+            <a:spLocks noGrp="1" noRot="1" noChangeAspect="1"/>
+          </p:cNvSpPr>
+          <p:nvPr>
+            <p:ph type="sldImg"/>
+          </p:nvPr>
+        </p:nvSpPr>
+        <p:spPr/>
+      </p:sp>
+      <p:sp>
+        <p:nvSpPr>
+          <p:cNvPr id="3" name="Notes Placeholder 2"/>
+          <p:cNvSpPr>
+            <a:spLocks noGrp="1"/>
+          </p:cNvSpPr>
+          <p:nvPr>
+            <p:ph type="body" idx="1"/>
+          </p:nvPr>
+        </p:nvSpPr>
+        <p:spPr/>
+        <p:txBody>
+          <a:bodyPr/>
+          <a:lstStyle/>
+          <a:p>
+            <a:r>
+              <a:rPr lang="en-US" dirty="0"/>
+              <a:t/>
+            </a:r>
+            <a:endParaRPr lang="en-US" dirty="0"/>
+          </a:p>
+        </p:txBody>
+      </p:sp>
+      <p:sp>
+        <p:nvSpPr>
+          <p:cNvPr id="4" name="Slide Number Placeholder 3"/>
+          <p:cNvSpPr>
+            <a:spLocks noGrp="1"/>
+          </p:cNvSpPr>
+          <p:nvPr>
+            <p:ph type="sldNum" sz="quarter" idx="10"/>
+          </p:nvPr>
+        </p:nvSpPr>
+        <p:spPr/>
+        <p:txBody>
+          <a:bodyPr/>
+          <a:lstStyle/>
+          <a:p>
+            <a:fld id="{F7021451-1387-4CA6-816F-3879F97B5CBC}" type="slidenum">
+              <a:rPr lang="en-US"/>
+              <a:t>19</a:t>
+            </a:fld>
+            <a:endParaRPr lang="en-US"/>
+          </a:p>
+        </p:txBody>
+      </p:sp>
+    </p:spTree>
+    <p:extLst>
+      <p:ext uri="{BB962C8B-B14F-4D97-AF65-F5344CB8AC3E}">
+        <p14:creationId xmlns:p14="http://schemas.microsoft.com/office/powerpoint/2010/main" val="1024086991"/>
+      </p:ext>
+    </p:extLst>
+  </p:cSld>
+  <p:clrMapOvr>
+    <a:masterClrMapping/>
+  </p:clrMapOvr>
+</p:notes>
+</file>
+
 <file path=ppt/notesSlides/notesSlide2.xml><?xml version="1.0" encoding="utf-8"?>
 <p:notes xmlns:a="http://schemas.openxmlformats.org/drawingml/2006/main" xmlns:r="http://schemas.openxmlformats.org/officeDocument/2006/relationships" xmlns:p="http://schemas.openxmlformats.org/presentationml/2006/main">
   <p:cSld>
@@ -978,6 +1514,182 @@
             <a:fld id="{F7021451-1387-4CA6-816F-3879F97B5CBC}" type="slidenum">
               <a:rPr lang="en-US"/>
               <a:t>2</a:t>
+            </a:fld>
+            <a:endParaRPr lang="en-US"/>
+          </a:p>
+        </p:txBody>
+      </p:sp>
+    </p:spTree>
+    <p:extLst>
+      <p:ext uri="{BB962C8B-B14F-4D97-AF65-F5344CB8AC3E}">
+        <p14:creationId xmlns:p14="http://schemas.microsoft.com/office/powerpoint/2010/main" val="1024086991"/>
+      </p:ext>
+    </p:extLst>
+  </p:cSld>
+  <p:clrMapOvr>
+    <a:masterClrMapping/>
+  </p:clrMapOvr>
+</p:notes>
+</file>
+
+<file path=ppt/notesSlides/notesSlide20.xml><?xml version="1.0" encoding="utf-8"?>
+<p:notes xmlns:a="http://schemas.openxmlformats.org/drawingml/2006/main" xmlns:r="http://schemas.openxmlformats.org/officeDocument/2006/relationships" xmlns:p="http://schemas.openxmlformats.org/presentationml/2006/main">
+  <p:cSld>
+    <p:spTree>
+      <p:nvGrpSpPr>
+        <p:cNvPr id="1" name=""/>
+        <p:cNvGrpSpPr/>
+        <p:nvPr/>
+      </p:nvGrpSpPr>
+      <p:grpSpPr>
+        <a:xfrm>
+          <a:off x="0" y="0"/>
+          <a:ext cx="0" cy="0"/>
+          <a:chOff x="0" y="0"/>
+          <a:chExt cx="0" cy="0"/>
+        </a:xfrm>
+      </p:grpSpPr>
+      <p:sp>
+        <p:nvSpPr>
+          <p:cNvPr id="2" name="Slide Image Placeholder 1"/>
+          <p:cNvSpPr>
+            <a:spLocks noGrp="1" noRot="1" noChangeAspect="1"/>
+          </p:cNvSpPr>
+          <p:nvPr>
+            <p:ph type="sldImg"/>
+          </p:nvPr>
+        </p:nvSpPr>
+        <p:spPr/>
+      </p:sp>
+      <p:sp>
+        <p:nvSpPr>
+          <p:cNvPr id="3" name="Notes Placeholder 2"/>
+          <p:cNvSpPr>
+            <a:spLocks noGrp="1"/>
+          </p:cNvSpPr>
+          <p:nvPr>
+            <p:ph type="body" idx="1"/>
+          </p:nvPr>
+        </p:nvSpPr>
+        <p:spPr/>
+        <p:txBody>
+          <a:bodyPr/>
+          <a:lstStyle/>
+          <a:p>
+            <a:r>
+              <a:rPr lang="en-US" dirty="0"/>
+              <a:t/>
+            </a:r>
+            <a:endParaRPr lang="en-US" dirty="0"/>
+          </a:p>
+        </p:txBody>
+      </p:sp>
+      <p:sp>
+        <p:nvSpPr>
+          <p:cNvPr id="4" name="Slide Number Placeholder 3"/>
+          <p:cNvSpPr>
+            <a:spLocks noGrp="1"/>
+          </p:cNvSpPr>
+          <p:nvPr>
+            <p:ph type="sldNum" sz="quarter" idx="10"/>
+          </p:nvPr>
+        </p:nvSpPr>
+        <p:spPr/>
+        <p:txBody>
+          <a:bodyPr/>
+          <a:lstStyle/>
+          <a:p>
+            <a:fld id="{F7021451-1387-4CA6-816F-3879F97B5CBC}" type="slidenum">
+              <a:rPr lang="en-US"/>
+              <a:t>20</a:t>
+            </a:fld>
+            <a:endParaRPr lang="en-US"/>
+          </a:p>
+        </p:txBody>
+      </p:sp>
+    </p:spTree>
+    <p:extLst>
+      <p:ext uri="{BB962C8B-B14F-4D97-AF65-F5344CB8AC3E}">
+        <p14:creationId xmlns:p14="http://schemas.microsoft.com/office/powerpoint/2010/main" val="1024086991"/>
+      </p:ext>
+    </p:extLst>
+  </p:cSld>
+  <p:clrMapOvr>
+    <a:masterClrMapping/>
+  </p:clrMapOvr>
+</p:notes>
+</file>
+
+<file path=ppt/notesSlides/notesSlide21.xml><?xml version="1.0" encoding="utf-8"?>
+<p:notes xmlns:a="http://schemas.openxmlformats.org/drawingml/2006/main" xmlns:r="http://schemas.openxmlformats.org/officeDocument/2006/relationships" xmlns:p="http://schemas.openxmlformats.org/presentationml/2006/main">
+  <p:cSld>
+    <p:spTree>
+      <p:nvGrpSpPr>
+        <p:cNvPr id="1" name=""/>
+        <p:cNvGrpSpPr/>
+        <p:nvPr/>
+      </p:nvGrpSpPr>
+      <p:grpSpPr>
+        <a:xfrm>
+          <a:off x="0" y="0"/>
+          <a:ext cx="0" cy="0"/>
+          <a:chOff x="0" y="0"/>
+          <a:chExt cx="0" cy="0"/>
+        </a:xfrm>
+      </p:grpSpPr>
+      <p:sp>
+        <p:nvSpPr>
+          <p:cNvPr id="2" name="Slide Image Placeholder 1"/>
+          <p:cNvSpPr>
+            <a:spLocks noGrp="1" noRot="1" noChangeAspect="1"/>
+          </p:cNvSpPr>
+          <p:nvPr>
+            <p:ph type="sldImg"/>
+          </p:nvPr>
+        </p:nvSpPr>
+        <p:spPr/>
+      </p:sp>
+      <p:sp>
+        <p:nvSpPr>
+          <p:cNvPr id="3" name="Notes Placeholder 2"/>
+          <p:cNvSpPr>
+            <a:spLocks noGrp="1"/>
+          </p:cNvSpPr>
+          <p:nvPr>
+            <p:ph type="body" idx="1"/>
+          </p:nvPr>
+        </p:nvSpPr>
+        <p:spPr/>
+        <p:txBody>
+          <a:bodyPr/>
+          <a:lstStyle/>
+          <a:p>
+            <a:r>
+              <a:rPr lang="en-US" dirty="0"/>
+              <a:t/>
+            </a:r>
+            <a:endParaRPr lang="en-US" dirty="0"/>
+          </a:p>
+        </p:txBody>
+      </p:sp>
+      <p:sp>
+        <p:nvSpPr>
+          <p:cNvPr id="4" name="Slide Number Placeholder 3"/>
+          <p:cNvSpPr>
+            <a:spLocks noGrp="1"/>
+          </p:cNvSpPr>
+          <p:nvPr>
+            <p:ph type="sldNum" sz="quarter" idx="10"/>
+          </p:nvPr>
+        </p:nvSpPr>
+        <p:spPr/>
+        <p:txBody>
+          <a:bodyPr/>
+          <a:lstStyle/>
+          <a:p>
+            <a:fld id="{F7021451-1387-4CA6-816F-3879F97B5CBC}" type="slidenum">
+              <a:rPr lang="en-US"/>
+              <a:t>21</a:t>
             </a:fld>
             <a:endParaRPr lang="en-US"/>
           </a:p>
@@ -2235,102 +2947,6 @@
         </p:nvSpPr>
         <p:spPr>
           <a:xfrm>
-            <a:off x="406301" y="1223963"/>
-            <a:ext cx="8498026" cy="274290"/>
-          </a:xfrm>
-          <a:prstGeom prst="rect">
-            <a:avLst/>
-          </a:prstGeom>
-          <a:noFill/>
-          <a:ln/>
-        </p:spPr>
-        <p:txBody>
-          <a:bodyPr wrap="square" lIns="0" tIns="0" rIns="0" bIns="0" rtlCol="0" anchor="t"/>
-          <a:lstStyle/>
-          <a:p>
-            <a:pPr algn="l" indent="0" marL="0">
-              <a:lnSpc>
-                <a:spcPts val="2160"/>
-              </a:lnSpc>
-              <a:spcBef>
-                <a:spcPts val="600"/>
-              </a:spcBef>
-              <a:spcAft>
-                <a:spcPts val="800"/>
-              </a:spcAft>
-              <a:buNone/>
-            </a:pPr>
-            <a:r>
-              <a:rPr lang="en-US" sz="1800" b="1" dirty="0">
-                <a:solidFill>
-                  <a:srgbClr val="FE4447"/>
-                </a:solidFill>
-                <a:latin typeface="Georgia" pitchFamily="34" charset="0"/>
-                <a:ea typeface="Georgia" pitchFamily="34" charset="-122"/>
-                <a:cs typeface="Georgia" pitchFamily="34" charset="-120"/>
-              </a:rPr>
-              <a:t>Learning objective</a:t>
-            </a:r>
-            <a:endParaRPr lang="en-US" sz="1800" dirty="0"/>
-          </a:p>
-        </p:txBody>
-      </p:sp>
-      <p:sp>
-        <p:nvSpPr>
-          <p:cNvPr id="6" name="Text 4"/>
-          <p:cNvSpPr/>
-          <p:nvPr/>
-        </p:nvSpPr>
-        <p:spPr>
-          <a:xfrm>
-            <a:off x="406301" y="1637854"/>
-            <a:ext cx="8498026" cy="426541"/>
-          </a:xfrm>
-          <a:prstGeom prst="rect">
-            <a:avLst/>
-          </a:prstGeom>
-          <a:noFill/>
-          <a:ln/>
-        </p:spPr>
-        <p:txBody>
-          <a:bodyPr wrap="square" lIns="0" tIns="0" rIns="0" bIns="0" rtlCol="0" anchor="t"/>
-          <a:lstStyle/>
-          <a:p>
-            <a:pPr algn="l" indent="0" marL="0">
-              <a:lnSpc>
-                <a:spcPts val="1680"/>
-              </a:lnSpc>
-              <a:spcBef>
-                <a:spcPts val="300"/>
-              </a:spcBef>
-              <a:spcAft>
-                <a:spcPts val="300"/>
-              </a:spcAft>
-              <a:buNone/>
-            </a:pPr>
-            <a:r>
-              <a:rPr lang="en-US" sz="1200" dirty="0">
-                <a:solidFill>
-                  <a:srgbClr val="1C2833"/>
-                </a:solidFill>
-                <a:latin typeface="Arial" pitchFamily="34" charset="0"/>
-                <a:ea typeface="Arial" pitchFamily="34" charset="-122"/>
-                <a:cs typeface="Arial" pitchFamily="34" charset="-120"/>
-              </a:rPr>
-              <a:t>By the end of this lesson, students will correctly handle the carry case in 2-digit × 11 (where the digit sum ≥ 10), including problems like 87 × 11 = 957, in under 5 seconds.</a:t>
-            </a:r>
-            <a:endParaRPr lang="en-US" sz="1200" dirty="0"/>
-          </a:p>
-        </p:txBody>
-      </p:sp>
-      <p:sp>
-        <p:nvSpPr>
-          <p:cNvPr id="7" name="Text 5"/>
-          <p:cNvSpPr/>
-          <p:nvPr/>
-        </p:nvSpPr>
-        <p:spPr>
-          <a:xfrm>
             <a:off x="406301" y="4434929"/>
             <a:ext cx="8498026" cy="213271"/>
           </a:xfrm>
@@ -2475,7 +3091,7 @@
                 <a:ea typeface="Georgia" pitchFamily="34" charset="-122"/>
                 <a:cs typeface="Georgia" pitchFamily="34" charset="-120"/>
               </a:rPr>
-              <a:t>Homework</a:t>
+              <a:t>Core (15 min) — The carry case (cont.)</a:t>
             </a:r>
             <a:endParaRPr lang="en-US" sz="1800" dirty="0"/>
           </a:p>
@@ -2490,7 +3106,7 @@
         <p:spPr>
           <a:xfrm>
             <a:off x="406301" y="870942"/>
-            <a:ext cx="8498026" cy="426541"/>
+            <a:ext cx="8498026" cy="213271"/>
           </a:xfrm>
           <a:prstGeom prst="rect">
             <a:avLst/>
@@ -2523,7 +3139,53 @@
                 <a:ea typeface="Arial" pitchFamily="34" charset="-122"/>
                 <a:cs typeface="Arial" pitchFamily="34" charset="-120"/>
               </a:rPr>
-              <a:t>– 8 mental ×11 problems (carry case): 76, 84, 85, 88, 93, 96, 67, 78 — multiplied by 11. Write the answers. – Time yourself. Goal: under 30 seconds total.</a:t>
+              <a:t>Check: 87 × 11 = 870 + 87 = </a:t>
+            </a:r>
+            <a:pPr algn="l" indent="0" marL="0">
+              <a:lnSpc>
+                <a:spcPts val="1680"/>
+              </a:lnSpc>
+              <a:spcBef>
+                <a:spcPts val="300"/>
+              </a:spcBef>
+              <a:spcAft>
+                <a:spcPts val="300"/>
+              </a:spcAft>
+              <a:buNone/>
+            </a:pPr>
+            <a:r>
+              <a:rPr lang="en-US" sz="1200" b="1" dirty="0">
+                <a:solidFill>
+                  <a:srgbClr val="1C2833"/>
+                </a:solidFill>
+                <a:latin typeface="Arial" pitchFamily="34" charset="0"/>
+                <a:ea typeface="Arial" pitchFamily="34" charset="-122"/>
+                <a:cs typeface="Arial" pitchFamily="34" charset="-120"/>
+              </a:rPr>
+              <a:t>957</a:t>
+            </a:r>
+            <a:pPr algn="l" indent="0" marL="0">
+              <a:lnSpc>
+                <a:spcPts val="1680"/>
+              </a:lnSpc>
+              <a:spcBef>
+                <a:spcPts val="300"/>
+              </a:spcBef>
+              <a:spcAft>
+                <a:spcPts val="300"/>
+              </a:spcAft>
+              <a:buNone/>
+            </a:pPr>
+            <a:r>
+              <a:rPr lang="en-US" sz="1200" dirty="0">
+                <a:solidFill>
+                  <a:srgbClr val="1C2833"/>
+                </a:solidFill>
+                <a:latin typeface="Arial" pitchFamily="34" charset="0"/>
+                <a:ea typeface="Arial" pitchFamily="34" charset="-122"/>
+                <a:cs typeface="Arial" pitchFamily="34" charset="-120"/>
+              </a:rPr>
+              <a:t>. ✓</a:t>
             </a:r>
             <a:endParaRPr lang="en-US" sz="1200" dirty="0"/>
           </a:p>
@@ -2532,6 +3194,52 @@
       <p:sp>
         <p:nvSpPr>
           <p:cNvPr id="5" name="Text 3"/>
+          <p:cNvSpPr/>
+          <p:nvPr/>
+        </p:nvSpPr>
+        <p:spPr>
+          <a:xfrm>
+            <a:off x="634901" y="1173063"/>
+            <a:ext cx="8102798" cy="281880"/>
+          </a:xfrm>
+          <a:prstGeom prst="rect">
+            <a:avLst/>
+          </a:prstGeom>
+          <a:noFill/>
+          <a:ln/>
+        </p:spPr>
+        <p:txBody>
+          <a:bodyPr wrap="square" lIns="0" tIns="0" rIns="0" bIns="0" rtlCol="0" anchor="t"/>
+          <a:lstStyle/>
+          <a:p>
+            <a:pPr algn="l" marL="342900" indent="-342900">
+              <a:lnSpc>
+                <a:spcPts val="1620"/>
+              </a:lnSpc>
+              <a:spcAft>
+                <a:spcPts val="300"/>
+              </a:spcAft>
+              <a:buSzPct val="100000"/>
+              <a:buChar char="•"/>
+            </a:pPr>
+            <a:r>
+              <a:rPr lang="en-US" sz="1200" b="1" dirty="0">
+                <a:solidFill>
+                  <a:srgbClr val="1C2833"/>
+                </a:solidFill>
+                <a:latin typeface="Arial" pitchFamily="34" charset="0"/>
+                <a:ea typeface="Arial" pitchFamily="34" charset="-122"/>
+                <a:cs typeface="Arial" pitchFamily="34" charset="-120"/>
+              </a:rPr>
+              <a:t>Try 99 × 11:</a:t>
+            </a:r>
+            <a:endParaRPr lang="en-US" sz="1200" dirty="0"/>
+          </a:p>
+        </p:txBody>
+      </p:sp>
+      <p:sp>
+        <p:nvSpPr>
+          <p:cNvPr id="6" name="Text 4"/>
           <p:cNvSpPr/>
           <p:nvPr/>
         </p:nvSpPr>
@@ -2681,7 +3389,7 @@
                 <a:ea typeface="Georgia" pitchFamily="34" charset="-122"/>
                 <a:cs typeface="Georgia" pitchFamily="34" charset="-120"/>
               </a:rPr>
-              <a:t>Differentiation</a:t>
+              <a:t>Core (15 min) — The carry case (cont.)</a:t>
             </a:r>
             <a:endParaRPr lang="en-US" sz="1800" dirty="0"/>
           </a:p>
@@ -2695,111 +3403,264 @@
         </p:nvSpPr>
         <p:spPr>
           <a:xfrm>
-            <a:off x="634901" y="883593"/>
-            <a:ext cx="8102798" cy="731341"/>
-          </a:xfrm>
-          <a:prstGeom prst="rect">
+            <a:off x="406301" y="883593"/>
+            <a:ext cx="8331398" cy="1126778"/>
+          </a:xfrm>
+          <a:prstGeom prst="rect">
+            <a:avLst/>
+          </a:prstGeom>
+          <a:solidFill>
+            <a:srgbClr val="F4F8F9"/>
+          </a:solidFill>
+          <a:ln/>
+        </p:spPr>
+        <p:txBody>
+          <a:bodyPr wrap="square" rtlCol="0" anchor="ctr"/>
+          <a:lstStyle/>
+          <a:p>
+            <a:pPr indent="0" marL="0">
+              <a:buNone/>
+            </a:pPr>
+            <a:endParaRPr lang="en-US" dirty="0"/>
+          </a:p>
+        </p:txBody>
+      </p:sp>
+      <p:sp>
+        <p:nvSpPr>
+          <p:cNvPr id="5" name="Shape 3"/>
+          <p:cNvSpPr/>
+          <p:nvPr/>
+        </p:nvSpPr>
+        <p:spPr>
+          <a:xfrm>
+            <a:off x="430113" y="883593"/>
+            <a:ext cx="0" cy="1126778"/>
+          </a:xfrm>
+          <a:prstGeom prst="line">
             <a:avLst/>
           </a:prstGeom>
           <a:noFill/>
+          <a:ln w="47625">
+            <a:solidFill>
+              <a:srgbClr val="277884"/>
+            </a:solidFill>
+            <a:prstDash val="solid"/>
+          </a:ln>
+        </p:spPr>
+      </p:sp>
+      <p:sp>
+        <p:nvSpPr>
+          <p:cNvPr id="6" name="Text 4"/>
+          <p:cNvSpPr/>
+          <p:nvPr/>
+        </p:nvSpPr>
+        <p:spPr>
+          <a:xfrm>
+            <a:off x="631627" y="1010543"/>
+            <a:ext cx="8086939" cy="174575"/>
+          </a:xfrm>
+          <a:prstGeom prst="rect">
+            <a:avLst/>
+          </a:prstGeom>
+          <a:noFill/>
           <a:ln/>
         </p:spPr>
         <p:txBody>
           <a:bodyPr wrap="square" lIns="0" tIns="0" rIns="0" bIns="0" rtlCol="0" anchor="t"/>
           <a:lstStyle/>
           <a:p>
-            <a:pPr algn="l" marL="342900" indent="-342900">
-              <a:lnSpc>
-                <a:spcPts val="1620"/>
-              </a:lnSpc>
-              <a:spcAft>
-                <a:spcPts val="300"/>
-              </a:spcAft>
-              <a:buSzPct val="100000"/>
-              <a:buChar char="•"/>
-            </a:pPr>
-            <a:r>
-              <a:rPr lang="en-US" sz="1200" b="1" dirty="0">
-                <a:solidFill>
-                  <a:srgbClr val="1C2833"/>
-                </a:solidFill>
-                <a:latin typeface="Arial" pitchFamily="34" charset="0"/>
-                <a:ea typeface="Arial" pitchFamily="34" charset="-122"/>
-                <a:cs typeface="Arial" pitchFamily="34" charset="-120"/>
-              </a:rPr>
-              <a:t>Tier up:</a:t>
-            </a:r>
-            <a:pPr algn="l" indent="0" marL="0">
-              <a:lnSpc>
-                <a:spcPts val="1620"/>
-              </a:lnSpc>
-              <a:spcAft>
-                <a:spcPts val="300"/>
-              </a:spcAft>
-              <a:buNone/>
-            </a:pPr>
-            <a:r>
-              <a:rPr lang="en-US" sz="1200" dirty="0">
-                <a:solidFill>
-                  <a:srgbClr val="1C2833"/>
-                </a:solidFill>
-                <a:latin typeface="Arial" pitchFamily="34" charset="0"/>
-                <a:ea typeface="Arial" pitchFamily="34" charset="-122"/>
-                <a:cs typeface="Arial" pitchFamily="34" charset="-120"/>
-              </a:rPr>
-              <a:t> Find a 2-digit number where the trick gives a 4-digit answer (i.e. 99 × 11 = 1089). Can you find any others, or is 99 unique? Justify.</a:t>
-            </a:r>
-            <a:endParaRPr lang="en-US" sz="1200" dirty="0"/>
-          </a:p>
-          <a:p>
-            <a:pPr algn="l" marL="342900" indent="-342900">
-              <a:lnSpc>
-                <a:spcPts val="1620"/>
-              </a:lnSpc>
-              <a:spcAft>
-                <a:spcPts val="300"/>
-              </a:spcAft>
-              <a:buSzPct val="100000"/>
-              <a:buChar char="•"/>
-            </a:pPr>
-            <a:r>
-              <a:rPr lang="en-US" sz="1200" b="1" dirty="0">
-                <a:solidFill>
-                  <a:srgbClr val="1C2833"/>
-                </a:solidFill>
-                <a:latin typeface="Arial" pitchFamily="34" charset="0"/>
-                <a:ea typeface="Arial" pitchFamily="34" charset="-122"/>
-                <a:cs typeface="Arial" pitchFamily="34" charset="-120"/>
-              </a:rPr>
-              <a:t>Tier down:</a:t>
-            </a:r>
-            <a:pPr algn="l" indent="0" marL="0">
-              <a:lnSpc>
-                <a:spcPts val="1620"/>
-              </a:lnSpc>
-              <a:spcAft>
-                <a:spcPts val="300"/>
-              </a:spcAft>
-              <a:buNone/>
-            </a:pPr>
-            <a:r>
-              <a:rPr lang="en-US" sz="1200" dirty="0">
-                <a:solidFill>
-                  <a:srgbClr val="1C2833"/>
-                </a:solidFill>
-                <a:latin typeface="Arial" pitchFamily="34" charset="0"/>
-                <a:ea typeface="Arial" pitchFamily="34" charset="-122"/>
-                <a:cs typeface="Arial" pitchFamily="34" charset="-120"/>
-              </a:rPr>
-              <a:t> Solve only the no-carry problems on the worksheet today. We'll cement carries on Day 4.</a:t>
-            </a:r>
-            <a:endParaRPr lang="en-US" sz="1200" dirty="0"/>
-          </a:p>
-        </p:txBody>
-      </p:sp>
-      <p:sp>
-        <p:nvSpPr>
-          <p:cNvPr id="5" name="Text 3"/>
+            <a:pPr algn="l" indent="0" marL="0">
+              <a:lnSpc>
+                <a:spcPts val="1375"/>
+              </a:lnSpc>
+              <a:buNone/>
+            </a:pPr>
+            <a:r>
+              <a:rPr lang="en-US" sz="1100" dirty="0">
+                <a:solidFill>
+                  <a:srgbClr val="1C2833"/>
+                </a:solidFill>
+                <a:latin typeface="Courier New" pitchFamily="34" charset="0"/>
+                <a:ea typeface="Courier New" pitchFamily="34" charset="-122"/>
+                <a:cs typeface="Courier New" pitchFamily="34" charset="-120"/>
+              </a:rPr>
+              <a:t>9 _ 9</a:t>
+            </a:r>
+            <a:endParaRPr lang="en-US" sz="1100" dirty="0"/>
+          </a:p>
+        </p:txBody>
+      </p:sp>
+      <p:sp>
+        <p:nvSpPr>
+          <p:cNvPr id="7" name="Text 5"/>
+          <p:cNvSpPr/>
+          <p:nvPr/>
+        </p:nvSpPr>
+        <p:spPr>
+          <a:xfrm>
+            <a:off x="631627" y="1185118"/>
+            <a:ext cx="8086939" cy="174575"/>
+          </a:xfrm>
+          <a:prstGeom prst="rect">
+            <a:avLst/>
+          </a:prstGeom>
+          <a:noFill/>
+          <a:ln/>
+        </p:spPr>
+        <p:txBody>
+          <a:bodyPr wrap="square" lIns="0" tIns="0" rIns="0" bIns="0" rtlCol="0" anchor="t"/>
+          <a:lstStyle/>
+          <a:p>
+            <a:pPr algn="l" indent="0" marL="0">
+              <a:lnSpc>
+                <a:spcPts val="1375"/>
+              </a:lnSpc>
+              <a:buNone/>
+            </a:pPr>
+            <a:r>
+              <a:rPr lang="en-US" sz="1100" dirty="0">
+                <a:solidFill>
+                  <a:srgbClr val="1C2833"/>
+                </a:solidFill>
+                <a:latin typeface="Courier New" pitchFamily="34" charset="0"/>
+                <a:ea typeface="Courier New" pitchFamily="34" charset="-122"/>
+                <a:cs typeface="Courier New" pitchFamily="34" charset="-120"/>
+              </a:rPr>
+              <a:t>9 + 9 = 18</a:t>
+            </a:r>
+            <a:endParaRPr lang="en-US" sz="1100" dirty="0"/>
+          </a:p>
+        </p:txBody>
+      </p:sp>
+      <p:sp>
+        <p:nvSpPr>
+          <p:cNvPr id="8" name="Text 6"/>
+          <p:cNvSpPr/>
+          <p:nvPr/>
+        </p:nvSpPr>
+        <p:spPr>
+          <a:xfrm>
+            <a:off x="631627" y="1359694"/>
+            <a:ext cx="8086939" cy="174575"/>
+          </a:xfrm>
+          <a:prstGeom prst="rect">
+            <a:avLst/>
+          </a:prstGeom>
+          <a:noFill/>
+          <a:ln/>
+        </p:spPr>
+        <p:txBody>
+          <a:bodyPr wrap="square" lIns="0" tIns="0" rIns="0" bIns="0" rtlCol="0" anchor="t"/>
+          <a:lstStyle/>
+          <a:p>
+            <a:pPr algn="l" indent="0" marL="0">
+              <a:lnSpc>
+                <a:spcPts val="1375"/>
+              </a:lnSpc>
+              <a:buNone/>
+            </a:pPr>
+            <a:r>
+              <a:rPr lang="en-US" sz="1100" dirty="0">
+                <a:solidFill>
+                  <a:srgbClr val="1C2833"/>
+                </a:solidFill>
+                <a:latin typeface="Courier New" pitchFamily="34" charset="0"/>
+                <a:ea typeface="Courier New" pitchFamily="34" charset="-122"/>
+                <a:cs typeface="Courier New" pitchFamily="34" charset="-120"/>
+              </a:rPr>
+              <a:t>Middle = 8; carry 1 into the 9 → 10.</a:t>
+            </a:r>
+            <a:endParaRPr lang="en-US" sz="1100" dirty="0"/>
+          </a:p>
+        </p:txBody>
+      </p:sp>
+      <p:sp>
+        <p:nvSpPr>
+          <p:cNvPr id="9" name="Text 7"/>
+          <p:cNvSpPr/>
+          <p:nvPr/>
+        </p:nvSpPr>
+        <p:spPr>
+          <a:xfrm>
+            <a:off x="631627" y="1534269"/>
+            <a:ext cx="8086939" cy="174575"/>
+          </a:xfrm>
+          <a:prstGeom prst="rect">
+            <a:avLst/>
+          </a:prstGeom>
+          <a:noFill/>
+          <a:ln/>
+        </p:spPr>
+        <p:txBody>
+          <a:bodyPr wrap="square" lIns="0" tIns="0" rIns="0" bIns="0" rtlCol="0" anchor="t"/>
+          <a:lstStyle/>
+          <a:p>
+            <a:pPr algn="l" indent="0" marL="0">
+              <a:lnSpc>
+                <a:spcPts val="1375"/>
+              </a:lnSpc>
+              <a:buNone/>
+            </a:pPr>
+            <a:r>
+              <a:rPr lang="en-US" sz="1100" dirty="0">
+                <a:solidFill>
+                  <a:srgbClr val="1C2833"/>
+                </a:solidFill>
+                <a:latin typeface="Courier New" pitchFamily="34" charset="0"/>
+                <a:ea typeface="Courier New" pitchFamily="34" charset="-122"/>
+                <a:cs typeface="Courier New" pitchFamily="34" charset="-120"/>
+              </a:rPr>
+              <a:t>But 10 isn't a single digit — so it becomes a "1" carried further: leftmost = 0, with a 1 carried to the left of that.</a:t>
+            </a:r>
+            <a:endParaRPr lang="en-US" sz="1100" dirty="0"/>
+          </a:p>
+        </p:txBody>
+      </p:sp>
+      <p:sp>
+        <p:nvSpPr>
+          <p:cNvPr id="10" name="Text 8"/>
+          <p:cNvSpPr/>
+          <p:nvPr/>
+        </p:nvSpPr>
+        <p:spPr>
+          <a:xfrm>
+            <a:off x="631627" y="1708845"/>
+            <a:ext cx="8086939" cy="174575"/>
+          </a:xfrm>
+          <a:prstGeom prst="rect">
+            <a:avLst/>
+          </a:prstGeom>
+          <a:noFill/>
+          <a:ln/>
+        </p:spPr>
+        <p:txBody>
+          <a:bodyPr wrap="square" lIns="0" tIns="0" rIns="0" bIns="0" rtlCol="0" anchor="t"/>
+          <a:lstStyle/>
+          <a:p>
+            <a:pPr algn="l" indent="0" marL="0">
+              <a:lnSpc>
+                <a:spcPts val="1375"/>
+              </a:lnSpc>
+              <a:buNone/>
+            </a:pPr>
+            <a:r>
+              <a:rPr lang="en-US" sz="1100" dirty="0">
+                <a:solidFill>
+                  <a:srgbClr val="1C2833"/>
+                </a:solidFill>
+                <a:latin typeface="Courier New" pitchFamily="34" charset="0"/>
+                <a:ea typeface="Courier New" pitchFamily="34" charset="-122"/>
+                <a:cs typeface="Courier New" pitchFamily="34" charset="-120"/>
+              </a:rPr>
+              <a:t>Answer: 1  0  8  9 → 1089.</a:t>
+            </a:r>
+            <a:endParaRPr lang="en-US" sz="1100" dirty="0"/>
+          </a:p>
+        </p:txBody>
+      </p:sp>
+      <p:sp>
+        <p:nvSpPr>
+          <p:cNvPr id="11" name="Text 9"/>
           <p:cNvSpPr/>
           <p:nvPr/>
         </p:nvSpPr>
@@ -2949,7 +3810,7 @@
                 <a:ea typeface="Georgia" pitchFamily="34" charset="-122"/>
                 <a:cs typeface="Georgia" pitchFamily="34" charset="-120"/>
               </a:rPr>
-              <a:t>Teacher notes</a:t>
+              <a:t>Core (15 min) — The carry case (cont.)</a:t>
             </a:r>
             <a:endParaRPr lang="en-US" sz="1800" dirty="0"/>
           </a:p>
@@ -2964,7 +3825,7 @@
         <p:spPr>
           <a:xfrm>
             <a:off x="406301" y="870942"/>
-            <a:ext cx="8498026" cy="1066354"/>
+            <a:ext cx="8498026" cy="213271"/>
           </a:xfrm>
           <a:prstGeom prst="rect">
             <a:avLst/>
@@ -2997,7 +3858,7 @@
                 <a:ea typeface="Arial" pitchFamily="34" charset="-122"/>
                 <a:cs typeface="Arial" pitchFamily="34" charset="-120"/>
               </a:rPr>
-              <a:t>– The most common error: students remember to write the units digit of the middle sum but </a:t>
+              <a:t>Check: 99 × 11 = 990 + 99 = </a:t>
             </a:r>
             <a:pPr algn="l" indent="0" marL="0">
               <a:lnSpc>
@@ -3020,7 +3881,7 @@
                 <a:ea typeface="Arial" pitchFamily="34" charset="-122"/>
                 <a:cs typeface="Arial" pitchFamily="34" charset="-120"/>
               </a:rPr>
-              <a:t>forget</a:t>
+              <a:t>1089</a:t>
             </a:r>
             <a:pPr algn="l" indent="0" marL="0">
               <a:lnSpc>
@@ -3043,19 +3904,42 @@
                 <a:ea typeface="Arial" pitchFamily="34" charset="-122"/>
                 <a:cs typeface="Arial" pitchFamily="34" charset="-120"/>
               </a:rPr>
-              <a:t> to add the carry into the leftmost digit. Watch for "73 × 11 = 7</a:t>
-            </a:r>
-            <a:pPr algn="l" indent="0" marL="0">
-              <a:lnSpc>
-                <a:spcPts val="1680"/>
-              </a:lnSpc>
-              <a:spcBef>
-                <a:spcPts val="300"/>
-              </a:spcBef>
-              <a:spcAft>
-                <a:spcPts val="300"/>
-              </a:spcAft>
-              <a:buNone/>
+              <a:t>. ✓ (4-digit answer because the carry cascaded.)</a:t>
+            </a:r>
+            <a:endParaRPr lang="en-US" sz="1200" dirty="0"/>
+          </a:p>
+        </p:txBody>
+      </p:sp>
+      <p:sp>
+        <p:nvSpPr>
+          <p:cNvPr id="5" name="Text 3"/>
+          <p:cNvSpPr/>
+          <p:nvPr/>
+        </p:nvSpPr>
+        <p:spPr>
+          <a:xfrm>
+            <a:off x="634901" y="1173063"/>
+            <a:ext cx="8102798" cy="281880"/>
+          </a:xfrm>
+          <a:prstGeom prst="rect">
+            <a:avLst/>
+          </a:prstGeom>
+          <a:noFill/>
+          <a:ln/>
+        </p:spPr>
+        <p:txBody>
+          <a:bodyPr wrap="square" lIns="0" tIns="0" rIns="0" bIns="0" rtlCol="0" anchor="t"/>
+          <a:lstStyle/>
+          <a:p>
+            <a:pPr algn="l" marL="342900" indent="-342900">
+              <a:lnSpc>
+                <a:spcPts val="1620"/>
+              </a:lnSpc>
+              <a:spcAft>
+                <a:spcPts val="300"/>
+              </a:spcAft>
+              <a:buSzPct val="100000"/>
+              <a:buChar char="•"/>
             </a:pPr>
             <a:r>
               <a:rPr lang="en-US" sz="1200" b="1" dirty="0">
@@ -3066,15 +3950,12 @@
                 <a:ea typeface="Arial" pitchFamily="34" charset="-122"/>
                 <a:cs typeface="Arial" pitchFamily="34" charset="-120"/>
               </a:rPr>
-              <a:t>0</a:t>
-            </a:r>
-            <a:pPr algn="l" indent="0" marL="0">
-              <a:lnSpc>
-                <a:spcPts val="1680"/>
-              </a:lnSpc>
-              <a:spcBef>
-                <a:spcPts val="300"/>
-              </a:spcBef>
+              <a:t>The full procedure</a:t>
+            </a:r>
+            <a:pPr algn="l" indent="0" marL="0">
+              <a:lnSpc>
+                <a:spcPts val="1620"/>
+              </a:lnSpc>
               <a:spcAft>
                 <a:spcPts val="300"/>
               </a:spcAft>
@@ -3089,7 +3970,7 @@
                 <a:ea typeface="Arial" pitchFamily="34" charset="-122"/>
                 <a:cs typeface="Arial" pitchFamily="34" charset="-120"/>
               </a:rPr>
-              <a:t>3" with no carry added — this is a classic mistake. – The 99 × 11 case (and the cascading carry) genuinely surprises students. Lean into it — it's evidence the algebra is doing real work, not arithmetic by coincidence. – If a student asks "why does this work?" — that's Day 3. Park it. Honour the curiosity by writing the question on a board sticky.</a:t>
+              <a:t> (boxed on the board):</a:t>
             </a:r>
             <a:endParaRPr lang="en-US" sz="1200" dirty="0"/>
           </a:p>
@@ -3097,7 +3978,7 @@
       </p:sp>
       <p:sp>
         <p:nvSpPr>
-          <p:cNvPr id="5" name="Text 3"/>
+          <p:cNvPr id="6" name="Text 4"/>
           <p:cNvSpPr/>
           <p:nvPr/>
         </p:nvSpPr>
@@ -3247,7 +4128,7 @@
                 <a:ea typeface="Georgia" pitchFamily="34" charset="-122"/>
                 <a:cs typeface="Georgia" pitchFamily="34" charset="-120"/>
               </a:rPr>
-              <a:t>Citation(s) used in this lesson</a:t>
+              <a:t>Core (15 min) — The carry case (cont.)</a:t>
             </a:r>
             <a:endParaRPr lang="en-US" sz="1800" dirty="0"/>
           </a:p>
@@ -3261,7 +4142,714 @@
         </p:nvSpPr>
         <p:spPr>
           <a:xfrm>
-            <a:off x="406301" y="870942"/>
+            <a:off x="406301" y="883593"/>
+            <a:ext cx="8331398" cy="1688306"/>
+          </a:xfrm>
+          <a:prstGeom prst="rect">
+            <a:avLst/>
+          </a:prstGeom>
+          <a:solidFill>
+            <a:srgbClr val="F4F8F9"/>
+          </a:solidFill>
+          <a:ln/>
+        </p:spPr>
+        <p:txBody>
+          <a:bodyPr wrap="square" rtlCol="0" anchor="ctr"/>
+          <a:lstStyle/>
+          <a:p>
+            <a:pPr indent="0" marL="0">
+              <a:buNone/>
+            </a:pPr>
+            <a:endParaRPr lang="en-US" dirty="0"/>
+          </a:p>
+        </p:txBody>
+      </p:sp>
+      <p:sp>
+        <p:nvSpPr>
+          <p:cNvPr id="5" name="Shape 3"/>
+          <p:cNvSpPr/>
+          <p:nvPr/>
+        </p:nvSpPr>
+        <p:spPr>
+          <a:xfrm>
+            <a:off x="434876" y="883593"/>
+            <a:ext cx="0" cy="1688306"/>
+          </a:xfrm>
+          <a:prstGeom prst="line">
+            <a:avLst/>
+          </a:prstGeom>
+          <a:noFill/>
+          <a:ln w="57150">
+            <a:solidFill>
+              <a:srgbClr val="FE4447"/>
+            </a:solidFill>
+            <a:prstDash val="solid"/>
+          </a:ln>
+        </p:spPr>
+      </p:sp>
+      <p:sp>
+        <p:nvSpPr>
+          <p:cNvPr id="6" name="Text 4"/>
+          <p:cNvSpPr/>
+          <p:nvPr/>
+        </p:nvSpPr>
+        <p:spPr>
+          <a:xfrm>
+            <a:off x="692051" y="1074093"/>
+            <a:ext cx="7973389" cy="230981"/>
+          </a:xfrm>
+          <a:prstGeom prst="rect">
+            <a:avLst/>
+          </a:prstGeom>
+          <a:noFill/>
+          <a:ln/>
+        </p:spPr>
+        <p:txBody>
+          <a:bodyPr wrap="square" lIns="0" tIns="0" rIns="0" bIns="0" rtlCol="0" anchor="t"/>
+          <a:lstStyle/>
+          <a:p>
+            <a:pPr algn="l" indent="0" marL="0">
+              <a:lnSpc>
+                <a:spcPts val="1820"/>
+              </a:lnSpc>
+              <a:spcBef>
+                <a:spcPts val="300"/>
+              </a:spcBef>
+              <a:spcAft>
+                <a:spcPts val="300"/>
+              </a:spcAft>
+              <a:buNone/>
+            </a:pPr>
+            <a:r>
+              <a:rPr lang="en-US" sz="1300" dirty="0">
+                <a:solidFill>
+                  <a:srgbClr val="1C2833"/>
+                </a:solidFill>
+                <a:latin typeface="Georgia" pitchFamily="34" charset="0"/>
+                <a:ea typeface="Georgia" pitchFamily="34" charset="-122"/>
+                <a:cs typeface="Georgia" pitchFamily="34" charset="-120"/>
+              </a:rPr>
+              <a:t>*</a:t>
+            </a:r>
+            <a:pPr algn="l" indent="0" marL="0">
+              <a:lnSpc>
+                <a:spcPts val="1820"/>
+              </a:lnSpc>
+              <a:spcBef>
+                <a:spcPts val="300"/>
+              </a:spcBef>
+              <a:spcAft>
+                <a:spcPts val="300"/>
+              </a:spcAft>
+              <a:buNone/>
+            </a:pPr>
+            <a:r>
+              <a:rPr lang="en-US" sz="1300" i="1" dirty="0">
+                <a:solidFill>
+                  <a:srgbClr val="1C2833"/>
+                </a:solidFill>
+                <a:latin typeface="Georgia" pitchFamily="34" charset="0"/>
+                <a:ea typeface="Georgia" pitchFamily="34" charset="-122"/>
+                <a:cs typeface="Georgia" pitchFamily="34" charset="-120"/>
+              </a:rPr>
+              <a:t>For any 2-digit number</a:t>
+            </a:r>
+            <a:pPr algn="l" indent="0" marL="0">
+              <a:lnSpc>
+                <a:spcPts val="1820"/>
+              </a:lnSpc>
+              <a:spcBef>
+                <a:spcPts val="300"/>
+              </a:spcBef>
+              <a:spcAft>
+                <a:spcPts val="300"/>
+              </a:spcAft>
+              <a:buNone/>
+            </a:pPr>
+            <a:r>
+              <a:rPr lang="en-US" sz="1300" dirty="0">
+                <a:solidFill>
+                  <a:srgbClr val="1C2833"/>
+                </a:solidFill>
+                <a:latin typeface="Georgia" pitchFamily="34" charset="0"/>
+                <a:ea typeface="Georgia" pitchFamily="34" charset="-122"/>
+                <a:cs typeface="Georgia" pitchFamily="34" charset="-120"/>
+              </a:rPr>
+              <a:t>ab</a:t>
+            </a:r>
+            <a:pPr algn="l" indent="0" marL="0">
+              <a:lnSpc>
+                <a:spcPts val="1820"/>
+              </a:lnSpc>
+              <a:spcBef>
+                <a:spcPts val="300"/>
+              </a:spcBef>
+              <a:spcAft>
+                <a:spcPts val="300"/>
+              </a:spcAft>
+              <a:buNone/>
+            </a:pPr>
+            <a:r>
+              <a:rPr lang="en-US" sz="1300" i="1" dirty="0">
+                <a:solidFill>
+                  <a:srgbClr val="1C2833"/>
+                </a:solidFill>
+                <a:latin typeface="Georgia" pitchFamily="34" charset="0"/>
+                <a:ea typeface="Georgia" pitchFamily="34" charset="-122"/>
+                <a:cs typeface="Georgia" pitchFamily="34" charset="-120"/>
+              </a:rPr>
+              <a:t> × 11:</a:t>
+            </a:r>
+            <a:pPr algn="l" indent="0" marL="0">
+              <a:lnSpc>
+                <a:spcPts val="1820"/>
+              </a:lnSpc>
+              <a:spcBef>
+                <a:spcPts val="300"/>
+              </a:spcBef>
+              <a:spcAft>
+                <a:spcPts val="300"/>
+              </a:spcAft>
+              <a:buNone/>
+            </a:pPr>
+            <a:r>
+              <a:rPr lang="en-US" sz="1300" dirty="0">
+                <a:solidFill>
+                  <a:srgbClr val="1C2833"/>
+                </a:solidFill>
+                <a:latin typeface="Georgia" pitchFamily="34" charset="0"/>
+                <a:ea typeface="Georgia" pitchFamily="34" charset="-122"/>
+                <a:cs typeface="Georgia" pitchFamily="34" charset="-120"/>
+              </a:rPr>
+              <a:t>*</a:t>
+            </a:r>
+            <a:endParaRPr lang="en-US" sz="1300" dirty="0"/>
+          </a:p>
+        </p:txBody>
+      </p:sp>
+      <p:sp>
+        <p:nvSpPr>
+          <p:cNvPr id="7" name="Text 5"/>
+          <p:cNvSpPr/>
+          <p:nvPr/>
+        </p:nvSpPr>
+        <p:spPr>
+          <a:xfrm>
+            <a:off x="692051" y="1343174"/>
+            <a:ext cx="7973389" cy="230981"/>
+          </a:xfrm>
+          <a:prstGeom prst="rect">
+            <a:avLst/>
+          </a:prstGeom>
+          <a:noFill/>
+          <a:ln/>
+        </p:spPr>
+        <p:txBody>
+          <a:bodyPr wrap="square" lIns="0" tIns="0" rIns="0" bIns="0" rtlCol="0" anchor="t"/>
+          <a:lstStyle/>
+          <a:p>
+            <a:pPr algn="l" indent="0" marL="0">
+              <a:lnSpc>
+                <a:spcPts val="1820"/>
+              </a:lnSpc>
+              <a:spcBef>
+                <a:spcPts val="300"/>
+              </a:spcBef>
+              <a:spcAft>
+                <a:spcPts val="300"/>
+              </a:spcAft>
+              <a:buNone/>
+            </a:pPr>
+            <a:r>
+              <a:rPr lang="en-US" sz="1300" dirty="0">
+                <a:solidFill>
+                  <a:srgbClr val="1C2833"/>
+                </a:solidFill>
+                <a:latin typeface="Georgia" pitchFamily="34" charset="0"/>
+                <a:ea typeface="Georgia" pitchFamily="34" charset="-122"/>
+                <a:cs typeface="Georgia" pitchFamily="34" charset="-120"/>
+              </a:rPr>
+              <a:t>Compute </a:t>
+            </a:r>
+            <a:pPr algn="l" indent="0" marL="0">
+              <a:lnSpc>
+                <a:spcPts val="1820"/>
+              </a:lnSpc>
+              <a:spcBef>
+                <a:spcPts val="300"/>
+              </a:spcBef>
+              <a:spcAft>
+                <a:spcPts val="300"/>
+              </a:spcAft>
+              <a:buNone/>
+            </a:pPr>
+            <a:r>
+              <a:rPr lang="en-US" sz="1300" i="1" dirty="0">
+                <a:solidFill>
+                  <a:srgbClr val="1C2833"/>
+                </a:solidFill>
+                <a:latin typeface="Georgia" pitchFamily="34" charset="0"/>
+                <a:ea typeface="Georgia" pitchFamily="34" charset="-122"/>
+                <a:cs typeface="Georgia" pitchFamily="34" charset="-120"/>
+              </a:rPr>
+              <a:t>a</a:t>
+            </a:r>
+            <a:pPr algn="l" indent="0" marL="0">
+              <a:lnSpc>
+                <a:spcPts val="1820"/>
+              </a:lnSpc>
+              <a:spcBef>
+                <a:spcPts val="300"/>
+              </a:spcBef>
+              <a:spcAft>
+                <a:spcPts val="300"/>
+              </a:spcAft>
+              <a:buNone/>
+            </a:pPr>
+            <a:r>
+              <a:rPr lang="en-US" sz="1300" dirty="0">
+                <a:solidFill>
+                  <a:srgbClr val="1C2833"/>
+                </a:solidFill>
+                <a:latin typeface="Georgia" pitchFamily="34" charset="0"/>
+                <a:ea typeface="Georgia" pitchFamily="34" charset="-122"/>
+                <a:cs typeface="Georgia" pitchFamily="34" charset="-120"/>
+              </a:rPr>
+              <a:t> + </a:t>
+            </a:r>
+            <a:pPr algn="l" indent="0" marL="0">
+              <a:lnSpc>
+                <a:spcPts val="1820"/>
+              </a:lnSpc>
+              <a:spcBef>
+                <a:spcPts val="300"/>
+              </a:spcBef>
+              <a:spcAft>
+                <a:spcPts val="300"/>
+              </a:spcAft>
+              <a:buNone/>
+            </a:pPr>
+            <a:r>
+              <a:rPr lang="en-US" sz="1300" i="1" dirty="0">
+                <a:solidFill>
+                  <a:srgbClr val="1C2833"/>
+                </a:solidFill>
+                <a:latin typeface="Georgia" pitchFamily="34" charset="0"/>
+                <a:ea typeface="Georgia" pitchFamily="34" charset="-122"/>
+                <a:cs typeface="Georgia" pitchFamily="34" charset="-120"/>
+              </a:rPr>
+              <a:t>b</a:t>
+            </a:r>
+            <a:pPr algn="l" indent="0" marL="0">
+              <a:lnSpc>
+                <a:spcPts val="1820"/>
+              </a:lnSpc>
+              <a:spcBef>
+                <a:spcPts val="300"/>
+              </a:spcBef>
+              <a:spcAft>
+                <a:spcPts val="300"/>
+              </a:spcAft>
+              <a:buNone/>
+            </a:pPr>
+            <a:r>
+              <a:rPr lang="en-US" sz="1300" dirty="0">
+                <a:solidFill>
+                  <a:srgbClr val="1C2833"/>
+                </a:solidFill>
+                <a:latin typeface="Georgia" pitchFamily="34" charset="0"/>
+                <a:ea typeface="Georgia" pitchFamily="34" charset="-122"/>
+                <a:cs typeface="Georgia" pitchFamily="34" charset="-120"/>
+              </a:rPr>
+              <a:t>.</a:t>
+            </a:r>
+            <a:endParaRPr lang="en-US" sz="1300" dirty="0"/>
+          </a:p>
+        </p:txBody>
+      </p:sp>
+      <p:sp>
+        <p:nvSpPr>
+          <p:cNvPr id="8" name="Text 6"/>
+          <p:cNvSpPr/>
+          <p:nvPr/>
+        </p:nvSpPr>
+        <p:spPr>
+          <a:xfrm>
+            <a:off x="692051" y="1612255"/>
+            <a:ext cx="7973389" cy="230981"/>
+          </a:xfrm>
+          <a:prstGeom prst="rect">
+            <a:avLst/>
+          </a:prstGeom>
+          <a:noFill/>
+          <a:ln/>
+        </p:spPr>
+        <p:txBody>
+          <a:bodyPr wrap="square" lIns="0" tIns="0" rIns="0" bIns="0" rtlCol="0" anchor="t"/>
+          <a:lstStyle/>
+          <a:p>
+            <a:pPr algn="l" indent="0" marL="0">
+              <a:lnSpc>
+                <a:spcPts val="1820"/>
+              </a:lnSpc>
+              <a:spcBef>
+                <a:spcPts val="300"/>
+              </a:spcBef>
+              <a:spcAft>
+                <a:spcPts val="300"/>
+              </a:spcAft>
+              <a:buNone/>
+            </a:pPr>
+            <a:r>
+              <a:rPr lang="en-US" sz="1300" dirty="0">
+                <a:solidFill>
+                  <a:srgbClr val="1C2833"/>
+                </a:solidFill>
+                <a:latin typeface="Georgia" pitchFamily="34" charset="0"/>
+                <a:ea typeface="Georgia" pitchFamily="34" charset="-122"/>
+                <a:cs typeface="Georgia" pitchFamily="34" charset="-120"/>
+              </a:rPr>
+              <a:t>If the sum is &lt; 10: answer is </a:t>
+            </a:r>
+            <a:pPr algn="l" indent="0" marL="0">
+              <a:lnSpc>
+                <a:spcPts val="1820"/>
+              </a:lnSpc>
+              <a:spcBef>
+                <a:spcPts val="300"/>
+              </a:spcBef>
+              <a:spcAft>
+                <a:spcPts val="300"/>
+              </a:spcAft>
+              <a:buNone/>
+            </a:pPr>
+            <a:r>
+              <a:rPr lang="en-US" sz="1300" i="1" dirty="0">
+                <a:solidFill>
+                  <a:srgbClr val="1C2833"/>
+                </a:solidFill>
+                <a:latin typeface="Georgia" pitchFamily="34" charset="0"/>
+                <a:ea typeface="Georgia" pitchFamily="34" charset="-122"/>
+                <a:cs typeface="Georgia" pitchFamily="34" charset="-120"/>
+              </a:rPr>
+              <a:t>a</a:t>
+            </a:r>
+            <a:pPr algn="l" indent="0" marL="0">
+              <a:lnSpc>
+                <a:spcPts val="1820"/>
+              </a:lnSpc>
+              <a:spcBef>
+                <a:spcPts val="300"/>
+              </a:spcBef>
+              <a:spcAft>
+                <a:spcPts val="300"/>
+              </a:spcAft>
+              <a:buNone/>
+            </a:pPr>
+            <a:r>
+              <a:rPr lang="en-US" sz="1300" dirty="0">
+                <a:solidFill>
+                  <a:srgbClr val="1C2833"/>
+                </a:solidFill>
+                <a:latin typeface="Georgia" pitchFamily="34" charset="0"/>
+                <a:ea typeface="Georgia" pitchFamily="34" charset="-122"/>
+                <a:cs typeface="Georgia" pitchFamily="34" charset="-120"/>
+              </a:rPr>
+              <a:t> (</a:t>
+            </a:r>
+            <a:pPr algn="l" indent="0" marL="0">
+              <a:lnSpc>
+                <a:spcPts val="1820"/>
+              </a:lnSpc>
+              <a:spcBef>
+                <a:spcPts val="300"/>
+              </a:spcBef>
+              <a:spcAft>
+                <a:spcPts val="300"/>
+              </a:spcAft>
+              <a:buNone/>
+            </a:pPr>
+            <a:r>
+              <a:rPr lang="en-US" sz="1300" i="1" dirty="0">
+                <a:solidFill>
+                  <a:srgbClr val="1C2833"/>
+                </a:solidFill>
+                <a:latin typeface="Georgia" pitchFamily="34" charset="0"/>
+                <a:ea typeface="Georgia" pitchFamily="34" charset="-122"/>
+                <a:cs typeface="Georgia" pitchFamily="34" charset="-120"/>
+              </a:rPr>
+              <a:t>a+b</a:t>
+            </a:r>
+            <a:pPr algn="l" indent="0" marL="0">
+              <a:lnSpc>
+                <a:spcPts val="1820"/>
+              </a:lnSpc>
+              <a:spcBef>
+                <a:spcPts val="300"/>
+              </a:spcBef>
+              <a:spcAft>
+                <a:spcPts val="300"/>
+              </a:spcAft>
+              <a:buNone/>
+            </a:pPr>
+            <a:r>
+              <a:rPr lang="en-US" sz="1300" dirty="0">
+                <a:solidFill>
+                  <a:srgbClr val="1C2833"/>
+                </a:solidFill>
+                <a:latin typeface="Georgia" pitchFamily="34" charset="0"/>
+                <a:ea typeface="Georgia" pitchFamily="34" charset="-122"/>
+                <a:cs typeface="Georgia" pitchFamily="34" charset="-120"/>
+              </a:rPr>
+              <a:t>) </a:t>
+            </a:r>
+            <a:pPr algn="l" indent="0" marL="0">
+              <a:lnSpc>
+                <a:spcPts val="1820"/>
+              </a:lnSpc>
+              <a:spcBef>
+                <a:spcPts val="300"/>
+              </a:spcBef>
+              <a:spcAft>
+                <a:spcPts val="300"/>
+              </a:spcAft>
+              <a:buNone/>
+            </a:pPr>
+            <a:r>
+              <a:rPr lang="en-US" sz="1300" i="1" dirty="0">
+                <a:solidFill>
+                  <a:srgbClr val="1C2833"/>
+                </a:solidFill>
+                <a:latin typeface="Georgia" pitchFamily="34" charset="0"/>
+                <a:ea typeface="Georgia" pitchFamily="34" charset="-122"/>
+                <a:cs typeface="Georgia" pitchFamily="34" charset="-120"/>
+              </a:rPr>
+              <a:t>b</a:t>
+            </a:r>
+            <a:pPr algn="l" indent="0" marL="0">
+              <a:lnSpc>
+                <a:spcPts val="1820"/>
+              </a:lnSpc>
+              <a:spcBef>
+                <a:spcPts val="300"/>
+              </a:spcBef>
+              <a:spcAft>
+                <a:spcPts val="300"/>
+              </a:spcAft>
+              <a:buNone/>
+            </a:pPr>
+            <a:r>
+              <a:rPr lang="en-US" sz="1300" dirty="0">
+                <a:solidFill>
+                  <a:srgbClr val="1C2833"/>
+                </a:solidFill>
+                <a:latin typeface="Georgia" pitchFamily="34" charset="0"/>
+                <a:ea typeface="Georgia" pitchFamily="34" charset="-122"/>
+                <a:cs typeface="Georgia" pitchFamily="34" charset="-120"/>
+              </a:rPr>
+              <a:t>.</a:t>
+            </a:r>
+            <a:endParaRPr lang="en-US" sz="1300" dirty="0"/>
+          </a:p>
+        </p:txBody>
+      </p:sp>
+      <p:sp>
+        <p:nvSpPr>
+          <p:cNvPr id="9" name="Text 7"/>
+          <p:cNvSpPr/>
+          <p:nvPr/>
+        </p:nvSpPr>
+        <p:spPr>
+          <a:xfrm>
+            <a:off x="692051" y="1881336"/>
+            <a:ext cx="7973389" cy="230981"/>
+          </a:xfrm>
+          <a:prstGeom prst="rect">
+            <a:avLst/>
+          </a:prstGeom>
+          <a:noFill/>
+          <a:ln/>
+        </p:spPr>
+        <p:txBody>
+          <a:bodyPr wrap="square" lIns="0" tIns="0" rIns="0" bIns="0" rtlCol="0" anchor="t"/>
+          <a:lstStyle/>
+          <a:p>
+            <a:pPr algn="l" indent="0" marL="0">
+              <a:lnSpc>
+                <a:spcPts val="1820"/>
+              </a:lnSpc>
+              <a:spcBef>
+                <a:spcPts val="300"/>
+              </a:spcBef>
+              <a:spcAft>
+                <a:spcPts val="300"/>
+              </a:spcAft>
+              <a:buNone/>
+            </a:pPr>
+            <a:r>
+              <a:rPr lang="en-US" sz="1300" dirty="0">
+                <a:solidFill>
+                  <a:srgbClr val="1C2833"/>
+                </a:solidFill>
+                <a:latin typeface="Georgia" pitchFamily="34" charset="0"/>
+                <a:ea typeface="Georgia" pitchFamily="34" charset="-122"/>
+                <a:cs typeface="Georgia" pitchFamily="34" charset="-120"/>
+              </a:rPr>
+              <a:t>If the sum is ≥ 10: middle digit = units digit of sum; add 1 to </a:t>
+            </a:r>
+            <a:pPr algn="l" indent="0" marL="0">
+              <a:lnSpc>
+                <a:spcPts val="1820"/>
+              </a:lnSpc>
+              <a:spcBef>
+                <a:spcPts val="300"/>
+              </a:spcBef>
+              <a:spcAft>
+                <a:spcPts val="300"/>
+              </a:spcAft>
+              <a:buNone/>
+            </a:pPr>
+            <a:r>
+              <a:rPr lang="en-US" sz="1300" i="1" dirty="0">
+                <a:solidFill>
+                  <a:srgbClr val="1C2833"/>
+                </a:solidFill>
+                <a:latin typeface="Georgia" pitchFamily="34" charset="0"/>
+                <a:ea typeface="Georgia" pitchFamily="34" charset="-122"/>
+                <a:cs typeface="Georgia" pitchFamily="34" charset="-120"/>
+              </a:rPr>
+              <a:t>a</a:t>
+            </a:r>
+            <a:pPr algn="l" indent="0" marL="0">
+              <a:lnSpc>
+                <a:spcPts val="1820"/>
+              </a:lnSpc>
+              <a:spcBef>
+                <a:spcPts val="300"/>
+              </a:spcBef>
+              <a:spcAft>
+                <a:spcPts val="300"/>
+              </a:spcAft>
+              <a:buNone/>
+            </a:pPr>
+            <a:r>
+              <a:rPr lang="en-US" sz="1300" dirty="0">
+                <a:solidFill>
+                  <a:srgbClr val="1C2833"/>
+                </a:solidFill>
+                <a:latin typeface="Georgia" pitchFamily="34" charset="0"/>
+                <a:ea typeface="Georgia" pitchFamily="34" charset="-122"/>
+                <a:cs typeface="Georgia" pitchFamily="34" charset="-120"/>
+              </a:rPr>
+              <a:t>.</a:t>
+            </a:r>
+            <a:endParaRPr lang="en-US" sz="1300" dirty="0"/>
+          </a:p>
+        </p:txBody>
+      </p:sp>
+      <p:sp>
+        <p:nvSpPr>
+          <p:cNvPr id="10" name="Text 8"/>
+          <p:cNvSpPr/>
+          <p:nvPr/>
+        </p:nvSpPr>
+        <p:spPr>
+          <a:xfrm>
+            <a:off x="692051" y="2150418"/>
+            <a:ext cx="7973389" cy="230981"/>
+          </a:xfrm>
+          <a:prstGeom prst="rect">
+            <a:avLst/>
+          </a:prstGeom>
+          <a:noFill/>
+          <a:ln/>
+        </p:spPr>
+        <p:txBody>
+          <a:bodyPr wrap="square" lIns="0" tIns="0" rIns="0" bIns="0" rtlCol="0" anchor="t"/>
+          <a:lstStyle/>
+          <a:p>
+            <a:pPr algn="l" indent="0" marL="0">
+              <a:lnSpc>
+                <a:spcPts val="1820"/>
+              </a:lnSpc>
+              <a:spcBef>
+                <a:spcPts val="300"/>
+              </a:spcBef>
+              <a:spcAft>
+                <a:spcPts val="300"/>
+              </a:spcAft>
+              <a:buNone/>
+            </a:pPr>
+            <a:r>
+              <a:rPr lang="en-US" sz="1300" dirty="0">
+                <a:solidFill>
+                  <a:srgbClr val="1C2833"/>
+                </a:solidFill>
+                <a:latin typeface="Georgia" pitchFamily="34" charset="0"/>
+                <a:ea typeface="Georgia" pitchFamily="34" charset="-122"/>
+                <a:cs typeface="Georgia" pitchFamily="34" charset="-120"/>
+              </a:rPr>
+              <a:t>If the new </a:t>
+            </a:r>
+            <a:pPr algn="l" indent="0" marL="0">
+              <a:lnSpc>
+                <a:spcPts val="1820"/>
+              </a:lnSpc>
+              <a:spcBef>
+                <a:spcPts val="300"/>
+              </a:spcBef>
+              <a:spcAft>
+                <a:spcPts val="300"/>
+              </a:spcAft>
+              <a:buNone/>
+            </a:pPr>
+            <a:r>
+              <a:rPr lang="en-US" sz="1300" i="1" dirty="0">
+                <a:solidFill>
+                  <a:srgbClr val="1C2833"/>
+                </a:solidFill>
+                <a:latin typeface="Georgia" pitchFamily="34" charset="0"/>
+                <a:ea typeface="Georgia" pitchFamily="34" charset="-122"/>
+                <a:cs typeface="Georgia" pitchFamily="34" charset="-120"/>
+              </a:rPr>
+              <a:t>a</a:t>
+            </a:r>
+            <a:pPr algn="l" indent="0" marL="0">
+              <a:lnSpc>
+                <a:spcPts val="1820"/>
+              </a:lnSpc>
+              <a:spcBef>
+                <a:spcPts val="300"/>
+              </a:spcBef>
+              <a:spcAft>
+                <a:spcPts val="300"/>
+              </a:spcAft>
+              <a:buNone/>
+            </a:pPr>
+            <a:r>
+              <a:rPr lang="en-US" sz="1300" dirty="0">
+                <a:solidFill>
+                  <a:srgbClr val="1C2833"/>
+                </a:solidFill>
+                <a:latin typeface="Georgia" pitchFamily="34" charset="0"/>
+                <a:ea typeface="Georgia" pitchFamily="34" charset="-122"/>
+                <a:cs typeface="Georgia" pitchFamily="34" charset="-120"/>
+              </a:rPr>
+              <a:t> is ≥ 10 (only happens at 99): cascade the carry.</a:t>
+            </a:r>
+            <a:endParaRPr lang="en-US" sz="1300" dirty="0"/>
+          </a:p>
+        </p:txBody>
+      </p:sp>
+      <p:sp>
+        <p:nvSpPr>
+          <p:cNvPr id="11" name="Text 9"/>
+          <p:cNvSpPr/>
+          <p:nvPr/>
+        </p:nvSpPr>
+        <p:spPr>
+          <a:xfrm>
+            <a:off x="406301" y="4434929"/>
             <a:ext cx="8498026" cy="213271"/>
           </a:xfrm>
           <a:prstGeom prst="rect">
@@ -3295,22 +4883,155 @@
                 <a:ea typeface="Arial" pitchFamily="34" charset="-122"/>
                 <a:cs typeface="Arial" pitchFamily="34" charset="-120"/>
               </a:rPr>
-              <a:t>– Tirthaji (1965), sūtra 1 (</a:t>
-            </a:r>
-            <a:pPr algn="l" indent="0" marL="0">
-              <a:lnSpc>
-                <a:spcPts val="1680"/>
-              </a:lnSpc>
-              <a:spcBef>
-                <a:spcPts val="300"/>
-              </a:spcBef>
-              <a:spcAft>
-                <a:spcPts val="300"/>
-              </a:spcAft>
-              <a:buNone/>
-            </a:pPr>
-            <a:r>
-              <a:rPr lang="en-US" sz="1200" i="1" dirty="0">
+              <a:t>Middle ·  · IKS Curriculum</a:t>
+            </a:r>
+            <a:endParaRPr lang="en-US" sz="1200" dirty="0"/>
+          </a:p>
+        </p:txBody>
+      </p:sp>
+    </p:spTree>
+  </p:cSld>
+  <p:clrMapOvr>
+    <a:masterClrMapping/>
+  </p:clrMapOvr>
+</p:sld>
+</file>
+
+<file path=ppt/slides/slide14.xml><?xml version="1.0" encoding="utf-8"?>
+<p:sld xmlns:a="http://schemas.openxmlformats.org/drawingml/2006/main" xmlns:r="http://schemas.openxmlformats.org/officeDocument/2006/relationships" xmlns:p="http://schemas.openxmlformats.org/presentationml/2006/main">
+  <p:cSld name="Slide 14">
+    <p:bg>
+      <p:bgPr>
+        <a:solidFill>
+          <a:srgbClr val="FFFFFF"/>
+        </a:solidFill>
+      </p:bgPr>
+    </p:bg>
+    <p:spTree>
+      <p:nvGrpSpPr>
+        <p:cNvPr id="1" name=""/>
+        <p:cNvGrpSpPr/>
+        <p:nvPr/>
+      </p:nvGrpSpPr>
+      <p:grpSpPr>
+        <a:xfrm>
+          <a:off x="0" y="0"/>
+          <a:ext cx="0" cy="0"/>
+          <a:chOff x="0" y="0"/>
+          <a:chExt cx="0" cy="0"/>
+        </a:xfrm>
+      </p:grpSpPr>
+      <p:sp>
+        <p:nvSpPr>
+          <p:cNvPr id="2" name="Text 0"/>
+          <p:cNvSpPr/>
+          <p:nvPr/>
+        </p:nvSpPr>
+        <p:spPr>
+          <a:xfrm>
+            <a:off x="0" y="0"/>
+            <a:ext cx="9144000" cy="101501"/>
+          </a:xfrm>
+          <a:prstGeom prst="rect">
+            <a:avLst/>
+          </a:prstGeom>
+          <a:solidFill>
+            <a:srgbClr val="277884"/>
+          </a:solidFill>
+          <a:ln/>
+        </p:spPr>
+        <p:txBody>
+          <a:bodyPr wrap="square" rtlCol="0" anchor="ctr"/>
+          <a:lstStyle/>
+          <a:p>
+            <a:pPr indent="0" marL="0">
+              <a:buNone/>
+            </a:pPr>
+            <a:endParaRPr lang="en-US" dirty="0"/>
+          </a:p>
+        </p:txBody>
+      </p:sp>
+      <p:sp>
+        <p:nvSpPr>
+          <p:cNvPr id="3" name="Text 1"/>
+          <p:cNvSpPr/>
+          <p:nvPr/>
+        </p:nvSpPr>
+        <p:spPr>
+          <a:xfrm>
+            <a:off x="406301" y="457051"/>
+            <a:ext cx="8498026" cy="274290"/>
+          </a:xfrm>
+          <a:prstGeom prst="rect">
+            <a:avLst/>
+          </a:prstGeom>
+          <a:noFill/>
+          <a:ln/>
+        </p:spPr>
+        <p:txBody>
+          <a:bodyPr wrap="square" lIns="0" tIns="0" rIns="0" bIns="0" rtlCol="0" anchor="t"/>
+          <a:lstStyle/>
+          <a:p>
+            <a:pPr algn="l" indent="0" marL="0">
+              <a:lnSpc>
+                <a:spcPts val="2160"/>
+              </a:lnSpc>
+              <a:spcBef>
+                <a:spcPts val="600"/>
+              </a:spcBef>
+              <a:spcAft>
+                <a:spcPts val="800"/>
+              </a:spcAft>
+              <a:buNone/>
+            </a:pPr>
+            <a:r>
+              <a:rPr lang="en-US" sz="1800" b="1" dirty="0">
+                <a:solidFill>
+                  <a:srgbClr val="FE4447"/>
+                </a:solidFill>
+                <a:latin typeface="Georgia" pitchFamily="34" charset="0"/>
+                <a:ea typeface="Georgia" pitchFamily="34" charset="-122"/>
+                <a:cs typeface="Georgia" pitchFamily="34" charset="-120"/>
+              </a:rPr>
+              <a:t>Activity (17 min) — Mixed practice</a:t>
+            </a:r>
+            <a:endParaRPr lang="en-US" sz="1800" dirty="0"/>
+          </a:p>
+        </p:txBody>
+      </p:sp>
+      <p:sp>
+        <p:nvSpPr>
+          <p:cNvPr id="4" name="Text 2"/>
+          <p:cNvSpPr/>
+          <p:nvPr/>
+        </p:nvSpPr>
+        <p:spPr>
+          <a:xfrm>
+            <a:off x="634901" y="883593"/>
+            <a:ext cx="8102798" cy="281880"/>
+          </a:xfrm>
+          <a:prstGeom prst="rect">
+            <a:avLst/>
+          </a:prstGeom>
+          <a:noFill/>
+          <a:ln/>
+        </p:spPr>
+        <p:txBody>
+          <a:bodyPr wrap="square" lIns="0" tIns="0" rIns="0" bIns="0" rtlCol="0" anchor="t"/>
+          <a:lstStyle/>
+          <a:p>
+            <a:pPr algn="l" marL="342900" indent="-342900">
+              <a:lnSpc>
+                <a:spcPts val="1620"/>
+              </a:lnSpc>
+              <a:spcAft>
+                <a:spcPts val="300"/>
+              </a:spcAft>
+              <a:buSzPct val="100000"/>
+              <a:buChar char="•"/>
+            </a:pPr>
+            <a:r>
+              <a:rPr lang="en-US" sz="1200" dirty="0">
                 <a:solidFill>
                   <a:srgbClr val="1C2833"/>
                 </a:solidFill>
@@ -3318,8 +5039,212 @@
                 <a:ea typeface="Arial" pitchFamily="34" charset="-122"/>
                 <a:cs typeface="Arial" pitchFamily="34" charset="-120"/>
               </a:rPr>
-              <a:t>Ekādhikena Pūrveṇa</a:t>
-            </a:r>
+              <a:t>Worksheet of 12 problems, half no-carry, half carry:</a:t>
+            </a:r>
+            <a:endParaRPr lang="en-US" sz="1200" dirty="0"/>
+          </a:p>
+        </p:txBody>
+      </p:sp>
+      <p:sp>
+        <p:nvSpPr>
+          <p:cNvPr id="5" name="Text 3"/>
+          <p:cNvSpPr/>
+          <p:nvPr/>
+        </p:nvSpPr>
+        <p:spPr>
+          <a:xfrm>
+            <a:off x="406301" y="1266974"/>
+            <a:ext cx="8331398" cy="777627"/>
+          </a:xfrm>
+          <a:prstGeom prst="rect">
+            <a:avLst/>
+          </a:prstGeom>
+          <a:solidFill>
+            <a:srgbClr val="F4F8F9"/>
+          </a:solidFill>
+          <a:ln/>
+        </p:spPr>
+        <p:txBody>
+          <a:bodyPr wrap="square" rtlCol="0" anchor="ctr"/>
+          <a:lstStyle/>
+          <a:p>
+            <a:pPr indent="0" marL="0">
+              <a:buNone/>
+            </a:pPr>
+            <a:endParaRPr lang="en-US" dirty="0"/>
+          </a:p>
+        </p:txBody>
+      </p:sp>
+      <p:sp>
+        <p:nvSpPr>
+          <p:cNvPr id="6" name="Shape 4"/>
+          <p:cNvSpPr/>
+          <p:nvPr/>
+        </p:nvSpPr>
+        <p:spPr>
+          <a:xfrm>
+            <a:off x="430113" y="1266974"/>
+            <a:ext cx="0" cy="777627"/>
+          </a:xfrm>
+          <a:prstGeom prst="line">
+            <a:avLst/>
+          </a:prstGeom>
+          <a:noFill/>
+          <a:ln w="47625">
+            <a:solidFill>
+              <a:srgbClr val="277884"/>
+            </a:solidFill>
+            <a:prstDash val="solid"/>
+          </a:ln>
+        </p:spPr>
+      </p:sp>
+      <p:sp>
+        <p:nvSpPr>
+          <p:cNvPr id="7" name="Text 5"/>
+          <p:cNvSpPr/>
+          <p:nvPr/>
+        </p:nvSpPr>
+        <p:spPr>
+          <a:xfrm>
+            <a:off x="631627" y="1393924"/>
+            <a:ext cx="8086939" cy="174575"/>
+          </a:xfrm>
+          <a:prstGeom prst="rect">
+            <a:avLst/>
+          </a:prstGeom>
+          <a:noFill/>
+          <a:ln/>
+        </p:spPr>
+        <p:txBody>
+          <a:bodyPr wrap="square" lIns="0" tIns="0" rIns="0" bIns="0" rtlCol="0" anchor="t"/>
+          <a:lstStyle/>
+          <a:p>
+            <a:pPr algn="l" indent="0" marL="0">
+              <a:lnSpc>
+                <a:spcPts val="1375"/>
+              </a:lnSpc>
+              <a:buNone/>
+            </a:pPr>
+            <a:r>
+              <a:rPr lang="en-US" sz="1100" dirty="0">
+                <a:solidFill>
+                  <a:srgbClr val="1C2833"/>
+                </a:solidFill>
+                <a:latin typeface="Courier New" pitchFamily="34" charset="0"/>
+                <a:ea typeface="Courier New" pitchFamily="34" charset="-122"/>
+                <a:cs typeface="Courier New" pitchFamily="34" charset="-120"/>
+              </a:rPr>
+              <a:t>21 × 11    35 × 11    47 × 11    58 × 11</a:t>
+            </a:r>
+            <a:endParaRPr lang="en-US" sz="1100" dirty="0"/>
+          </a:p>
+        </p:txBody>
+      </p:sp>
+      <p:sp>
+        <p:nvSpPr>
+          <p:cNvPr id="8" name="Text 6"/>
+          <p:cNvSpPr/>
+          <p:nvPr/>
+        </p:nvSpPr>
+        <p:spPr>
+          <a:xfrm>
+            <a:off x="631627" y="1568500"/>
+            <a:ext cx="8086939" cy="174575"/>
+          </a:xfrm>
+          <a:prstGeom prst="rect">
+            <a:avLst/>
+          </a:prstGeom>
+          <a:noFill/>
+          <a:ln/>
+        </p:spPr>
+        <p:txBody>
+          <a:bodyPr wrap="square" lIns="0" tIns="0" rIns="0" bIns="0" rtlCol="0" anchor="t"/>
+          <a:lstStyle/>
+          <a:p>
+            <a:pPr algn="l" indent="0" marL="0">
+              <a:lnSpc>
+                <a:spcPts val="1375"/>
+              </a:lnSpc>
+              <a:buNone/>
+            </a:pPr>
+            <a:r>
+              <a:rPr lang="en-US" sz="1100" dirty="0">
+                <a:solidFill>
+                  <a:srgbClr val="1C2833"/>
+                </a:solidFill>
+                <a:latin typeface="Courier New" pitchFamily="34" charset="0"/>
+                <a:ea typeface="Courier New" pitchFamily="34" charset="-122"/>
+                <a:cs typeface="Courier New" pitchFamily="34" charset="-120"/>
+              </a:rPr>
+              <a:t>62 × 11    74 × 11    83 × 11    89 × 11</a:t>
+            </a:r>
+            <a:endParaRPr lang="en-US" sz="1100" dirty="0"/>
+          </a:p>
+        </p:txBody>
+      </p:sp>
+      <p:sp>
+        <p:nvSpPr>
+          <p:cNvPr id="9" name="Text 7"/>
+          <p:cNvSpPr/>
+          <p:nvPr/>
+        </p:nvSpPr>
+        <p:spPr>
+          <a:xfrm>
+            <a:off x="631627" y="1743075"/>
+            <a:ext cx="8086939" cy="174575"/>
+          </a:xfrm>
+          <a:prstGeom prst="rect">
+            <a:avLst/>
+          </a:prstGeom>
+          <a:noFill/>
+          <a:ln/>
+        </p:spPr>
+        <p:txBody>
+          <a:bodyPr wrap="square" lIns="0" tIns="0" rIns="0" bIns="0" rtlCol="0" anchor="t"/>
+          <a:lstStyle/>
+          <a:p>
+            <a:pPr algn="l" indent="0" marL="0">
+              <a:lnSpc>
+                <a:spcPts val="1375"/>
+              </a:lnSpc>
+              <a:buNone/>
+            </a:pPr>
+            <a:r>
+              <a:rPr lang="en-US" sz="1100" dirty="0">
+                <a:solidFill>
+                  <a:srgbClr val="1C2833"/>
+                </a:solidFill>
+                <a:latin typeface="Courier New" pitchFamily="34" charset="0"/>
+                <a:ea typeface="Courier New" pitchFamily="34" charset="-122"/>
+                <a:cs typeface="Courier New" pitchFamily="34" charset="-120"/>
+              </a:rPr>
+              <a:t>91 × 11    99 × 11    18 × 11    27 × 11</a:t>
+            </a:r>
+            <a:endParaRPr lang="en-US" sz="1100" dirty="0"/>
+          </a:p>
+        </p:txBody>
+      </p:sp>
+      <p:sp>
+        <p:nvSpPr>
+          <p:cNvPr id="10" name="Text 8"/>
+          <p:cNvSpPr/>
+          <p:nvPr/>
+        </p:nvSpPr>
+        <p:spPr>
+          <a:xfrm>
+            <a:off x="406301" y="4434929"/>
+            <a:ext cx="8498026" cy="213271"/>
+          </a:xfrm>
+          <a:prstGeom prst="rect">
+            <a:avLst/>
+          </a:prstGeom>
+          <a:noFill/>
+          <a:ln/>
+        </p:spPr>
+        <p:txBody>
+          <a:bodyPr wrap="square" lIns="0" tIns="0" rIns="0" bIns="0" rtlCol="0" anchor="t"/>
+          <a:lstStyle/>
+          <a:p>
             <a:pPr algn="l" indent="0" marL="0">
               <a:lnSpc>
                 <a:spcPts val="1680"/>
@@ -3341,22 +5266,132 @@
                 <a:ea typeface="Arial" pitchFamily="34" charset="-122"/>
                 <a:cs typeface="Arial" pitchFamily="34" charset="-120"/>
               </a:rPr>
-              <a:t>) — the technique name.</a:t>
+              <a:t>Middle ·  · IKS Curriculum</a:t>
             </a:r>
             <a:endParaRPr lang="en-US" sz="1200" dirty="0"/>
           </a:p>
         </p:txBody>
       </p:sp>
-      <p:sp>
-        <p:nvSpPr>
-          <p:cNvPr id="5" name="Text 3"/>
-          <p:cNvSpPr/>
-          <p:nvPr/>
-        </p:nvSpPr>
-        <p:spPr>
-          <a:xfrm>
-            <a:off x="634901" y="1173063"/>
-            <a:ext cx="8102798" cy="281880"/>
+    </p:spTree>
+  </p:cSld>
+  <p:clrMapOvr>
+    <a:masterClrMapping/>
+  </p:clrMapOvr>
+</p:sld>
+</file>
+
+<file path=ppt/slides/slide15.xml><?xml version="1.0" encoding="utf-8"?>
+<p:sld xmlns:a="http://schemas.openxmlformats.org/drawingml/2006/main" xmlns:r="http://schemas.openxmlformats.org/officeDocument/2006/relationships" xmlns:p="http://schemas.openxmlformats.org/presentationml/2006/main">
+  <p:cSld name="Slide 15">
+    <p:bg>
+      <p:bgPr>
+        <a:solidFill>
+          <a:srgbClr val="FFFFFF"/>
+        </a:solidFill>
+      </p:bgPr>
+    </p:bg>
+    <p:spTree>
+      <p:nvGrpSpPr>
+        <p:cNvPr id="1" name=""/>
+        <p:cNvGrpSpPr/>
+        <p:nvPr/>
+      </p:nvGrpSpPr>
+      <p:grpSpPr>
+        <a:xfrm>
+          <a:off x="0" y="0"/>
+          <a:ext cx="0" cy="0"/>
+          <a:chOff x="0" y="0"/>
+          <a:chExt cx="0" cy="0"/>
+        </a:xfrm>
+      </p:grpSpPr>
+      <p:sp>
+        <p:nvSpPr>
+          <p:cNvPr id="2" name="Text 0"/>
+          <p:cNvSpPr/>
+          <p:nvPr/>
+        </p:nvSpPr>
+        <p:spPr>
+          <a:xfrm>
+            <a:off x="0" y="0"/>
+            <a:ext cx="9144000" cy="101501"/>
+          </a:xfrm>
+          <a:prstGeom prst="rect">
+            <a:avLst/>
+          </a:prstGeom>
+          <a:solidFill>
+            <a:srgbClr val="277884"/>
+          </a:solidFill>
+          <a:ln/>
+        </p:spPr>
+        <p:txBody>
+          <a:bodyPr wrap="square" rtlCol="0" anchor="ctr"/>
+          <a:lstStyle/>
+          <a:p>
+            <a:pPr indent="0" marL="0">
+              <a:buNone/>
+            </a:pPr>
+            <a:endParaRPr lang="en-US" dirty="0"/>
+          </a:p>
+        </p:txBody>
+      </p:sp>
+      <p:sp>
+        <p:nvSpPr>
+          <p:cNvPr id="3" name="Text 1"/>
+          <p:cNvSpPr/>
+          <p:nvPr/>
+        </p:nvSpPr>
+        <p:spPr>
+          <a:xfrm>
+            <a:off x="406301" y="457051"/>
+            <a:ext cx="8498026" cy="274290"/>
+          </a:xfrm>
+          <a:prstGeom prst="rect">
+            <a:avLst/>
+          </a:prstGeom>
+          <a:noFill/>
+          <a:ln/>
+        </p:spPr>
+        <p:txBody>
+          <a:bodyPr wrap="square" lIns="0" tIns="0" rIns="0" bIns="0" rtlCol="0" anchor="t"/>
+          <a:lstStyle/>
+          <a:p>
+            <a:pPr algn="l" indent="0" marL="0">
+              <a:lnSpc>
+                <a:spcPts val="2160"/>
+              </a:lnSpc>
+              <a:spcBef>
+                <a:spcPts val="600"/>
+              </a:spcBef>
+              <a:spcAft>
+                <a:spcPts val="800"/>
+              </a:spcAft>
+              <a:buNone/>
+            </a:pPr>
+            <a:r>
+              <a:rPr lang="en-US" sz="1800" b="1" dirty="0">
+                <a:solidFill>
+                  <a:srgbClr val="FE4447"/>
+                </a:solidFill>
+                <a:latin typeface="Georgia" pitchFamily="34" charset="0"/>
+                <a:ea typeface="Georgia" pitchFamily="34" charset="-122"/>
+                <a:cs typeface="Georgia" pitchFamily="34" charset="-120"/>
+              </a:rPr>
+              <a:t>Activity (17 min) — Mixed practice (cont.)</a:t>
+            </a:r>
+            <a:endParaRPr lang="en-US" sz="1800" dirty="0"/>
+          </a:p>
+        </p:txBody>
+      </p:sp>
+      <p:sp>
+        <p:nvSpPr>
+          <p:cNvPr id="4" name="Text 2"/>
+          <p:cNvSpPr/>
+          <p:nvPr/>
+        </p:nvSpPr>
+        <p:spPr>
+          <a:xfrm>
+            <a:off x="634901" y="883593"/>
+            <a:ext cx="8102798" cy="525661"/>
           </a:xfrm>
           <a:prstGeom prst="rect">
             <a:avLst/>
@@ -3379,7 +5414,7 @@
               <a:buChar char="•"/>
             </a:pPr>
             <a:r>
-              <a:rPr lang="en-US" sz="1200" i="1" dirty="0">
+              <a:rPr lang="en-US" sz="1200" dirty="0">
                 <a:solidFill>
                   <a:srgbClr val="1C2833"/>
                 </a:solidFill>
@@ -3387,16 +5422,20 @@
                 <a:ea typeface="Arial" pitchFamily="34" charset="-122"/>
                 <a:cs typeface="Arial" pitchFamily="34" charset="-120"/>
               </a:rPr>
-              <a:t>Vedic Mathematics Batch1.pdf</a:t>
-            </a:r>
-            <a:pPr algn="l" indent="0" marL="0">
+              <a:t>Round 1 (8 min): solo, untimed. Self-check with long multiplication on any 3 of them.</a:t>
+            </a:r>
+            <a:endParaRPr lang="en-US" sz="1200" dirty="0"/>
+          </a:p>
+          <a:p>
+            <a:pPr algn="l" marL="342900" indent="-342900">
               <a:lnSpc>
                 <a:spcPts val="1620"/>
               </a:lnSpc>
               <a:spcAft>
                 <a:spcPts val="300"/>
               </a:spcAft>
-              <a:buNone/>
+              <a:buSzPct val="100000"/>
+              <a:buChar char="•"/>
             </a:pPr>
             <a:r>
               <a:rPr lang="en-US" sz="1200" dirty="0">
@@ -3407,7 +5446,7 @@
                 <a:ea typeface="Arial" pitchFamily="34" charset="-122"/>
                 <a:cs typeface="Arial" pitchFamily="34" charset="-120"/>
               </a:rPr>
-              <a:t> (Vedic Cultural Center) — worked examples of the carry case.</a:t>
+              <a:t>Round 2 (8 min): paired. Partner calls a problem; you answer aloud. Goal: under 5 seconds per problem.</a:t>
             </a:r>
             <a:endParaRPr lang="en-US" sz="1200" dirty="0"/>
           </a:p>
@@ -3415,7 +5454,1779 @@
       </p:sp>
       <p:sp>
         <p:nvSpPr>
+          <p:cNvPr id="5" name="Text 3"/>
+          <p:cNvSpPr/>
+          <p:nvPr/>
+        </p:nvSpPr>
+        <p:spPr>
+          <a:xfrm>
+            <a:off x="406301" y="4434929"/>
+            <a:ext cx="8498026" cy="213271"/>
+          </a:xfrm>
+          <a:prstGeom prst="rect">
+            <a:avLst/>
+          </a:prstGeom>
+          <a:noFill/>
+          <a:ln/>
+        </p:spPr>
+        <p:txBody>
+          <a:bodyPr wrap="square" lIns="0" tIns="0" rIns="0" bIns="0" rtlCol="0" anchor="t"/>
+          <a:lstStyle/>
+          <a:p>
+            <a:pPr algn="l" indent="0" marL="0">
+              <a:lnSpc>
+                <a:spcPts val="1680"/>
+              </a:lnSpc>
+              <a:spcBef>
+                <a:spcPts val="300"/>
+              </a:spcBef>
+              <a:spcAft>
+                <a:spcPts val="300"/>
+              </a:spcAft>
+              <a:buNone/>
+            </a:pPr>
+            <a:r>
+              <a:rPr lang="en-US" sz="1200" dirty="0">
+                <a:solidFill>
+                  <a:srgbClr val="1C2833"/>
+                </a:solidFill>
+                <a:latin typeface="Arial" pitchFamily="34" charset="0"/>
+                <a:ea typeface="Arial" pitchFamily="34" charset="-122"/>
+                <a:cs typeface="Arial" pitchFamily="34" charset="-120"/>
+              </a:rPr>
+              <a:t>Middle ·  · IKS Curriculum</a:t>
+            </a:r>
+            <a:endParaRPr lang="en-US" sz="1200" dirty="0"/>
+          </a:p>
+        </p:txBody>
+      </p:sp>
+    </p:spTree>
+  </p:cSld>
+  <p:clrMapOvr>
+    <a:masterClrMapping/>
+  </p:clrMapOvr>
+</p:sld>
+</file>
+
+<file path=ppt/slides/slide16.xml><?xml version="1.0" encoding="utf-8"?>
+<p:sld xmlns:a="http://schemas.openxmlformats.org/drawingml/2006/main" xmlns:r="http://schemas.openxmlformats.org/officeDocument/2006/relationships" xmlns:p="http://schemas.openxmlformats.org/presentationml/2006/main">
+  <p:cSld name="Slide 16">
+    <p:bg>
+      <p:bgPr>
+        <a:solidFill>
+          <a:srgbClr val="FFFFFF"/>
+        </a:solidFill>
+      </p:bgPr>
+    </p:bg>
+    <p:spTree>
+      <p:nvGrpSpPr>
+        <p:cNvPr id="1" name=""/>
+        <p:cNvGrpSpPr/>
+        <p:nvPr/>
+      </p:nvGrpSpPr>
+      <p:grpSpPr>
+        <a:xfrm>
+          <a:off x="0" y="0"/>
+          <a:ext cx="0" cy="0"/>
+          <a:chOff x="0" y="0"/>
+          <a:chExt cx="0" cy="0"/>
+        </a:xfrm>
+      </p:grpSpPr>
+      <p:sp>
+        <p:nvSpPr>
+          <p:cNvPr id="2" name="Text 0"/>
+          <p:cNvSpPr/>
+          <p:nvPr/>
+        </p:nvSpPr>
+        <p:spPr>
+          <a:xfrm>
+            <a:off x="0" y="0"/>
+            <a:ext cx="9144000" cy="101501"/>
+          </a:xfrm>
+          <a:prstGeom prst="rect">
+            <a:avLst/>
+          </a:prstGeom>
+          <a:solidFill>
+            <a:srgbClr val="277884"/>
+          </a:solidFill>
+          <a:ln/>
+        </p:spPr>
+        <p:txBody>
+          <a:bodyPr wrap="square" rtlCol="0" anchor="ctr"/>
+          <a:lstStyle/>
+          <a:p>
+            <a:pPr indent="0" marL="0">
+              <a:buNone/>
+            </a:pPr>
+            <a:endParaRPr lang="en-US" dirty="0"/>
+          </a:p>
+        </p:txBody>
+      </p:sp>
+      <p:sp>
+        <p:nvSpPr>
+          <p:cNvPr id="3" name="Text 1"/>
+          <p:cNvSpPr/>
+          <p:nvPr/>
+        </p:nvSpPr>
+        <p:spPr>
+          <a:xfrm>
+            <a:off x="406301" y="457051"/>
+            <a:ext cx="8498026" cy="274290"/>
+          </a:xfrm>
+          <a:prstGeom prst="rect">
+            <a:avLst/>
+          </a:prstGeom>
+          <a:noFill/>
+          <a:ln/>
+        </p:spPr>
+        <p:txBody>
+          <a:bodyPr wrap="square" lIns="0" tIns="0" rIns="0" bIns="0" rtlCol="0" anchor="t"/>
+          <a:lstStyle/>
+          <a:p>
+            <a:pPr algn="l" indent="0" marL="0">
+              <a:lnSpc>
+                <a:spcPts val="2160"/>
+              </a:lnSpc>
+              <a:spcBef>
+                <a:spcPts val="600"/>
+              </a:spcBef>
+              <a:spcAft>
+                <a:spcPts val="800"/>
+              </a:spcAft>
+              <a:buNone/>
+            </a:pPr>
+            <a:r>
+              <a:rPr lang="en-US" sz="1800" b="1" dirty="0">
+                <a:solidFill>
+                  <a:srgbClr val="FE4447"/>
+                </a:solidFill>
+                <a:latin typeface="Georgia" pitchFamily="34" charset="0"/>
+                <a:ea typeface="Georgia" pitchFamily="34" charset="-122"/>
+                <a:cs typeface="Georgia" pitchFamily="34" charset="-120"/>
+              </a:rPr>
+              <a:t>Wrap-up (5 min)</a:t>
+            </a:r>
+            <a:endParaRPr lang="en-US" sz="1800" dirty="0"/>
+          </a:p>
+        </p:txBody>
+      </p:sp>
+      <p:sp>
+        <p:nvSpPr>
+          <p:cNvPr id="4" name="Text 2"/>
+          <p:cNvSpPr/>
+          <p:nvPr/>
+        </p:nvSpPr>
+        <p:spPr>
+          <a:xfrm>
+            <a:off x="634901" y="883593"/>
+            <a:ext cx="8102798" cy="525661"/>
+          </a:xfrm>
+          <a:prstGeom prst="rect">
+            <a:avLst/>
+          </a:prstGeom>
+          <a:noFill/>
+          <a:ln/>
+        </p:spPr>
+        <p:txBody>
+          <a:bodyPr wrap="square" lIns="0" tIns="0" rIns="0" bIns="0" rtlCol="0" anchor="t"/>
+          <a:lstStyle/>
+          <a:p>
+            <a:pPr algn="l" marL="342900" indent="-342900">
+              <a:lnSpc>
+                <a:spcPts val="1620"/>
+              </a:lnSpc>
+              <a:spcAft>
+                <a:spcPts val="300"/>
+              </a:spcAft>
+              <a:buSzPct val="100000"/>
+              <a:buChar char="•"/>
+            </a:pPr>
+            <a:r>
+              <a:rPr lang="en-US" sz="1200" dirty="0">
+                <a:solidFill>
+                  <a:srgbClr val="1C2833"/>
+                </a:solidFill>
+                <a:latin typeface="Arial" pitchFamily="34" charset="0"/>
+                <a:ea typeface="Arial" pitchFamily="34" charset="-122"/>
+                <a:cs typeface="Arial" pitchFamily="34" charset="-120"/>
+              </a:rPr>
+              <a:t>Quick chorus: </a:t>
+            </a:r>
+            <a:pPr algn="l" indent="0" marL="0">
+              <a:lnSpc>
+                <a:spcPts val="1620"/>
+              </a:lnSpc>
+              <a:spcAft>
+                <a:spcPts val="300"/>
+              </a:spcAft>
+              <a:buNone/>
+            </a:pPr>
+            <a:r>
+              <a:rPr lang="en-US" sz="1200" i="1" dirty="0">
+                <a:solidFill>
+                  <a:srgbClr val="1C2833"/>
+                </a:solidFill>
+                <a:latin typeface="Arial" pitchFamily="34" charset="0"/>
+                <a:ea typeface="Arial" pitchFamily="34" charset="-122"/>
+                <a:cs typeface="Arial" pitchFamily="34" charset="-120"/>
+              </a:rPr>
+              <a:t>"What does the trick break into?"</a:t>
+            </a:r>
+            <a:pPr algn="l" indent="0" marL="0">
+              <a:lnSpc>
+                <a:spcPts val="1620"/>
+              </a:lnSpc>
+              <a:spcAft>
+                <a:spcPts val="300"/>
+              </a:spcAft>
+              <a:buNone/>
+            </a:pPr>
+            <a:r>
+              <a:rPr lang="en-US" sz="1200" dirty="0">
+                <a:solidFill>
+                  <a:srgbClr val="1C2833"/>
+                </a:solidFill>
+                <a:latin typeface="Arial" pitchFamily="34" charset="0"/>
+                <a:ea typeface="Arial" pitchFamily="34" charset="-122"/>
+                <a:cs typeface="Arial" pitchFamily="34" charset="-120"/>
+              </a:rPr>
+              <a:t> — Split, add, drop (and carry if needed).</a:t>
+            </a:r>
+            <a:endParaRPr lang="en-US" sz="1200" dirty="0"/>
+          </a:p>
+          <a:p>
+            <a:pPr algn="l" marL="342900" indent="-342900">
+              <a:lnSpc>
+                <a:spcPts val="1620"/>
+              </a:lnSpc>
+              <a:spcAft>
+                <a:spcPts val="300"/>
+              </a:spcAft>
+              <a:buSzPct val="100000"/>
+              <a:buChar char="•"/>
+            </a:pPr>
+            <a:r>
+              <a:rPr lang="en-US" sz="1200" dirty="0">
+                <a:solidFill>
+                  <a:srgbClr val="1C2833"/>
+                </a:solidFill>
+                <a:latin typeface="Arial" pitchFamily="34" charset="0"/>
+                <a:ea typeface="Arial" pitchFamily="34" charset="-122"/>
+                <a:cs typeface="Arial" pitchFamily="34" charset="-120"/>
+              </a:rPr>
+              <a:t>Tease Day 3: </a:t>
+            </a:r>
+            <a:pPr algn="l" indent="0" marL="0">
+              <a:lnSpc>
+                <a:spcPts val="1620"/>
+              </a:lnSpc>
+              <a:spcAft>
+                <a:spcPts val="300"/>
+              </a:spcAft>
+              <a:buNone/>
+            </a:pPr>
+            <a:r>
+              <a:rPr lang="en-US" sz="1200" i="1" dirty="0">
+                <a:solidFill>
+                  <a:srgbClr val="1C2833"/>
+                </a:solidFill>
+                <a:latin typeface="Arial" pitchFamily="34" charset="0"/>
+                <a:ea typeface="Arial" pitchFamily="34" charset="-122"/>
+                <a:cs typeface="Arial" pitchFamily="34" charset="-120"/>
+              </a:rPr>
+              <a:t>"Tomorrow we PROVE why this works. You'll write the algebra yourself."</a:t>
+            </a:r>
+            <a:endParaRPr lang="en-US" sz="1200" dirty="0"/>
+          </a:p>
+        </p:txBody>
+      </p:sp>
+      <p:sp>
+        <p:nvSpPr>
+          <p:cNvPr id="5" name="Text 3"/>
+          <p:cNvSpPr/>
+          <p:nvPr/>
+        </p:nvSpPr>
+        <p:spPr>
+          <a:xfrm>
+            <a:off x="406301" y="4434929"/>
+            <a:ext cx="8498026" cy="213271"/>
+          </a:xfrm>
+          <a:prstGeom prst="rect">
+            <a:avLst/>
+          </a:prstGeom>
+          <a:noFill/>
+          <a:ln/>
+        </p:spPr>
+        <p:txBody>
+          <a:bodyPr wrap="square" lIns="0" tIns="0" rIns="0" bIns="0" rtlCol="0" anchor="t"/>
+          <a:lstStyle/>
+          <a:p>
+            <a:pPr algn="l" indent="0" marL="0">
+              <a:lnSpc>
+                <a:spcPts val="1680"/>
+              </a:lnSpc>
+              <a:spcBef>
+                <a:spcPts val="300"/>
+              </a:spcBef>
+              <a:spcAft>
+                <a:spcPts val="300"/>
+              </a:spcAft>
+              <a:buNone/>
+            </a:pPr>
+            <a:r>
+              <a:rPr lang="en-US" sz="1200" dirty="0">
+                <a:solidFill>
+                  <a:srgbClr val="1C2833"/>
+                </a:solidFill>
+                <a:latin typeface="Arial" pitchFamily="34" charset="0"/>
+                <a:ea typeface="Arial" pitchFamily="34" charset="-122"/>
+                <a:cs typeface="Arial" pitchFamily="34" charset="-120"/>
+              </a:rPr>
+              <a:t>Middle ·  · IKS Curriculum</a:t>
+            </a:r>
+            <a:endParaRPr lang="en-US" sz="1200" dirty="0"/>
+          </a:p>
+        </p:txBody>
+      </p:sp>
+    </p:spTree>
+  </p:cSld>
+  <p:clrMapOvr>
+    <a:masterClrMapping/>
+  </p:clrMapOvr>
+</p:sld>
+</file>
+
+<file path=ppt/slides/slide17.xml><?xml version="1.0" encoding="utf-8"?>
+<p:sld xmlns:a="http://schemas.openxmlformats.org/drawingml/2006/main" xmlns:r="http://schemas.openxmlformats.org/officeDocument/2006/relationships" xmlns:p="http://schemas.openxmlformats.org/presentationml/2006/main">
+  <p:cSld name="Slide 17">
+    <p:bg>
+      <p:bgPr>
+        <a:solidFill>
+          <a:srgbClr val="FFFFFF"/>
+        </a:solidFill>
+      </p:bgPr>
+    </p:bg>
+    <p:spTree>
+      <p:nvGrpSpPr>
+        <p:cNvPr id="1" name=""/>
+        <p:cNvGrpSpPr/>
+        <p:nvPr/>
+      </p:nvGrpSpPr>
+      <p:grpSpPr>
+        <a:xfrm>
+          <a:off x="0" y="0"/>
+          <a:ext cx="0" cy="0"/>
+          <a:chOff x="0" y="0"/>
+          <a:chExt cx="0" cy="0"/>
+        </a:xfrm>
+      </p:grpSpPr>
+      <p:sp>
+        <p:nvSpPr>
+          <p:cNvPr id="2" name="Text 0"/>
+          <p:cNvSpPr/>
+          <p:nvPr/>
+        </p:nvSpPr>
+        <p:spPr>
+          <a:xfrm>
+            <a:off x="0" y="0"/>
+            <a:ext cx="9144000" cy="101501"/>
+          </a:xfrm>
+          <a:prstGeom prst="rect">
+            <a:avLst/>
+          </a:prstGeom>
+          <a:solidFill>
+            <a:srgbClr val="277884"/>
+          </a:solidFill>
+          <a:ln/>
+        </p:spPr>
+        <p:txBody>
+          <a:bodyPr wrap="square" rtlCol="0" anchor="ctr"/>
+          <a:lstStyle/>
+          <a:p>
+            <a:pPr indent="0" marL="0">
+              <a:buNone/>
+            </a:pPr>
+            <a:endParaRPr lang="en-US" dirty="0"/>
+          </a:p>
+        </p:txBody>
+      </p:sp>
+      <p:sp>
+        <p:nvSpPr>
+          <p:cNvPr id="3" name="Text 1"/>
+          <p:cNvSpPr/>
+          <p:nvPr/>
+        </p:nvSpPr>
+        <p:spPr>
+          <a:xfrm>
+            <a:off x="406301" y="457051"/>
+            <a:ext cx="8498026" cy="274290"/>
+          </a:xfrm>
+          <a:prstGeom prst="rect">
+            <a:avLst/>
+          </a:prstGeom>
+          <a:noFill/>
+          <a:ln/>
+        </p:spPr>
+        <p:txBody>
+          <a:bodyPr wrap="square" lIns="0" tIns="0" rIns="0" bIns="0" rtlCol="0" anchor="t"/>
+          <a:lstStyle/>
+          <a:p>
+            <a:pPr algn="l" indent="0" marL="0">
+              <a:lnSpc>
+                <a:spcPts val="2160"/>
+              </a:lnSpc>
+              <a:spcBef>
+                <a:spcPts val="600"/>
+              </a:spcBef>
+              <a:spcAft>
+                <a:spcPts val="800"/>
+              </a:spcAft>
+              <a:buNone/>
+            </a:pPr>
+            <a:r>
+              <a:rPr lang="en-US" sz="1800" b="1" dirty="0">
+                <a:solidFill>
+                  <a:srgbClr val="FE4447"/>
+                </a:solidFill>
+                <a:latin typeface="Georgia" pitchFamily="34" charset="0"/>
+                <a:ea typeface="Georgia" pitchFamily="34" charset="-122"/>
+                <a:cs typeface="Georgia" pitchFamily="34" charset="-120"/>
+              </a:rPr>
+              <a:t>Student-facing content</a:t>
+            </a:r>
+            <a:endParaRPr lang="en-US" sz="1800" dirty="0"/>
+          </a:p>
+        </p:txBody>
+      </p:sp>
+      <p:sp>
+        <p:nvSpPr>
+          <p:cNvPr id="4" name="Text 2"/>
+          <p:cNvSpPr/>
+          <p:nvPr/>
+        </p:nvSpPr>
+        <p:spPr>
+          <a:xfrm>
+            <a:off x="406301" y="883593"/>
+            <a:ext cx="8331398" cy="2764631"/>
+          </a:xfrm>
+          <a:prstGeom prst="rect">
+            <a:avLst/>
+          </a:prstGeom>
+          <a:solidFill>
+            <a:srgbClr val="F4F8F9"/>
+          </a:solidFill>
+          <a:ln/>
+        </p:spPr>
+        <p:txBody>
+          <a:bodyPr wrap="square" rtlCol="0" anchor="ctr"/>
+          <a:lstStyle/>
+          <a:p>
+            <a:pPr indent="0" marL="0">
+              <a:buNone/>
+            </a:pPr>
+            <a:endParaRPr lang="en-US" dirty="0"/>
+          </a:p>
+        </p:txBody>
+      </p:sp>
+      <p:sp>
+        <p:nvSpPr>
+          <p:cNvPr id="5" name="Shape 3"/>
+          <p:cNvSpPr/>
+          <p:nvPr/>
+        </p:nvSpPr>
+        <p:spPr>
+          <a:xfrm>
+            <a:off x="434876" y="883593"/>
+            <a:ext cx="0" cy="2764631"/>
+          </a:xfrm>
+          <a:prstGeom prst="line">
+            <a:avLst/>
+          </a:prstGeom>
+          <a:noFill/>
+          <a:ln w="57150">
+            <a:solidFill>
+              <a:srgbClr val="FE4447"/>
+            </a:solidFill>
+            <a:prstDash val="solid"/>
+          </a:ln>
+        </p:spPr>
+      </p:sp>
+      <p:sp>
+        <p:nvSpPr>
           <p:cNvPr id="6" name="Text 4"/>
+          <p:cNvSpPr/>
+          <p:nvPr/>
+        </p:nvSpPr>
+        <p:spPr>
+          <a:xfrm>
+            <a:off x="692051" y="1074093"/>
+            <a:ext cx="7973389" cy="230981"/>
+          </a:xfrm>
+          <a:prstGeom prst="rect">
+            <a:avLst/>
+          </a:prstGeom>
+          <a:noFill/>
+          <a:ln/>
+        </p:spPr>
+        <p:txBody>
+          <a:bodyPr wrap="square" lIns="0" tIns="0" rIns="0" bIns="0" rtlCol="0" anchor="t"/>
+          <a:lstStyle/>
+          <a:p>
+            <a:pPr algn="l" indent="0" marL="0">
+              <a:lnSpc>
+                <a:spcPts val="1820"/>
+              </a:lnSpc>
+              <a:spcBef>
+                <a:spcPts val="300"/>
+              </a:spcBef>
+              <a:spcAft>
+                <a:spcPts val="300"/>
+              </a:spcAft>
+              <a:buNone/>
+            </a:pPr>
+            <a:r>
+              <a:rPr lang="en-US" sz="1300" b="1" i="1" dirty="0">
+                <a:solidFill>
+                  <a:srgbClr val="1C2833"/>
+                </a:solidFill>
+                <a:latin typeface="Georgia" pitchFamily="34" charset="0"/>
+                <a:ea typeface="Georgia" pitchFamily="34" charset="-122"/>
+                <a:cs typeface="Georgia" pitchFamily="34" charset="-120"/>
+              </a:rPr>
+              <a:t>The ×11 Trick (with carry)</a:t>
+            </a:r>
+            <a:endParaRPr lang="en-US" sz="1300" dirty="0"/>
+          </a:p>
+        </p:txBody>
+      </p:sp>
+      <p:sp>
+        <p:nvSpPr>
+          <p:cNvPr id="7" name="Text 5"/>
+          <p:cNvSpPr/>
+          <p:nvPr/>
+        </p:nvSpPr>
+        <p:spPr>
+          <a:xfrm>
+            <a:off x="692051" y="1343174"/>
+            <a:ext cx="7973389" cy="230981"/>
+          </a:xfrm>
+          <a:prstGeom prst="rect">
+            <a:avLst/>
+          </a:prstGeom>
+          <a:noFill/>
+          <a:ln/>
+        </p:spPr>
+        <p:txBody>
+          <a:bodyPr wrap="square" lIns="0" tIns="0" rIns="0" bIns="0" rtlCol="0" anchor="t"/>
+          <a:lstStyle/>
+          <a:p>
+            <a:pPr algn="l" indent="0" marL="0">
+              <a:lnSpc>
+                <a:spcPts val="1820"/>
+              </a:lnSpc>
+              <a:spcBef>
+                <a:spcPts val="300"/>
+              </a:spcBef>
+              <a:spcAft>
+                <a:spcPts val="300"/>
+              </a:spcAft>
+              <a:buNone/>
+            </a:pPr>
+            <a:r>
+              <a:rPr lang="en-US" sz="1300" i="1" dirty="0">
+                <a:solidFill>
+                  <a:srgbClr val="1C2833"/>
+                </a:solidFill>
+                <a:latin typeface="Georgia" pitchFamily="34" charset="0"/>
+                <a:ea typeface="Georgia" pitchFamily="34" charset="-122"/>
+                <a:cs typeface="Georgia" pitchFamily="34" charset="-120"/>
+              </a:rPr>
+              <a:t>Split the digits.</a:t>
+            </a:r>
+            <a:endParaRPr lang="en-US" sz="1300" dirty="0"/>
+          </a:p>
+        </p:txBody>
+      </p:sp>
+      <p:sp>
+        <p:nvSpPr>
+          <p:cNvPr id="8" name="Text 6"/>
+          <p:cNvSpPr/>
+          <p:nvPr/>
+        </p:nvSpPr>
+        <p:spPr>
+          <a:xfrm>
+            <a:off x="692051" y="1612255"/>
+            <a:ext cx="7973389" cy="230981"/>
+          </a:xfrm>
+          <a:prstGeom prst="rect">
+            <a:avLst/>
+          </a:prstGeom>
+          <a:noFill/>
+          <a:ln/>
+        </p:spPr>
+        <p:txBody>
+          <a:bodyPr wrap="square" lIns="0" tIns="0" rIns="0" bIns="0" rtlCol="0" anchor="t"/>
+          <a:lstStyle/>
+          <a:p>
+            <a:pPr algn="l" indent="0" marL="0">
+              <a:lnSpc>
+                <a:spcPts val="1820"/>
+              </a:lnSpc>
+              <a:spcBef>
+                <a:spcPts val="300"/>
+              </a:spcBef>
+              <a:spcAft>
+                <a:spcPts val="300"/>
+              </a:spcAft>
+              <a:buNone/>
+            </a:pPr>
+            <a:r>
+              <a:rPr lang="en-US" sz="1300" i="1" dirty="0">
+                <a:solidFill>
+                  <a:srgbClr val="1C2833"/>
+                </a:solidFill>
+                <a:latin typeface="Georgia" pitchFamily="34" charset="0"/>
+                <a:ea typeface="Georgia" pitchFamily="34" charset="-122"/>
+                <a:cs typeface="Georgia" pitchFamily="34" charset="-120"/>
+              </a:rPr>
+              <a:t>Add them.</a:t>
+            </a:r>
+            <a:endParaRPr lang="en-US" sz="1300" dirty="0"/>
+          </a:p>
+        </p:txBody>
+      </p:sp>
+      <p:sp>
+        <p:nvSpPr>
+          <p:cNvPr id="9" name="Text 7"/>
+          <p:cNvSpPr/>
+          <p:nvPr/>
+        </p:nvSpPr>
+        <p:spPr>
+          <a:xfrm>
+            <a:off x="692051" y="1881336"/>
+            <a:ext cx="7973389" cy="230981"/>
+          </a:xfrm>
+          <a:prstGeom prst="rect">
+            <a:avLst/>
+          </a:prstGeom>
+          <a:noFill/>
+          <a:ln/>
+        </p:spPr>
+        <p:txBody>
+          <a:bodyPr wrap="square" lIns="0" tIns="0" rIns="0" bIns="0" rtlCol="0" anchor="t"/>
+          <a:lstStyle/>
+          <a:p>
+            <a:pPr algn="l" indent="0" marL="0">
+              <a:lnSpc>
+                <a:spcPts val="1820"/>
+              </a:lnSpc>
+              <a:spcBef>
+                <a:spcPts val="300"/>
+              </a:spcBef>
+              <a:spcAft>
+                <a:spcPts val="300"/>
+              </a:spcAft>
+              <a:buNone/>
+            </a:pPr>
+            <a:r>
+              <a:rPr lang="en-US" sz="1300" b="1" i="1" dirty="0">
+                <a:solidFill>
+                  <a:srgbClr val="1C2833"/>
+                </a:solidFill>
+                <a:latin typeface="Georgia" pitchFamily="34" charset="0"/>
+                <a:ea typeface="Georgia" pitchFamily="34" charset="-122"/>
+                <a:cs typeface="Georgia" pitchFamily="34" charset="-120"/>
+              </a:rPr>
+              <a:t>If the sum &lt; 10:</a:t>
+            </a:r>
+            <a:pPr algn="l" indent="0" marL="0">
+              <a:lnSpc>
+                <a:spcPts val="1820"/>
+              </a:lnSpc>
+              <a:spcBef>
+                <a:spcPts val="300"/>
+              </a:spcBef>
+              <a:spcAft>
+                <a:spcPts val="300"/>
+              </a:spcAft>
+              <a:buNone/>
+            </a:pPr>
+            <a:r>
+              <a:rPr lang="en-US" sz="1300" dirty="0">
+                <a:solidFill>
+                  <a:srgbClr val="1C2833"/>
+                </a:solidFill>
+                <a:latin typeface="Georgia" pitchFamily="34" charset="0"/>
+                <a:ea typeface="Georgia" pitchFamily="34" charset="-122"/>
+                <a:cs typeface="Georgia" pitchFamily="34" charset="-120"/>
+              </a:rPr>
+              <a:t> drop it in the middle. Done.</a:t>
+            </a:r>
+            <a:endParaRPr lang="en-US" sz="1300" dirty="0"/>
+          </a:p>
+        </p:txBody>
+      </p:sp>
+      <p:sp>
+        <p:nvSpPr>
+          <p:cNvPr id="10" name="Text 8"/>
+          <p:cNvSpPr/>
+          <p:nvPr/>
+        </p:nvSpPr>
+        <p:spPr>
+          <a:xfrm>
+            <a:off x="692051" y="2150418"/>
+            <a:ext cx="7973389" cy="230981"/>
+          </a:xfrm>
+          <a:prstGeom prst="rect">
+            <a:avLst/>
+          </a:prstGeom>
+          <a:noFill/>
+          <a:ln/>
+        </p:spPr>
+        <p:txBody>
+          <a:bodyPr wrap="square" lIns="0" tIns="0" rIns="0" bIns="0" rtlCol="0" anchor="t"/>
+          <a:lstStyle/>
+          <a:p>
+            <a:pPr algn="l" indent="0" marL="0">
+              <a:lnSpc>
+                <a:spcPts val="1820"/>
+              </a:lnSpc>
+              <a:spcBef>
+                <a:spcPts val="300"/>
+              </a:spcBef>
+              <a:spcAft>
+                <a:spcPts val="300"/>
+              </a:spcAft>
+              <a:buNone/>
+            </a:pPr>
+            <a:r>
+              <a:rPr lang="en-US" sz="1300" b="1" i="1" dirty="0">
+                <a:solidFill>
+                  <a:srgbClr val="1C2833"/>
+                </a:solidFill>
+                <a:latin typeface="Georgia" pitchFamily="34" charset="0"/>
+                <a:ea typeface="Georgia" pitchFamily="34" charset="-122"/>
+                <a:cs typeface="Georgia" pitchFamily="34" charset="-120"/>
+              </a:rPr>
+              <a:t>If the sum ≥ 10:</a:t>
+            </a:r>
+            <a:pPr algn="l" indent="0" marL="0">
+              <a:lnSpc>
+                <a:spcPts val="1820"/>
+              </a:lnSpc>
+              <a:spcBef>
+                <a:spcPts val="300"/>
+              </a:spcBef>
+              <a:spcAft>
+                <a:spcPts val="300"/>
+              </a:spcAft>
+              <a:buNone/>
+            </a:pPr>
+            <a:r>
+              <a:rPr lang="en-US" sz="1300" dirty="0">
+                <a:solidFill>
+                  <a:srgbClr val="1C2833"/>
+                </a:solidFill>
+                <a:latin typeface="Georgia" pitchFamily="34" charset="0"/>
+                <a:ea typeface="Georgia" pitchFamily="34" charset="-122"/>
+                <a:cs typeface="Georgia" pitchFamily="34" charset="-120"/>
+              </a:rPr>
+              <a:t> keep the units digit of the sum as the middle; add 1 to the leftmost digit.</a:t>
+            </a:r>
+            <a:endParaRPr lang="en-US" sz="1300" dirty="0"/>
+          </a:p>
+        </p:txBody>
+      </p:sp>
+      <p:sp>
+        <p:nvSpPr>
+          <p:cNvPr id="11" name="Text 9"/>
+          <p:cNvSpPr/>
+          <p:nvPr/>
+        </p:nvSpPr>
+        <p:spPr>
+          <a:xfrm>
+            <a:off x="692051" y="2419499"/>
+            <a:ext cx="7973389" cy="230981"/>
+          </a:xfrm>
+          <a:prstGeom prst="rect">
+            <a:avLst/>
+          </a:prstGeom>
+          <a:noFill/>
+          <a:ln/>
+        </p:spPr>
+        <p:txBody>
+          <a:bodyPr wrap="square" lIns="0" tIns="0" rIns="0" bIns="0" rtlCol="0" anchor="t"/>
+          <a:lstStyle/>
+          <a:p>
+            <a:pPr algn="l" indent="0" marL="0">
+              <a:lnSpc>
+                <a:spcPts val="1820"/>
+              </a:lnSpc>
+              <a:spcBef>
+                <a:spcPts val="300"/>
+              </a:spcBef>
+              <a:spcAft>
+                <a:spcPts val="300"/>
+              </a:spcAft>
+              <a:buNone/>
+            </a:pPr>
+            <a:r>
+              <a:rPr lang="en-US" sz="1300" i="1" dirty="0">
+                <a:solidFill>
+                  <a:srgbClr val="1C2833"/>
+                </a:solidFill>
+                <a:latin typeface="Georgia" pitchFamily="34" charset="0"/>
+                <a:ea typeface="Georgia" pitchFamily="34" charset="-122"/>
+                <a:cs typeface="Georgia" pitchFamily="34" charset="-120"/>
+              </a:rPr>
+              <a:t>Examples:</a:t>
+            </a:r>
+            <a:endParaRPr lang="en-US" sz="1300" dirty="0"/>
+          </a:p>
+        </p:txBody>
+      </p:sp>
+      <p:sp>
+        <p:nvSpPr>
+          <p:cNvPr id="12" name="Text 10"/>
+          <p:cNvSpPr/>
+          <p:nvPr/>
+        </p:nvSpPr>
+        <p:spPr>
+          <a:xfrm>
+            <a:off x="692051" y="2688580"/>
+            <a:ext cx="7973389" cy="230981"/>
+          </a:xfrm>
+          <a:prstGeom prst="rect">
+            <a:avLst/>
+          </a:prstGeom>
+          <a:noFill/>
+          <a:ln/>
+        </p:spPr>
+        <p:txBody>
+          <a:bodyPr wrap="square" lIns="0" tIns="0" rIns="0" bIns="0" rtlCol="0" anchor="t"/>
+          <a:lstStyle/>
+          <a:p>
+            <a:pPr algn="l" indent="0" marL="0">
+              <a:lnSpc>
+                <a:spcPts val="1820"/>
+              </a:lnSpc>
+              <a:spcBef>
+                <a:spcPts val="300"/>
+              </a:spcBef>
+              <a:spcAft>
+                <a:spcPts val="300"/>
+              </a:spcAft>
+              <a:buNone/>
+            </a:pPr>
+            <a:r>
+              <a:rPr lang="en-US" sz="1300" dirty="0">
+                <a:solidFill>
+                  <a:srgbClr val="1C2833"/>
+                </a:solidFill>
+                <a:latin typeface="Georgia" pitchFamily="34" charset="0"/>
+                <a:ea typeface="Georgia" pitchFamily="34" charset="-122"/>
+                <a:cs typeface="Georgia" pitchFamily="34" charset="-120"/>
+              </a:rPr>
+              <a:t>45 × 11: 4+5=9 → 4</a:t>
+            </a:r>
+            <a:pPr algn="l" indent="0" marL="0">
+              <a:lnSpc>
+                <a:spcPts val="1820"/>
+              </a:lnSpc>
+              <a:spcBef>
+                <a:spcPts val="300"/>
+              </a:spcBef>
+              <a:spcAft>
+                <a:spcPts val="300"/>
+              </a:spcAft>
+              <a:buNone/>
+            </a:pPr>
+            <a:r>
+              <a:rPr lang="en-US" sz="1300" b="1" i="1" dirty="0">
+                <a:solidFill>
+                  <a:srgbClr val="1C2833"/>
+                </a:solidFill>
+                <a:latin typeface="Georgia" pitchFamily="34" charset="0"/>
+                <a:ea typeface="Georgia" pitchFamily="34" charset="-122"/>
+                <a:cs typeface="Georgia" pitchFamily="34" charset="-120"/>
+              </a:rPr>
+              <a:t>9</a:t>
+            </a:r>
+            <a:pPr algn="l" indent="0" marL="0">
+              <a:lnSpc>
+                <a:spcPts val="1820"/>
+              </a:lnSpc>
+              <a:spcBef>
+                <a:spcPts val="300"/>
+              </a:spcBef>
+              <a:spcAft>
+                <a:spcPts val="300"/>
+              </a:spcAft>
+              <a:buNone/>
+            </a:pPr>
+            <a:r>
+              <a:rPr lang="en-US" sz="1300" dirty="0">
+                <a:solidFill>
+                  <a:srgbClr val="1C2833"/>
+                </a:solidFill>
+                <a:latin typeface="Georgia" pitchFamily="34" charset="0"/>
+                <a:ea typeface="Georgia" pitchFamily="34" charset="-122"/>
+                <a:cs typeface="Georgia" pitchFamily="34" charset="-120"/>
+              </a:rPr>
+              <a:t>5 = </a:t>
+            </a:r>
+            <a:pPr algn="l" indent="0" marL="0">
+              <a:lnSpc>
+                <a:spcPts val="1820"/>
+              </a:lnSpc>
+              <a:spcBef>
+                <a:spcPts val="300"/>
+              </a:spcBef>
+              <a:spcAft>
+                <a:spcPts val="300"/>
+              </a:spcAft>
+              <a:buNone/>
+            </a:pPr>
+            <a:r>
+              <a:rPr lang="en-US" sz="1300" b="1" i="1" dirty="0">
+                <a:solidFill>
+                  <a:srgbClr val="1C2833"/>
+                </a:solidFill>
+                <a:latin typeface="Georgia" pitchFamily="34" charset="0"/>
+                <a:ea typeface="Georgia" pitchFamily="34" charset="-122"/>
+                <a:cs typeface="Georgia" pitchFamily="34" charset="-120"/>
+              </a:rPr>
+              <a:t>495</a:t>
+            </a:r>
+            <a:endParaRPr lang="en-US" sz="1300" dirty="0"/>
+          </a:p>
+        </p:txBody>
+      </p:sp>
+      <p:sp>
+        <p:nvSpPr>
+          <p:cNvPr id="13" name="Text 11"/>
+          <p:cNvSpPr/>
+          <p:nvPr/>
+        </p:nvSpPr>
+        <p:spPr>
+          <a:xfrm>
+            <a:off x="692051" y="2957661"/>
+            <a:ext cx="7973389" cy="230981"/>
+          </a:xfrm>
+          <a:prstGeom prst="rect">
+            <a:avLst/>
+          </a:prstGeom>
+          <a:noFill/>
+          <a:ln/>
+        </p:spPr>
+        <p:txBody>
+          <a:bodyPr wrap="square" lIns="0" tIns="0" rIns="0" bIns="0" rtlCol="0" anchor="t"/>
+          <a:lstStyle/>
+          <a:p>
+            <a:pPr algn="l" indent="0" marL="0">
+              <a:lnSpc>
+                <a:spcPts val="1820"/>
+              </a:lnSpc>
+              <a:spcBef>
+                <a:spcPts val="300"/>
+              </a:spcBef>
+              <a:spcAft>
+                <a:spcPts val="300"/>
+              </a:spcAft>
+              <a:buNone/>
+            </a:pPr>
+            <a:r>
+              <a:rPr lang="en-US" sz="1300" dirty="0">
+                <a:solidFill>
+                  <a:srgbClr val="1C2833"/>
+                </a:solidFill>
+                <a:latin typeface="Georgia" pitchFamily="34" charset="0"/>
+                <a:ea typeface="Georgia" pitchFamily="34" charset="-122"/>
+                <a:cs typeface="Georgia" pitchFamily="34" charset="-120"/>
+              </a:rPr>
+              <a:t>87 × 11: 8+7=15 → 8</a:t>
+            </a:r>
+            <a:pPr algn="l" indent="0" marL="0">
+              <a:lnSpc>
+                <a:spcPts val="1820"/>
+              </a:lnSpc>
+              <a:spcBef>
+                <a:spcPts val="300"/>
+              </a:spcBef>
+              <a:spcAft>
+                <a:spcPts val="300"/>
+              </a:spcAft>
+              <a:buNone/>
+            </a:pPr>
+            <a:r>
+              <a:rPr lang="en-US" sz="1300" b="1" i="1" dirty="0">
+                <a:solidFill>
+                  <a:srgbClr val="1C2833"/>
+                </a:solidFill>
+                <a:latin typeface="Georgia" pitchFamily="34" charset="0"/>
+                <a:ea typeface="Georgia" pitchFamily="34" charset="-122"/>
+                <a:cs typeface="Georgia" pitchFamily="34" charset="-120"/>
+              </a:rPr>
+              <a:t>(1)5</a:t>
+            </a:r>
+            <a:pPr algn="l" indent="0" marL="0">
+              <a:lnSpc>
+                <a:spcPts val="1820"/>
+              </a:lnSpc>
+              <a:spcBef>
+                <a:spcPts val="300"/>
+              </a:spcBef>
+              <a:spcAft>
+                <a:spcPts val="300"/>
+              </a:spcAft>
+              <a:buNone/>
+            </a:pPr>
+            <a:r>
+              <a:rPr lang="en-US" sz="1300" dirty="0">
+                <a:solidFill>
+                  <a:srgbClr val="1C2833"/>
+                </a:solidFill>
+                <a:latin typeface="Georgia" pitchFamily="34" charset="0"/>
+                <a:ea typeface="Georgia" pitchFamily="34" charset="-122"/>
+                <a:cs typeface="Georgia" pitchFamily="34" charset="-120"/>
+              </a:rPr>
+              <a:t>7 → </a:t>
+            </a:r>
+            <a:pPr algn="l" indent="0" marL="0">
+              <a:lnSpc>
+                <a:spcPts val="1820"/>
+              </a:lnSpc>
+              <a:spcBef>
+                <a:spcPts val="300"/>
+              </a:spcBef>
+              <a:spcAft>
+                <a:spcPts val="300"/>
+              </a:spcAft>
+              <a:buNone/>
+            </a:pPr>
+            <a:r>
+              <a:rPr lang="en-US" sz="1300" b="1" i="1" dirty="0">
+                <a:solidFill>
+                  <a:srgbClr val="1C2833"/>
+                </a:solidFill>
+                <a:latin typeface="Georgia" pitchFamily="34" charset="0"/>
+                <a:ea typeface="Georgia" pitchFamily="34" charset="-122"/>
+                <a:cs typeface="Georgia" pitchFamily="34" charset="-120"/>
+              </a:rPr>
+              <a:t>9</a:t>
+            </a:r>
+            <a:pPr algn="l" indent="0" marL="0">
+              <a:lnSpc>
+                <a:spcPts val="1820"/>
+              </a:lnSpc>
+              <a:spcBef>
+                <a:spcPts val="300"/>
+              </a:spcBef>
+              <a:spcAft>
+                <a:spcPts val="300"/>
+              </a:spcAft>
+              <a:buNone/>
+            </a:pPr>
+            <a:r>
+              <a:rPr lang="en-US" sz="1300" dirty="0">
+                <a:solidFill>
+                  <a:srgbClr val="1C2833"/>
+                </a:solidFill>
+                <a:latin typeface="Georgia" pitchFamily="34" charset="0"/>
+                <a:ea typeface="Georgia" pitchFamily="34" charset="-122"/>
+                <a:cs typeface="Georgia" pitchFamily="34" charset="-120"/>
+              </a:rPr>
+              <a:t>57 = </a:t>
+            </a:r>
+            <a:pPr algn="l" indent="0" marL="0">
+              <a:lnSpc>
+                <a:spcPts val="1820"/>
+              </a:lnSpc>
+              <a:spcBef>
+                <a:spcPts val="300"/>
+              </a:spcBef>
+              <a:spcAft>
+                <a:spcPts val="300"/>
+              </a:spcAft>
+              <a:buNone/>
+            </a:pPr>
+            <a:r>
+              <a:rPr lang="en-US" sz="1300" b="1" i="1" dirty="0">
+                <a:solidFill>
+                  <a:srgbClr val="1C2833"/>
+                </a:solidFill>
+                <a:latin typeface="Georgia" pitchFamily="34" charset="0"/>
+                <a:ea typeface="Georgia" pitchFamily="34" charset="-122"/>
+                <a:cs typeface="Georgia" pitchFamily="34" charset="-120"/>
+              </a:rPr>
+              <a:t>957</a:t>
+            </a:r>
+            <a:endParaRPr lang="en-US" sz="1300" dirty="0"/>
+          </a:p>
+        </p:txBody>
+      </p:sp>
+      <p:sp>
+        <p:nvSpPr>
+          <p:cNvPr id="14" name="Text 12"/>
+          <p:cNvSpPr/>
+          <p:nvPr/>
+        </p:nvSpPr>
+        <p:spPr>
+          <a:xfrm>
+            <a:off x="692051" y="3226743"/>
+            <a:ext cx="7973389" cy="230981"/>
+          </a:xfrm>
+          <a:prstGeom prst="rect">
+            <a:avLst/>
+          </a:prstGeom>
+          <a:noFill/>
+          <a:ln/>
+        </p:spPr>
+        <p:txBody>
+          <a:bodyPr wrap="square" lIns="0" tIns="0" rIns="0" bIns="0" rtlCol="0" anchor="t"/>
+          <a:lstStyle/>
+          <a:p>
+            <a:pPr algn="l" indent="0" marL="0">
+              <a:lnSpc>
+                <a:spcPts val="1820"/>
+              </a:lnSpc>
+              <a:spcBef>
+                <a:spcPts val="300"/>
+              </a:spcBef>
+              <a:spcAft>
+                <a:spcPts val="300"/>
+              </a:spcAft>
+              <a:buNone/>
+            </a:pPr>
+            <a:r>
+              <a:rPr lang="en-US" sz="1300" dirty="0">
+                <a:solidFill>
+                  <a:srgbClr val="1C2833"/>
+                </a:solidFill>
+                <a:latin typeface="Georgia" pitchFamily="34" charset="0"/>
+                <a:ea typeface="Georgia" pitchFamily="34" charset="-122"/>
+                <a:cs typeface="Georgia" pitchFamily="34" charset="-120"/>
+              </a:rPr>
+              <a:t>99 × 11: 9+9=18 → 9</a:t>
+            </a:r>
+            <a:pPr algn="l" indent="0" marL="0">
+              <a:lnSpc>
+                <a:spcPts val="1820"/>
+              </a:lnSpc>
+              <a:spcBef>
+                <a:spcPts val="300"/>
+              </a:spcBef>
+              <a:spcAft>
+                <a:spcPts val="300"/>
+              </a:spcAft>
+              <a:buNone/>
+            </a:pPr>
+            <a:r>
+              <a:rPr lang="en-US" sz="1300" b="1" i="1" dirty="0">
+                <a:solidFill>
+                  <a:srgbClr val="1C2833"/>
+                </a:solidFill>
+                <a:latin typeface="Georgia" pitchFamily="34" charset="0"/>
+                <a:ea typeface="Georgia" pitchFamily="34" charset="-122"/>
+                <a:cs typeface="Georgia" pitchFamily="34" charset="-120"/>
+              </a:rPr>
+              <a:t>(1)8</a:t>
+            </a:r>
+            <a:pPr algn="l" indent="0" marL="0">
+              <a:lnSpc>
+                <a:spcPts val="1820"/>
+              </a:lnSpc>
+              <a:spcBef>
+                <a:spcPts val="300"/>
+              </a:spcBef>
+              <a:spcAft>
+                <a:spcPts val="300"/>
+              </a:spcAft>
+              <a:buNone/>
+            </a:pPr>
+            <a:r>
+              <a:rPr lang="en-US" sz="1300" dirty="0">
+                <a:solidFill>
+                  <a:srgbClr val="1C2833"/>
+                </a:solidFill>
+                <a:latin typeface="Georgia" pitchFamily="34" charset="0"/>
+                <a:ea typeface="Georgia" pitchFamily="34" charset="-122"/>
+                <a:cs typeface="Georgia" pitchFamily="34" charset="-120"/>
+              </a:rPr>
+              <a:t>9 → cascade → 1</a:t>
+            </a:r>
+            <a:pPr algn="l" indent="0" marL="0">
+              <a:lnSpc>
+                <a:spcPts val="1820"/>
+              </a:lnSpc>
+              <a:spcBef>
+                <a:spcPts val="300"/>
+              </a:spcBef>
+              <a:spcAft>
+                <a:spcPts val="300"/>
+              </a:spcAft>
+              <a:buNone/>
+            </a:pPr>
+            <a:r>
+              <a:rPr lang="en-US" sz="1300" b="1" i="1" dirty="0">
+                <a:solidFill>
+                  <a:srgbClr val="1C2833"/>
+                </a:solidFill>
+                <a:latin typeface="Georgia" pitchFamily="34" charset="0"/>
+                <a:ea typeface="Georgia" pitchFamily="34" charset="-122"/>
+                <a:cs typeface="Georgia" pitchFamily="34" charset="-120"/>
+              </a:rPr>
+              <a:t>0</a:t>
+            </a:r>
+            <a:pPr algn="l" indent="0" marL="0">
+              <a:lnSpc>
+                <a:spcPts val="1820"/>
+              </a:lnSpc>
+              <a:spcBef>
+                <a:spcPts val="300"/>
+              </a:spcBef>
+              <a:spcAft>
+                <a:spcPts val="300"/>
+              </a:spcAft>
+              <a:buNone/>
+            </a:pPr>
+            <a:r>
+              <a:rPr lang="en-US" sz="1300" dirty="0">
+                <a:solidFill>
+                  <a:srgbClr val="1C2833"/>
+                </a:solidFill>
+                <a:latin typeface="Georgia" pitchFamily="34" charset="0"/>
+                <a:ea typeface="Georgia" pitchFamily="34" charset="-122"/>
+                <a:cs typeface="Georgia" pitchFamily="34" charset="-120"/>
+              </a:rPr>
+              <a:t>89 = </a:t>
+            </a:r>
+            <a:pPr algn="l" indent="0" marL="0">
+              <a:lnSpc>
+                <a:spcPts val="1820"/>
+              </a:lnSpc>
+              <a:spcBef>
+                <a:spcPts val="300"/>
+              </a:spcBef>
+              <a:spcAft>
+                <a:spcPts val="300"/>
+              </a:spcAft>
+              <a:buNone/>
+            </a:pPr>
+            <a:r>
+              <a:rPr lang="en-US" sz="1300" b="1" i="1" dirty="0">
+                <a:solidFill>
+                  <a:srgbClr val="1C2833"/>
+                </a:solidFill>
+                <a:latin typeface="Georgia" pitchFamily="34" charset="0"/>
+                <a:ea typeface="Georgia" pitchFamily="34" charset="-122"/>
+                <a:cs typeface="Georgia" pitchFamily="34" charset="-120"/>
+              </a:rPr>
+              <a:t>1089</a:t>
+            </a:r>
+            <a:endParaRPr lang="en-US" sz="1300" dirty="0"/>
+          </a:p>
+        </p:txBody>
+      </p:sp>
+      <p:sp>
+        <p:nvSpPr>
+          <p:cNvPr id="15" name="Text 13"/>
+          <p:cNvSpPr/>
+          <p:nvPr/>
+        </p:nvSpPr>
+        <p:spPr>
+          <a:xfrm>
+            <a:off x="406301" y="4434929"/>
+            <a:ext cx="8498026" cy="213271"/>
+          </a:xfrm>
+          <a:prstGeom prst="rect">
+            <a:avLst/>
+          </a:prstGeom>
+          <a:noFill/>
+          <a:ln/>
+        </p:spPr>
+        <p:txBody>
+          <a:bodyPr wrap="square" lIns="0" tIns="0" rIns="0" bIns="0" rtlCol="0" anchor="t"/>
+          <a:lstStyle/>
+          <a:p>
+            <a:pPr algn="l" indent="0" marL="0">
+              <a:lnSpc>
+                <a:spcPts val="1680"/>
+              </a:lnSpc>
+              <a:spcBef>
+                <a:spcPts val="300"/>
+              </a:spcBef>
+              <a:spcAft>
+                <a:spcPts val="300"/>
+              </a:spcAft>
+              <a:buNone/>
+            </a:pPr>
+            <a:r>
+              <a:rPr lang="en-US" sz="1200" dirty="0">
+                <a:solidFill>
+                  <a:srgbClr val="1C2833"/>
+                </a:solidFill>
+                <a:latin typeface="Arial" pitchFamily="34" charset="0"/>
+                <a:ea typeface="Arial" pitchFamily="34" charset="-122"/>
+                <a:cs typeface="Arial" pitchFamily="34" charset="-120"/>
+              </a:rPr>
+              <a:t>Middle ·  · IKS Curriculum</a:t>
+            </a:r>
+            <a:endParaRPr lang="en-US" sz="1200" dirty="0"/>
+          </a:p>
+        </p:txBody>
+      </p:sp>
+    </p:spTree>
+  </p:cSld>
+  <p:clrMapOvr>
+    <a:masterClrMapping/>
+  </p:clrMapOvr>
+</p:sld>
+</file>
+
+<file path=ppt/slides/slide18.xml><?xml version="1.0" encoding="utf-8"?>
+<p:sld xmlns:a="http://schemas.openxmlformats.org/drawingml/2006/main" xmlns:r="http://schemas.openxmlformats.org/officeDocument/2006/relationships" xmlns:p="http://schemas.openxmlformats.org/presentationml/2006/main">
+  <p:cSld name="Slide 18">
+    <p:bg>
+      <p:bgPr>
+        <a:solidFill>
+          <a:srgbClr val="FFFFFF"/>
+        </a:solidFill>
+      </p:bgPr>
+    </p:bg>
+    <p:spTree>
+      <p:nvGrpSpPr>
+        <p:cNvPr id="1" name=""/>
+        <p:cNvGrpSpPr/>
+        <p:nvPr/>
+      </p:nvGrpSpPr>
+      <p:grpSpPr>
+        <a:xfrm>
+          <a:off x="0" y="0"/>
+          <a:ext cx="0" cy="0"/>
+          <a:chOff x="0" y="0"/>
+          <a:chExt cx="0" cy="0"/>
+        </a:xfrm>
+      </p:grpSpPr>
+      <p:sp>
+        <p:nvSpPr>
+          <p:cNvPr id="2" name="Text 0"/>
+          <p:cNvSpPr/>
+          <p:nvPr/>
+        </p:nvSpPr>
+        <p:spPr>
+          <a:xfrm>
+            <a:off x="0" y="0"/>
+            <a:ext cx="9144000" cy="101501"/>
+          </a:xfrm>
+          <a:prstGeom prst="rect">
+            <a:avLst/>
+          </a:prstGeom>
+          <a:solidFill>
+            <a:srgbClr val="277884"/>
+          </a:solidFill>
+          <a:ln/>
+        </p:spPr>
+        <p:txBody>
+          <a:bodyPr wrap="square" rtlCol="0" anchor="ctr"/>
+          <a:lstStyle/>
+          <a:p>
+            <a:pPr indent="0" marL="0">
+              <a:buNone/>
+            </a:pPr>
+            <a:endParaRPr lang="en-US" dirty="0"/>
+          </a:p>
+        </p:txBody>
+      </p:sp>
+      <p:sp>
+        <p:nvSpPr>
+          <p:cNvPr id="3" name="Text 1"/>
+          <p:cNvSpPr/>
+          <p:nvPr/>
+        </p:nvSpPr>
+        <p:spPr>
+          <a:xfrm>
+            <a:off x="406301" y="457051"/>
+            <a:ext cx="8498026" cy="274290"/>
+          </a:xfrm>
+          <a:prstGeom prst="rect">
+            <a:avLst/>
+          </a:prstGeom>
+          <a:noFill/>
+          <a:ln/>
+        </p:spPr>
+        <p:txBody>
+          <a:bodyPr wrap="square" lIns="0" tIns="0" rIns="0" bIns="0" rtlCol="0" anchor="t"/>
+          <a:lstStyle/>
+          <a:p>
+            <a:pPr algn="l" indent="0" marL="0">
+              <a:lnSpc>
+                <a:spcPts val="2160"/>
+              </a:lnSpc>
+              <a:spcBef>
+                <a:spcPts val="600"/>
+              </a:spcBef>
+              <a:spcAft>
+                <a:spcPts val="800"/>
+              </a:spcAft>
+              <a:buNone/>
+            </a:pPr>
+            <a:r>
+              <a:rPr lang="en-US" sz="1800" b="1" dirty="0">
+                <a:solidFill>
+                  <a:srgbClr val="FE4447"/>
+                </a:solidFill>
+                <a:latin typeface="Georgia" pitchFamily="34" charset="0"/>
+                <a:ea typeface="Georgia" pitchFamily="34" charset="-122"/>
+                <a:cs typeface="Georgia" pitchFamily="34" charset="-120"/>
+              </a:rPr>
+              <a:t>Homework</a:t>
+            </a:r>
+            <a:endParaRPr lang="en-US" sz="1800" dirty="0"/>
+          </a:p>
+        </p:txBody>
+      </p:sp>
+      <p:sp>
+        <p:nvSpPr>
+          <p:cNvPr id="4" name="Text 2"/>
+          <p:cNvSpPr/>
+          <p:nvPr/>
+        </p:nvSpPr>
+        <p:spPr>
+          <a:xfrm>
+            <a:off x="634901" y="883593"/>
+            <a:ext cx="8102798" cy="525661"/>
+          </a:xfrm>
+          <a:prstGeom prst="rect">
+            <a:avLst/>
+          </a:prstGeom>
+          <a:noFill/>
+          <a:ln/>
+        </p:spPr>
+        <p:txBody>
+          <a:bodyPr wrap="square" lIns="0" tIns="0" rIns="0" bIns="0" rtlCol="0" anchor="t"/>
+          <a:lstStyle/>
+          <a:p>
+            <a:pPr algn="l" marL="342900" indent="-342900">
+              <a:lnSpc>
+                <a:spcPts val="1620"/>
+              </a:lnSpc>
+              <a:spcAft>
+                <a:spcPts val="300"/>
+              </a:spcAft>
+              <a:buSzPct val="100000"/>
+              <a:buChar char="•"/>
+            </a:pPr>
+            <a:r>
+              <a:rPr lang="en-US" sz="1200" dirty="0">
+                <a:solidFill>
+                  <a:srgbClr val="1C2833"/>
+                </a:solidFill>
+                <a:latin typeface="Arial" pitchFamily="34" charset="0"/>
+                <a:ea typeface="Arial" pitchFamily="34" charset="-122"/>
+                <a:cs typeface="Arial" pitchFamily="34" charset="-120"/>
+              </a:rPr>
+              <a:t>8 mental ×11 problems (carry case): 76, 84, 85, 88, 93, 96, 67, 78 — multiplied by 11. Write the answers.</a:t>
+            </a:r>
+            <a:endParaRPr lang="en-US" sz="1200" dirty="0"/>
+          </a:p>
+          <a:p>
+            <a:pPr algn="l" marL="342900" indent="-342900">
+              <a:lnSpc>
+                <a:spcPts val="1620"/>
+              </a:lnSpc>
+              <a:spcAft>
+                <a:spcPts val="300"/>
+              </a:spcAft>
+              <a:buSzPct val="100000"/>
+              <a:buChar char="•"/>
+            </a:pPr>
+            <a:r>
+              <a:rPr lang="en-US" sz="1200" dirty="0">
+                <a:solidFill>
+                  <a:srgbClr val="1C2833"/>
+                </a:solidFill>
+                <a:latin typeface="Arial" pitchFamily="34" charset="0"/>
+                <a:ea typeface="Arial" pitchFamily="34" charset="-122"/>
+                <a:cs typeface="Arial" pitchFamily="34" charset="-120"/>
+              </a:rPr>
+              <a:t>Time yourself. Goal: under 30 seconds total.</a:t>
+            </a:r>
+            <a:endParaRPr lang="en-US" sz="1200" dirty="0"/>
+          </a:p>
+        </p:txBody>
+      </p:sp>
+      <p:sp>
+        <p:nvSpPr>
+          <p:cNvPr id="5" name="Text 3"/>
+          <p:cNvSpPr/>
+          <p:nvPr/>
+        </p:nvSpPr>
+        <p:spPr>
+          <a:xfrm>
+            <a:off x="406301" y="4434929"/>
+            <a:ext cx="8498026" cy="213271"/>
+          </a:xfrm>
+          <a:prstGeom prst="rect">
+            <a:avLst/>
+          </a:prstGeom>
+          <a:noFill/>
+          <a:ln/>
+        </p:spPr>
+        <p:txBody>
+          <a:bodyPr wrap="square" lIns="0" tIns="0" rIns="0" bIns="0" rtlCol="0" anchor="t"/>
+          <a:lstStyle/>
+          <a:p>
+            <a:pPr algn="l" indent="0" marL="0">
+              <a:lnSpc>
+                <a:spcPts val="1680"/>
+              </a:lnSpc>
+              <a:spcBef>
+                <a:spcPts val="300"/>
+              </a:spcBef>
+              <a:spcAft>
+                <a:spcPts val="300"/>
+              </a:spcAft>
+              <a:buNone/>
+            </a:pPr>
+            <a:r>
+              <a:rPr lang="en-US" sz="1200" dirty="0">
+                <a:solidFill>
+                  <a:srgbClr val="1C2833"/>
+                </a:solidFill>
+                <a:latin typeface="Arial" pitchFamily="34" charset="0"/>
+                <a:ea typeface="Arial" pitchFamily="34" charset="-122"/>
+                <a:cs typeface="Arial" pitchFamily="34" charset="-120"/>
+              </a:rPr>
+              <a:t>Middle ·  · IKS Curriculum</a:t>
+            </a:r>
+            <a:endParaRPr lang="en-US" sz="1200" dirty="0"/>
+          </a:p>
+        </p:txBody>
+      </p:sp>
+    </p:spTree>
+  </p:cSld>
+  <p:clrMapOvr>
+    <a:masterClrMapping/>
+  </p:clrMapOvr>
+</p:sld>
+</file>
+
+<file path=ppt/slides/slide19.xml><?xml version="1.0" encoding="utf-8"?>
+<p:sld xmlns:a="http://schemas.openxmlformats.org/drawingml/2006/main" xmlns:r="http://schemas.openxmlformats.org/officeDocument/2006/relationships" xmlns:p="http://schemas.openxmlformats.org/presentationml/2006/main">
+  <p:cSld name="Slide 19">
+    <p:bg>
+      <p:bgPr>
+        <a:solidFill>
+          <a:srgbClr val="FFFFFF"/>
+        </a:solidFill>
+      </p:bgPr>
+    </p:bg>
+    <p:spTree>
+      <p:nvGrpSpPr>
+        <p:cNvPr id="1" name=""/>
+        <p:cNvGrpSpPr/>
+        <p:nvPr/>
+      </p:nvGrpSpPr>
+      <p:grpSpPr>
+        <a:xfrm>
+          <a:off x="0" y="0"/>
+          <a:ext cx="0" cy="0"/>
+          <a:chOff x="0" y="0"/>
+          <a:chExt cx="0" cy="0"/>
+        </a:xfrm>
+      </p:grpSpPr>
+      <p:sp>
+        <p:nvSpPr>
+          <p:cNvPr id="2" name="Text 0"/>
+          <p:cNvSpPr/>
+          <p:nvPr/>
+        </p:nvSpPr>
+        <p:spPr>
+          <a:xfrm>
+            <a:off x="0" y="0"/>
+            <a:ext cx="9144000" cy="101501"/>
+          </a:xfrm>
+          <a:prstGeom prst="rect">
+            <a:avLst/>
+          </a:prstGeom>
+          <a:solidFill>
+            <a:srgbClr val="277884"/>
+          </a:solidFill>
+          <a:ln/>
+        </p:spPr>
+        <p:txBody>
+          <a:bodyPr wrap="square" rtlCol="0" anchor="ctr"/>
+          <a:lstStyle/>
+          <a:p>
+            <a:pPr indent="0" marL="0">
+              <a:buNone/>
+            </a:pPr>
+            <a:endParaRPr lang="en-US" dirty="0"/>
+          </a:p>
+        </p:txBody>
+      </p:sp>
+      <p:sp>
+        <p:nvSpPr>
+          <p:cNvPr id="3" name="Text 1"/>
+          <p:cNvSpPr/>
+          <p:nvPr/>
+        </p:nvSpPr>
+        <p:spPr>
+          <a:xfrm>
+            <a:off x="406301" y="457051"/>
+            <a:ext cx="8498026" cy="274290"/>
+          </a:xfrm>
+          <a:prstGeom prst="rect">
+            <a:avLst/>
+          </a:prstGeom>
+          <a:noFill/>
+          <a:ln/>
+        </p:spPr>
+        <p:txBody>
+          <a:bodyPr wrap="square" lIns="0" tIns="0" rIns="0" bIns="0" rtlCol="0" anchor="t"/>
+          <a:lstStyle/>
+          <a:p>
+            <a:pPr algn="l" indent="0" marL="0">
+              <a:lnSpc>
+                <a:spcPts val="2160"/>
+              </a:lnSpc>
+              <a:spcBef>
+                <a:spcPts val="600"/>
+              </a:spcBef>
+              <a:spcAft>
+                <a:spcPts val="800"/>
+              </a:spcAft>
+              <a:buNone/>
+            </a:pPr>
+            <a:r>
+              <a:rPr lang="en-US" sz="1800" b="1" dirty="0">
+                <a:solidFill>
+                  <a:srgbClr val="FE4447"/>
+                </a:solidFill>
+                <a:latin typeface="Georgia" pitchFamily="34" charset="0"/>
+                <a:ea typeface="Georgia" pitchFamily="34" charset="-122"/>
+                <a:cs typeface="Georgia" pitchFamily="34" charset="-120"/>
+              </a:rPr>
+              <a:t>Differentiation</a:t>
+            </a:r>
+            <a:endParaRPr lang="en-US" sz="1800" dirty="0"/>
+          </a:p>
+        </p:txBody>
+      </p:sp>
+      <p:sp>
+        <p:nvSpPr>
+          <p:cNvPr id="4" name="Text 2"/>
+          <p:cNvSpPr/>
+          <p:nvPr/>
+        </p:nvSpPr>
+        <p:spPr>
+          <a:xfrm>
+            <a:off x="634901" y="883593"/>
+            <a:ext cx="8102798" cy="731341"/>
+          </a:xfrm>
+          <a:prstGeom prst="rect">
+            <a:avLst/>
+          </a:prstGeom>
+          <a:noFill/>
+          <a:ln/>
+        </p:spPr>
+        <p:txBody>
+          <a:bodyPr wrap="square" lIns="0" tIns="0" rIns="0" bIns="0" rtlCol="0" anchor="t"/>
+          <a:lstStyle/>
+          <a:p>
+            <a:pPr algn="l" marL="342900" indent="-342900">
+              <a:lnSpc>
+                <a:spcPts val="1620"/>
+              </a:lnSpc>
+              <a:spcAft>
+                <a:spcPts val="300"/>
+              </a:spcAft>
+              <a:buSzPct val="100000"/>
+              <a:buChar char="•"/>
+            </a:pPr>
+            <a:r>
+              <a:rPr lang="en-US" sz="1200" b="1" dirty="0">
+                <a:solidFill>
+                  <a:srgbClr val="1C2833"/>
+                </a:solidFill>
+                <a:latin typeface="Arial" pitchFamily="34" charset="0"/>
+                <a:ea typeface="Arial" pitchFamily="34" charset="-122"/>
+                <a:cs typeface="Arial" pitchFamily="34" charset="-120"/>
+              </a:rPr>
+              <a:t>Tier up:</a:t>
+            </a:r>
+            <a:pPr algn="l" indent="0" marL="0">
+              <a:lnSpc>
+                <a:spcPts val="1620"/>
+              </a:lnSpc>
+              <a:spcAft>
+                <a:spcPts val="300"/>
+              </a:spcAft>
+              <a:buNone/>
+            </a:pPr>
+            <a:r>
+              <a:rPr lang="en-US" sz="1200" dirty="0">
+                <a:solidFill>
+                  <a:srgbClr val="1C2833"/>
+                </a:solidFill>
+                <a:latin typeface="Arial" pitchFamily="34" charset="0"/>
+                <a:ea typeface="Arial" pitchFamily="34" charset="-122"/>
+                <a:cs typeface="Arial" pitchFamily="34" charset="-120"/>
+              </a:rPr>
+              <a:t> Find a 2-digit number where the trick gives a 4-digit answer (i.e. 99 × 11 = 1089). Can you find any others, or is 99 unique? Justify.</a:t>
+            </a:r>
+            <a:endParaRPr lang="en-US" sz="1200" dirty="0"/>
+          </a:p>
+          <a:p>
+            <a:pPr algn="l" marL="342900" indent="-342900">
+              <a:lnSpc>
+                <a:spcPts val="1620"/>
+              </a:lnSpc>
+              <a:spcAft>
+                <a:spcPts val="300"/>
+              </a:spcAft>
+              <a:buSzPct val="100000"/>
+              <a:buChar char="•"/>
+            </a:pPr>
+            <a:r>
+              <a:rPr lang="en-US" sz="1200" b="1" dirty="0">
+                <a:solidFill>
+                  <a:srgbClr val="1C2833"/>
+                </a:solidFill>
+                <a:latin typeface="Arial" pitchFamily="34" charset="0"/>
+                <a:ea typeface="Arial" pitchFamily="34" charset="-122"/>
+                <a:cs typeface="Arial" pitchFamily="34" charset="-120"/>
+              </a:rPr>
+              <a:t>Tier down:</a:t>
+            </a:r>
+            <a:pPr algn="l" indent="0" marL="0">
+              <a:lnSpc>
+                <a:spcPts val="1620"/>
+              </a:lnSpc>
+              <a:spcAft>
+                <a:spcPts val="300"/>
+              </a:spcAft>
+              <a:buNone/>
+            </a:pPr>
+            <a:r>
+              <a:rPr lang="en-US" sz="1200" dirty="0">
+                <a:solidFill>
+                  <a:srgbClr val="1C2833"/>
+                </a:solidFill>
+                <a:latin typeface="Arial" pitchFamily="34" charset="0"/>
+                <a:ea typeface="Arial" pitchFamily="34" charset="-122"/>
+                <a:cs typeface="Arial" pitchFamily="34" charset="-120"/>
+              </a:rPr>
+              <a:t> Solve only the no-carry problems on the worksheet today. We'll cement carries on Day 4.</a:t>
+            </a:r>
+            <a:endParaRPr lang="en-US" sz="1200" dirty="0"/>
+          </a:p>
+        </p:txBody>
+      </p:sp>
+      <p:sp>
+        <p:nvSpPr>
+          <p:cNvPr id="5" name="Text 3"/>
           <p:cNvSpPr/>
           <p:nvPr/>
         </p:nvSpPr>
@@ -3565,7 +7376,7 @@
                 <a:ea typeface="Georgia" pitchFamily="34" charset="-122"/>
                 <a:cs typeface="Georgia" pitchFamily="34" charset="-120"/>
               </a:rPr>
-              <a:t>Materials</a:t>
+              <a:t>Learning objective</a:t>
             </a:r>
             <a:endParaRPr lang="en-US" sz="1800" dirty="0"/>
           </a:p>
@@ -3580,7 +7391,7 @@
         <p:spPr>
           <a:xfrm>
             <a:off x="406301" y="870942"/>
-            <a:ext cx="8498026" cy="213271"/>
+            <a:ext cx="8498026" cy="426541"/>
           </a:xfrm>
           <a:prstGeom prst="rect">
             <a:avLst/>
@@ -3613,7 +7424,627 @@
                 <a:ea typeface="Arial" pitchFamily="34" charset="-122"/>
                 <a:cs typeface="Arial" pitchFamily="34" charset="-120"/>
               </a:rPr>
-              <a:t>– Whiteboard. – Printed worksheet of 12 problems, mixing no-carry and carry cases. – Stopwatch.</a:t>
+              <a:t>By the end of this lesson, students will correctly handle the carry case in 2-digit × 11 (where the digit sum ≥ 10), including problems like 87 × 11 = 957, in under 5 seconds.</a:t>
+            </a:r>
+            <a:endParaRPr lang="en-US" sz="1200" dirty="0"/>
+          </a:p>
+        </p:txBody>
+      </p:sp>
+      <p:sp>
+        <p:nvSpPr>
+          <p:cNvPr id="5" name="Text 3"/>
+          <p:cNvSpPr/>
+          <p:nvPr/>
+        </p:nvSpPr>
+        <p:spPr>
+          <a:xfrm>
+            <a:off x="406301" y="4434929"/>
+            <a:ext cx="8498026" cy="213271"/>
+          </a:xfrm>
+          <a:prstGeom prst="rect">
+            <a:avLst/>
+          </a:prstGeom>
+          <a:noFill/>
+          <a:ln/>
+        </p:spPr>
+        <p:txBody>
+          <a:bodyPr wrap="square" lIns="0" tIns="0" rIns="0" bIns="0" rtlCol="0" anchor="t"/>
+          <a:lstStyle/>
+          <a:p>
+            <a:pPr algn="l" indent="0" marL="0">
+              <a:lnSpc>
+                <a:spcPts val="1680"/>
+              </a:lnSpc>
+              <a:spcBef>
+                <a:spcPts val="300"/>
+              </a:spcBef>
+              <a:spcAft>
+                <a:spcPts val="300"/>
+              </a:spcAft>
+              <a:buNone/>
+            </a:pPr>
+            <a:r>
+              <a:rPr lang="en-US" sz="1200" dirty="0">
+                <a:solidFill>
+                  <a:srgbClr val="1C2833"/>
+                </a:solidFill>
+                <a:latin typeface="Arial" pitchFamily="34" charset="0"/>
+                <a:ea typeface="Arial" pitchFamily="34" charset="-122"/>
+                <a:cs typeface="Arial" pitchFamily="34" charset="-120"/>
+              </a:rPr>
+              <a:t>Middle ·  · IKS Curriculum</a:t>
+            </a:r>
+            <a:endParaRPr lang="en-US" sz="1200" dirty="0"/>
+          </a:p>
+        </p:txBody>
+      </p:sp>
+    </p:spTree>
+  </p:cSld>
+  <p:clrMapOvr>
+    <a:masterClrMapping/>
+  </p:clrMapOvr>
+</p:sld>
+</file>
+
+<file path=ppt/slides/slide20.xml><?xml version="1.0" encoding="utf-8"?>
+<p:sld xmlns:a="http://schemas.openxmlformats.org/drawingml/2006/main" xmlns:r="http://schemas.openxmlformats.org/officeDocument/2006/relationships" xmlns:p="http://schemas.openxmlformats.org/presentationml/2006/main">
+  <p:cSld name="Slide 20">
+    <p:bg>
+      <p:bgPr>
+        <a:solidFill>
+          <a:srgbClr val="FFFFFF"/>
+        </a:solidFill>
+      </p:bgPr>
+    </p:bg>
+    <p:spTree>
+      <p:nvGrpSpPr>
+        <p:cNvPr id="1" name=""/>
+        <p:cNvGrpSpPr/>
+        <p:nvPr/>
+      </p:nvGrpSpPr>
+      <p:grpSpPr>
+        <a:xfrm>
+          <a:off x="0" y="0"/>
+          <a:ext cx="0" cy="0"/>
+          <a:chOff x="0" y="0"/>
+          <a:chExt cx="0" cy="0"/>
+        </a:xfrm>
+      </p:grpSpPr>
+      <p:sp>
+        <p:nvSpPr>
+          <p:cNvPr id="2" name="Text 0"/>
+          <p:cNvSpPr/>
+          <p:nvPr/>
+        </p:nvSpPr>
+        <p:spPr>
+          <a:xfrm>
+            <a:off x="0" y="0"/>
+            <a:ext cx="9144000" cy="101501"/>
+          </a:xfrm>
+          <a:prstGeom prst="rect">
+            <a:avLst/>
+          </a:prstGeom>
+          <a:solidFill>
+            <a:srgbClr val="277884"/>
+          </a:solidFill>
+          <a:ln/>
+        </p:spPr>
+        <p:txBody>
+          <a:bodyPr wrap="square" rtlCol="0" anchor="ctr"/>
+          <a:lstStyle/>
+          <a:p>
+            <a:pPr indent="0" marL="0">
+              <a:buNone/>
+            </a:pPr>
+            <a:endParaRPr lang="en-US" dirty="0"/>
+          </a:p>
+        </p:txBody>
+      </p:sp>
+      <p:sp>
+        <p:nvSpPr>
+          <p:cNvPr id="3" name="Text 1"/>
+          <p:cNvSpPr/>
+          <p:nvPr/>
+        </p:nvSpPr>
+        <p:spPr>
+          <a:xfrm>
+            <a:off x="406301" y="457051"/>
+            <a:ext cx="8498026" cy="274290"/>
+          </a:xfrm>
+          <a:prstGeom prst="rect">
+            <a:avLst/>
+          </a:prstGeom>
+          <a:noFill/>
+          <a:ln/>
+        </p:spPr>
+        <p:txBody>
+          <a:bodyPr wrap="square" lIns="0" tIns="0" rIns="0" bIns="0" rtlCol="0" anchor="t"/>
+          <a:lstStyle/>
+          <a:p>
+            <a:pPr algn="l" indent="0" marL="0">
+              <a:lnSpc>
+                <a:spcPts val="2160"/>
+              </a:lnSpc>
+              <a:spcBef>
+                <a:spcPts val="600"/>
+              </a:spcBef>
+              <a:spcAft>
+                <a:spcPts val="800"/>
+              </a:spcAft>
+              <a:buNone/>
+            </a:pPr>
+            <a:r>
+              <a:rPr lang="en-US" sz="1800" b="1" dirty="0">
+                <a:solidFill>
+                  <a:srgbClr val="FE4447"/>
+                </a:solidFill>
+                <a:latin typeface="Georgia" pitchFamily="34" charset="0"/>
+                <a:ea typeface="Georgia" pitchFamily="34" charset="-122"/>
+                <a:cs typeface="Georgia" pitchFamily="34" charset="-120"/>
+              </a:rPr>
+              <a:t>Teacher notes</a:t>
+            </a:r>
+            <a:endParaRPr lang="en-US" sz="1800" dirty="0"/>
+          </a:p>
+        </p:txBody>
+      </p:sp>
+      <p:sp>
+        <p:nvSpPr>
+          <p:cNvPr id="4" name="Text 2"/>
+          <p:cNvSpPr/>
+          <p:nvPr/>
+        </p:nvSpPr>
+        <p:spPr>
+          <a:xfrm>
+            <a:off x="634901" y="883593"/>
+            <a:ext cx="8102798" cy="1386483"/>
+          </a:xfrm>
+          <a:prstGeom prst="rect">
+            <a:avLst/>
+          </a:prstGeom>
+          <a:noFill/>
+          <a:ln/>
+        </p:spPr>
+        <p:txBody>
+          <a:bodyPr wrap="square" lIns="0" tIns="0" rIns="0" bIns="0" rtlCol="0" anchor="t"/>
+          <a:lstStyle/>
+          <a:p>
+            <a:pPr algn="l" marL="342900" indent="-342900">
+              <a:lnSpc>
+                <a:spcPts val="1620"/>
+              </a:lnSpc>
+              <a:spcAft>
+                <a:spcPts val="300"/>
+              </a:spcAft>
+              <a:buSzPct val="100000"/>
+              <a:buChar char="•"/>
+            </a:pPr>
+            <a:r>
+              <a:rPr lang="en-US" sz="1200" dirty="0">
+                <a:solidFill>
+                  <a:srgbClr val="1C2833"/>
+                </a:solidFill>
+                <a:latin typeface="Arial" pitchFamily="34" charset="0"/>
+                <a:ea typeface="Arial" pitchFamily="34" charset="-122"/>
+                <a:cs typeface="Arial" pitchFamily="34" charset="-120"/>
+              </a:rPr>
+              <a:t>The most common error: students remember to write the units digit of the middle sum but </a:t>
+            </a:r>
+            <a:pPr algn="l" indent="0" marL="0">
+              <a:lnSpc>
+                <a:spcPts val="1620"/>
+              </a:lnSpc>
+              <a:spcAft>
+                <a:spcPts val="300"/>
+              </a:spcAft>
+              <a:buNone/>
+            </a:pPr>
+            <a:r>
+              <a:rPr lang="en-US" sz="1200" b="1" dirty="0">
+                <a:solidFill>
+                  <a:srgbClr val="1C2833"/>
+                </a:solidFill>
+                <a:latin typeface="Arial" pitchFamily="34" charset="0"/>
+                <a:ea typeface="Arial" pitchFamily="34" charset="-122"/>
+                <a:cs typeface="Arial" pitchFamily="34" charset="-120"/>
+              </a:rPr>
+              <a:t>forget</a:t>
+            </a:r>
+            <a:pPr algn="l" indent="0" marL="0">
+              <a:lnSpc>
+                <a:spcPts val="1620"/>
+              </a:lnSpc>
+              <a:spcAft>
+                <a:spcPts val="300"/>
+              </a:spcAft>
+              <a:buNone/>
+            </a:pPr>
+            <a:r>
+              <a:rPr lang="en-US" sz="1200" dirty="0">
+                <a:solidFill>
+                  <a:srgbClr val="1C2833"/>
+                </a:solidFill>
+                <a:latin typeface="Arial" pitchFamily="34" charset="0"/>
+                <a:ea typeface="Arial" pitchFamily="34" charset="-122"/>
+                <a:cs typeface="Arial" pitchFamily="34" charset="-120"/>
+              </a:rPr>
+              <a:t> to add the carry into the leftmost digit. Watch for "73 × 11 = 7</a:t>
+            </a:r>
+            <a:pPr algn="l" indent="0" marL="0">
+              <a:lnSpc>
+                <a:spcPts val="1620"/>
+              </a:lnSpc>
+              <a:spcAft>
+                <a:spcPts val="300"/>
+              </a:spcAft>
+              <a:buNone/>
+            </a:pPr>
+            <a:r>
+              <a:rPr lang="en-US" sz="1200" b="1" dirty="0">
+                <a:solidFill>
+                  <a:srgbClr val="1C2833"/>
+                </a:solidFill>
+                <a:latin typeface="Arial" pitchFamily="34" charset="0"/>
+                <a:ea typeface="Arial" pitchFamily="34" charset="-122"/>
+                <a:cs typeface="Arial" pitchFamily="34" charset="-120"/>
+              </a:rPr>
+              <a:t>0</a:t>
+            </a:r>
+            <a:pPr algn="l" indent="0" marL="0">
+              <a:lnSpc>
+                <a:spcPts val="1620"/>
+              </a:lnSpc>
+              <a:spcAft>
+                <a:spcPts val="300"/>
+              </a:spcAft>
+              <a:buNone/>
+            </a:pPr>
+            <a:r>
+              <a:rPr lang="en-US" sz="1200" dirty="0">
+                <a:solidFill>
+                  <a:srgbClr val="1C2833"/>
+                </a:solidFill>
+                <a:latin typeface="Arial" pitchFamily="34" charset="0"/>
+                <a:ea typeface="Arial" pitchFamily="34" charset="-122"/>
+                <a:cs typeface="Arial" pitchFamily="34" charset="-120"/>
+              </a:rPr>
+              <a:t>3" with no carry added — this is a classic mistake.</a:t>
+            </a:r>
+            <a:endParaRPr lang="en-US" sz="1200" dirty="0"/>
+          </a:p>
+          <a:p>
+            <a:pPr algn="l" marL="342900" indent="-342900">
+              <a:lnSpc>
+                <a:spcPts val="1620"/>
+              </a:lnSpc>
+              <a:spcAft>
+                <a:spcPts val="300"/>
+              </a:spcAft>
+              <a:buSzPct val="100000"/>
+              <a:buChar char="•"/>
+            </a:pPr>
+            <a:r>
+              <a:rPr lang="en-US" sz="1200" dirty="0">
+                <a:solidFill>
+                  <a:srgbClr val="1C2833"/>
+                </a:solidFill>
+                <a:latin typeface="Arial" pitchFamily="34" charset="0"/>
+                <a:ea typeface="Arial" pitchFamily="34" charset="-122"/>
+                <a:cs typeface="Arial" pitchFamily="34" charset="-120"/>
+              </a:rPr>
+              <a:t>The 99 × 11 case (and the cascading carry) genuinely surprises students. Lean into it — it's evidence the algebra is doing real work, not arithmetic by coincidence.</a:t>
+            </a:r>
+            <a:endParaRPr lang="en-US" sz="1200" dirty="0"/>
+          </a:p>
+          <a:p>
+            <a:pPr algn="l" marL="342900" indent="-342900">
+              <a:lnSpc>
+                <a:spcPts val="1620"/>
+              </a:lnSpc>
+              <a:spcAft>
+                <a:spcPts val="300"/>
+              </a:spcAft>
+              <a:buSzPct val="100000"/>
+              <a:buChar char="•"/>
+            </a:pPr>
+            <a:r>
+              <a:rPr lang="en-US" sz="1200" dirty="0">
+                <a:solidFill>
+                  <a:srgbClr val="1C2833"/>
+                </a:solidFill>
+                <a:latin typeface="Arial" pitchFamily="34" charset="0"/>
+                <a:ea typeface="Arial" pitchFamily="34" charset="-122"/>
+                <a:cs typeface="Arial" pitchFamily="34" charset="-120"/>
+              </a:rPr>
+              <a:t>If a student asks "why does this work?" — that's Day 3. Park it. Honour the curiosity by writing the question on a board sticky.</a:t>
+            </a:r>
+            <a:endParaRPr lang="en-US" sz="1200" dirty="0"/>
+          </a:p>
+        </p:txBody>
+      </p:sp>
+      <p:sp>
+        <p:nvSpPr>
+          <p:cNvPr id="5" name="Text 3"/>
+          <p:cNvSpPr/>
+          <p:nvPr/>
+        </p:nvSpPr>
+        <p:spPr>
+          <a:xfrm>
+            <a:off x="406301" y="4434929"/>
+            <a:ext cx="8498026" cy="213271"/>
+          </a:xfrm>
+          <a:prstGeom prst="rect">
+            <a:avLst/>
+          </a:prstGeom>
+          <a:noFill/>
+          <a:ln/>
+        </p:spPr>
+        <p:txBody>
+          <a:bodyPr wrap="square" lIns="0" tIns="0" rIns="0" bIns="0" rtlCol="0" anchor="t"/>
+          <a:lstStyle/>
+          <a:p>
+            <a:pPr algn="l" indent="0" marL="0">
+              <a:lnSpc>
+                <a:spcPts val="1680"/>
+              </a:lnSpc>
+              <a:spcBef>
+                <a:spcPts val="300"/>
+              </a:spcBef>
+              <a:spcAft>
+                <a:spcPts val="300"/>
+              </a:spcAft>
+              <a:buNone/>
+            </a:pPr>
+            <a:r>
+              <a:rPr lang="en-US" sz="1200" dirty="0">
+                <a:solidFill>
+                  <a:srgbClr val="1C2833"/>
+                </a:solidFill>
+                <a:latin typeface="Arial" pitchFamily="34" charset="0"/>
+                <a:ea typeface="Arial" pitchFamily="34" charset="-122"/>
+                <a:cs typeface="Arial" pitchFamily="34" charset="-120"/>
+              </a:rPr>
+              <a:t>Middle ·  · IKS Curriculum</a:t>
+            </a:r>
+            <a:endParaRPr lang="en-US" sz="1200" dirty="0"/>
+          </a:p>
+        </p:txBody>
+      </p:sp>
+    </p:spTree>
+  </p:cSld>
+  <p:clrMapOvr>
+    <a:masterClrMapping/>
+  </p:clrMapOvr>
+</p:sld>
+</file>
+
+<file path=ppt/slides/slide21.xml><?xml version="1.0" encoding="utf-8"?>
+<p:sld xmlns:a="http://schemas.openxmlformats.org/drawingml/2006/main" xmlns:r="http://schemas.openxmlformats.org/officeDocument/2006/relationships" xmlns:p="http://schemas.openxmlformats.org/presentationml/2006/main">
+  <p:cSld name="Slide 21">
+    <p:bg>
+      <p:bgPr>
+        <a:solidFill>
+          <a:srgbClr val="FFFFFF"/>
+        </a:solidFill>
+      </p:bgPr>
+    </p:bg>
+    <p:spTree>
+      <p:nvGrpSpPr>
+        <p:cNvPr id="1" name=""/>
+        <p:cNvGrpSpPr/>
+        <p:nvPr/>
+      </p:nvGrpSpPr>
+      <p:grpSpPr>
+        <a:xfrm>
+          <a:off x="0" y="0"/>
+          <a:ext cx="0" cy="0"/>
+          <a:chOff x="0" y="0"/>
+          <a:chExt cx="0" cy="0"/>
+        </a:xfrm>
+      </p:grpSpPr>
+      <p:sp>
+        <p:nvSpPr>
+          <p:cNvPr id="2" name="Text 0"/>
+          <p:cNvSpPr/>
+          <p:nvPr/>
+        </p:nvSpPr>
+        <p:spPr>
+          <a:xfrm>
+            <a:off x="0" y="0"/>
+            <a:ext cx="9144000" cy="101501"/>
+          </a:xfrm>
+          <a:prstGeom prst="rect">
+            <a:avLst/>
+          </a:prstGeom>
+          <a:solidFill>
+            <a:srgbClr val="277884"/>
+          </a:solidFill>
+          <a:ln/>
+        </p:spPr>
+        <p:txBody>
+          <a:bodyPr wrap="square" rtlCol="0" anchor="ctr"/>
+          <a:lstStyle/>
+          <a:p>
+            <a:pPr indent="0" marL="0">
+              <a:buNone/>
+            </a:pPr>
+            <a:endParaRPr lang="en-US" dirty="0"/>
+          </a:p>
+        </p:txBody>
+      </p:sp>
+      <p:sp>
+        <p:nvSpPr>
+          <p:cNvPr id="3" name="Text 1"/>
+          <p:cNvSpPr/>
+          <p:nvPr/>
+        </p:nvSpPr>
+        <p:spPr>
+          <a:xfrm>
+            <a:off x="406301" y="457051"/>
+            <a:ext cx="8498026" cy="274290"/>
+          </a:xfrm>
+          <a:prstGeom prst="rect">
+            <a:avLst/>
+          </a:prstGeom>
+          <a:noFill/>
+          <a:ln/>
+        </p:spPr>
+        <p:txBody>
+          <a:bodyPr wrap="square" lIns="0" tIns="0" rIns="0" bIns="0" rtlCol="0" anchor="t"/>
+          <a:lstStyle/>
+          <a:p>
+            <a:pPr algn="l" indent="0" marL="0">
+              <a:lnSpc>
+                <a:spcPts val="2160"/>
+              </a:lnSpc>
+              <a:spcBef>
+                <a:spcPts val="600"/>
+              </a:spcBef>
+              <a:spcAft>
+                <a:spcPts val="800"/>
+              </a:spcAft>
+              <a:buNone/>
+            </a:pPr>
+            <a:r>
+              <a:rPr lang="en-US" sz="1800" b="1" dirty="0">
+                <a:solidFill>
+                  <a:srgbClr val="FE4447"/>
+                </a:solidFill>
+                <a:latin typeface="Georgia" pitchFamily="34" charset="0"/>
+                <a:ea typeface="Georgia" pitchFamily="34" charset="-122"/>
+                <a:cs typeface="Georgia" pitchFamily="34" charset="-120"/>
+              </a:rPr>
+              <a:t>Citation(s) used in this lesson</a:t>
+            </a:r>
+            <a:endParaRPr lang="en-US" sz="1800" dirty="0"/>
+          </a:p>
+        </p:txBody>
+      </p:sp>
+      <p:sp>
+        <p:nvSpPr>
+          <p:cNvPr id="4" name="Text 2"/>
+          <p:cNvSpPr/>
+          <p:nvPr/>
+        </p:nvSpPr>
+        <p:spPr>
+          <a:xfrm>
+            <a:off x="634901" y="883593"/>
+            <a:ext cx="8102798" cy="525661"/>
+          </a:xfrm>
+          <a:prstGeom prst="rect">
+            <a:avLst/>
+          </a:prstGeom>
+          <a:noFill/>
+          <a:ln/>
+        </p:spPr>
+        <p:txBody>
+          <a:bodyPr wrap="square" lIns="0" tIns="0" rIns="0" bIns="0" rtlCol="0" anchor="t"/>
+          <a:lstStyle/>
+          <a:p>
+            <a:pPr algn="l" marL="342900" indent="-342900">
+              <a:lnSpc>
+                <a:spcPts val="1620"/>
+              </a:lnSpc>
+              <a:spcAft>
+                <a:spcPts val="300"/>
+              </a:spcAft>
+              <a:buSzPct val="100000"/>
+              <a:buChar char="•"/>
+            </a:pPr>
+            <a:r>
+              <a:rPr lang="en-US" sz="1200" dirty="0">
+                <a:solidFill>
+                  <a:srgbClr val="1C2833"/>
+                </a:solidFill>
+                <a:latin typeface="Arial" pitchFamily="34" charset="0"/>
+                <a:ea typeface="Arial" pitchFamily="34" charset="-122"/>
+                <a:cs typeface="Arial" pitchFamily="34" charset="-120"/>
+              </a:rPr>
+              <a:t>Tirthaji (1965), sūtra 1 (</a:t>
+            </a:r>
+            <a:pPr algn="l" indent="0" marL="0">
+              <a:lnSpc>
+                <a:spcPts val="1620"/>
+              </a:lnSpc>
+              <a:spcAft>
+                <a:spcPts val="300"/>
+              </a:spcAft>
+              <a:buNone/>
+            </a:pPr>
+            <a:r>
+              <a:rPr lang="en-US" sz="1200" i="1" dirty="0">
+                <a:solidFill>
+                  <a:srgbClr val="1C2833"/>
+                </a:solidFill>
+                <a:latin typeface="Arial" pitchFamily="34" charset="0"/>
+                <a:ea typeface="Arial" pitchFamily="34" charset="-122"/>
+                <a:cs typeface="Arial" pitchFamily="34" charset="-120"/>
+              </a:rPr>
+              <a:t>Ekādhikena Pūrveṇa</a:t>
+            </a:r>
+            <a:pPr algn="l" indent="0" marL="0">
+              <a:lnSpc>
+                <a:spcPts val="1620"/>
+              </a:lnSpc>
+              <a:spcAft>
+                <a:spcPts val="300"/>
+              </a:spcAft>
+              <a:buNone/>
+            </a:pPr>
+            <a:r>
+              <a:rPr lang="en-US" sz="1200" dirty="0">
+                <a:solidFill>
+                  <a:srgbClr val="1C2833"/>
+                </a:solidFill>
+                <a:latin typeface="Arial" pitchFamily="34" charset="0"/>
+                <a:ea typeface="Arial" pitchFamily="34" charset="-122"/>
+                <a:cs typeface="Arial" pitchFamily="34" charset="-120"/>
+              </a:rPr>
+              <a:t>) — the technique name.</a:t>
+            </a:r>
+            <a:endParaRPr lang="en-US" sz="1200" dirty="0"/>
+          </a:p>
+          <a:p>
+            <a:pPr algn="l" marL="342900" indent="-342900">
+              <a:lnSpc>
+                <a:spcPts val="1620"/>
+              </a:lnSpc>
+              <a:spcAft>
+                <a:spcPts val="300"/>
+              </a:spcAft>
+              <a:buSzPct val="100000"/>
+              <a:buChar char="•"/>
+            </a:pPr>
+            <a:r>
+              <a:rPr lang="en-US" sz="1200" i="1" dirty="0">
+                <a:solidFill>
+                  <a:srgbClr val="1C2833"/>
+                </a:solidFill>
+                <a:latin typeface="Arial" pitchFamily="34" charset="0"/>
+                <a:ea typeface="Arial" pitchFamily="34" charset="-122"/>
+                <a:cs typeface="Arial" pitchFamily="34" charset="-120"/>
+              </a:rPr>
+              <a:t>Vedic Mathematics Batch1.pdf</a:t>
+            </a:r>
+            <a:pPr algn="l" indent="0" marL="0">
+              <a:lnSpc>
+                <a:spcPts val="1620"/>
+              </a:lnSpc>
+              <a:spcAft>
+                <a:spcPts val="300"/>
+              </a:spcAft>
+              <a:buNone/>
+            </a:pPr>
+            <a:r>
+              <a:rPr lang="en-US" sz="1200" dirty="0">
+                <a:solidFill>
+                  <a:srgbClr val="1C2833"/>
+                </a:solidFill>
+                <a:latin typeface="Arial" pitchFamily="34" charset="0"/>
+                <a:ea typeface="Arial" pitchFamily="34" charset="-122"/>
+                <a:cs typeface="Arial" pitchFamily="34" charset="-120"/>
+              </a:rPr>
+              <a:t> (Vedic Cultural Center) — worked examples of the carry case.</a:t>
             </a:r>
             <a:endParaRPr lang="en-US" sz="1200" dirty="0"/>
           </a:p>
@@ -3771,7 +8202,7 @@
                 <a:ea typeface="Georgia" pitchFamily="34" charset="-122"/>
                 <a:cs typeface="Georgia" pitchFamily="34" charset="-120"/>
               </a:rPr>
-              <a:t>Lesson flow</a:t>
+              <a:t>Materials</a:t>
             </a:r>
             <a:endParaRPr lang="en-US" sz="1800" dirty="0"/>
           </a:p>
@@ -3780,6 +8211,100 @@
       <p:sp>
         <p:nvSpPr>
           <p:cNvPr id="4" name="Text 2"/>
+          <p:cNvSpPr/>
+          <p:nvPr/>
+        </p:nvSpPr>
+        <p:spPr>
+          <a:xfrm>
+            <a:off x="634901" y="883593"/>
+            <a:ext cx="8102798" cy="769441"/>
+          </a:xfrm>
+          <a:prstGeom prst="rect">
+            <a:avLst/>
+          </a:prstGeom>
+          <a:noFill/>
+          <a:ln/>
+        </p:spPr>
+        <p:txBody>
+          <a:bodyPr wrap="square" lIns="0" tIns="0" rIns="0" bIns="0" rtlCol="0" anchor="t"/>
+          <a:lstStyle/>
+          <a:p>
+            <a:pPr algn="l" marL="342900" indent="-342900">
+              <a:lnSpc>
+                <a:spcPts val="1620"/>
+              </a:lnSpc>
+              <a:spcAft>
+                <a:spcPts val="300"/>
+              </a:spcAft>
+              <a:buSzPct val="100000"/>
+              <a:buChar char="•"/>
+            </a:pPr>
+            <a:r>
+              <a:rPr lang="en-US" sz="1200" dirty="0">
+                <a:solidFill>
+                  <a:srgbClr val="1C2833"/>
+                </a:solidFill>
+                <a:latin typeface="Arial" pitchFamily="34" charset="0"/>
+                <a:ea typeface="Arial" pitchFamily="34" charset="-122"/>
+                <a:cs typeface="Arial" pitchFamily="34" charset="-120"/>
+              </a:rPr>
+              <a:t>Whiteboard.</a:t>
+            </a:r>
+            <a:endParaRPr lang="en-US" sz="1200" dirty="0"/>
+          </a:p>
+          <a:p>
+            <a:pPr algn="l" marL="342900" indent="-342900">
+              <a:lnSpc>
+                <a:spcPts val="1620"/>
+              </a:lnSpc>
+              <a:spcAft>
+                <a:spcPts val="300"/>
+              </a:spcAft>
+              <a:buSzPct val="100000"/>
+              <a:buChar char="•"/>
+            </a:pPr>
+            <a:r>
+              <a:rPr lang="en-US" sz="1200" dirty="0">
+                <a:solidFill>
+                  <a:srgbClr val="1C2833"/>
+                </a:solidFill>
+                <a:latin typeface="Arial" pitchFamily="34" charset="0"/>
+                <a:ea typeface="Arial" pitchFamily="34" charset="-122"/>
+                <a:cs typeface="Arial" pitchFamily="34" charset="-120"/>
+              </a:rPr>
+              <a:t>Printed worksheet of 12 problems, mixing no-carry and carry cases.</a:t>
+            </a:r>
+            <a:endParaRPr lang="en-US" sz="1200" dirty="0"/>
+          </a:p>
+          <a:p>
+            <a:pPr algn="l" marL="342900" indent="-342900">
+              <a:lnSpc>
+                <a:spcPts val="1620"/>
+              </a:lnSpc>
+              <a:spcAft>
+                <a:spcPts val="300"/>
+              </a:spcAft>
+              <a:buSzPct val="100000"/>
+              <a:buChar char="•"/>
+            </a:pPr>
+            <a:r>
+              <a:rPr lang="en-US" sz="1200" dirty="0">
+                <a:solidFill>
+                  <a:srgbClr val="1C2833"/>
+                </a:solidFill>
+                <a:latin typeface="Arial" pitchFamily="34" charset="0"/>
+                <a:ea typeface="Arial" pitchFamily="34" charset="-122"/>
+                <a:cs typeface="Arial" pitchFamily="34" charset="-120"/>
+              </a:rPr>
+              <a:t>Stopwatch.</a:t>
+            </a:r>
+            <a:endParaRPr lang="en-US" sz="1200" dirty="0"/>
+          </a:p>
+        </p:txBody>
+      </p:sp>
+      <p:sp>
+        <p:nvSpPr>
+          <p:cNvPr id="5" name="Text 3"/>
           <p:cNvSpPr/>
           <p:nvPr/>
         </p:nvSpPr>
@@ -3929,7 +8454,7 @@
                 <a:ea typeface="Georgia" pitchFamily="34" charset="-122"/>
                 <a:cs typeface="Georgia" pitchFamily="34" charset="-120"/>
               </a:rPr>
-              <a:t>Warm-up (5 min)</a:t>
+              <a:t>Lesson flow</a:t>
             </a:r>
             <a:endParaRPr lang="en-US" sz="1800" dirty="0"/>
           </a:p>
@@ -3938,120 +8463,6 @@
       <p:sp>
         <p:nvSpPr>
           <p:cNvPr id="4" name="Text 2"/>
-          <p:cNvSpPr/>
-          <p:nvPr/>
-        </p:nvSpPr>
-        <p:spPr>
-          <a:xfrm>
-            <a:off x="406301" y="870942"/>
-            <a:ext cx="8498026" cy="213271"/>
-          </a:xfrm>
-          <a:prstGeom prst="rect">
-            <a:avLst/>
-          </a:prstGeom>
-          <a:noFill/>
-          <a:ln/>
-        </p:spPr>
-        <p:txBody>
-          <a:bodyPr wrap="square" lIns="0" tIns="0" rIns="0" bIns="0" rtlCol="0" anchor="t"/>
-          <a:lstStyle/>
-          <a:p>
-            <a:pPr algn="l" indent="0" marL="0">
-              <a:lnSpc>
-                <a:spcPts val="1680"/>
-              </a:lnSpc>
-              <a:spcBef>
-                <a:spcPts val="300"/>
-              </a:spcBef>
-              <a:spcAft>
-                <a:spcPts val="300"/>
-              </a:spcAft>
-              <a:buNone/>
-            </a:pPr>
-            <a:r>
-              <a:rPr lang="en-US" sz="1200" dirty="0">
-                <a:solidFill>
-                  <a:srgbClr val="1C2833"/>
-                </a:solidFill>
-                <a:latin typeface="Arial" pitchFamily="34" charset="0"/>
-                <a:ea typeface="Arial" pitchFamily="34" charset="-122"/>
-                <a:cs typeface="Arial" pitchFamily="34" charset="-120"/>
-              </a:rPr>
-              <a:t>– Neighbour-sum drill: teacher calls a 2-digit number with digit-sum &lt; 10; class chorus the ×11 product.</a:t>
-            </a:r>
-            <a:endParaRPr lang="en-US" sz="1200" dirty="0"/>
-          </a:p>
-        </p:txBody>
-      </p:sp>
-      <p:sp>
-        <p:nvSpPr>
-          <p:cNvPr id="5" name="Text 3"/>
-          <p:cNvSpPr/>
-          <p:nvPr/>
-        </p:nvSpPr>
-        <p:spPr>
-          <a:xfrm>
-            <a:off x="634901" y="1173063"/>
-            <a:ext cx="8102798" cy="281880"/>
-          </a:xfrm>
-          <a:prstGeom prst="rect">
-            <a:avLst/>
-          </a:prstGeom>
-          <a:noFill/>
-          <a:ln/>
-        </p:spPr>
-        <p:txBody>
-          <a:bodyPr wrap="square" lIns="0" tIns="0" rIns="0" bIns="0" rtlCol="0" anchor="t"/>
-          <a:lstStyle/>
-          <a:p>
-            <a:pPr algn="l" marL="342900" indent="-342900">
-              <a:lnSpc>
-                <a:spcPts val="1620"/>
-              </a:lnSpc>
-              <a:spcAft>
-                <a:spcPts val="300"/>
-              </a:spcAft>
-              <a:buSzPct val="100000"/>
-              <a:buChar char="•"/>
-            </a:pPr>
-            <a:r>
-              <a:rPr lang="en-US" sz="1200" i="1" dirty="0">
-                <a:solidFill>
-                  <a:srgbClr val="1C2833"/>
-                </a:solidFill>
-                <a:latin typeface="Arial" pitchFamily="34" charset="0"/>
-                <a:ea typeface="Arial" pitchFamily="34" charset="-122"/>
-                <a:cs typeface="Arial" pitchFamily="34" charset="-120"/>
-              </a:rPr>
-              <a:t>"12 times 11!" → "132!" — "34 times 11!" → "374!" —</a:t>
-            </a:r>
-            <a:pPr algn="l" indent="0" marL="0">
-              <a:lnSpc>
-                <a:spcPts val="1620"/>
-              </a:lnSpc>
-              <a:spcAft>
-                <a:spcPts val="300"/>
-              </a:spcAft>
-              <a:buNone/>
-            </a:pPr>
-            <a:r>
-              <a:rPr lang="en-US" sz="1200" dirty="0">
-                <a:solidFill>
-                  <a:srgbClr val="1C2833"/>
-                </a:solidFill>
-                <a:latin typeface="Arial" pitchFamily="34" charset="0"/>
-                <a:ea typeface="Arial" pitchFamily="34" charset="-122"/>
-                <a:cs typeface="Arial" pitchFamily="34" charset="-120"/>
-              </a:rPr>
-              <a:t> 10 in a minute.</a:t>
-            </a:r>
-            <a:endParaRPr lang="en-US" sz="1200" dirty="0"/>
-          </a:p>
-        </p:txBody>
-      </p:sp>
-      <p:sp>
-        <p:nvSpPr>
-          <p:cNvPr id="6" name="Text 4"/>
           <p:cNvSpPr/>
           <p:nvPr/>
         </p:nvSpPr>
@@ -4201,7 +8612,7 @@
                 <a:ea typeface="Georgia" pitchFamily="34" charset="-122"/>
                 <a:cs typeface="Georgia" pitchFamily="34" charset="-120"/>
               </a:rPr>
-              <a:t>Recall (3 min)</a:t>
+              <a:t>Warm-up (5 min)</a:t>
             </a:r>
             <a:endParaRPr lang="en-US" sz="1800" dirty="0"/>
           </a:p>
@@ -4215,8 +8626,8 @@
         </p:nvSpPr>
         <p:spPr>
           <a:xfrm>
-            <a:off x="406301" y="870942"/>
-            <a:ext cx="8498026" cy="213271"/>
+            <a:off x="634901" y="883593"/>
+            <a:ext cx="8102798" cy="525661"/>
           </a:xfrm>
           <a:prstGeom prst="rect">
             <a:avLst/>
@@ -4228,17 +8639,15 @@
           <a:bodyPr wrap="square" lIns="0" tIns="0" rIns="0" bIns="0" rtlCol="0" anchor="t"/>
           <a:lstStyle/>
           <a:p>
-            <a:pPr algn="l" indent="0" marL="0">
-              <a:lnSpc>
-                <a:spcPts val="1680"/>
-              </a:lnSpc>
-              <a:spcBef>
-                <a:spcPts val="300"/>
-              </a:spcBef>
-              <a:spcAft>
-                <a:spcPts val="300"/>
-              </a:spcAft>
-              <a:buNone/>
+            <a:pPr algn="l" marL="342900" indent="-342900">
+              <a:lnSpc>
+                <a:spcPts val="1620"/>
+              </a:lnSpc>
+              <a:spcAft>
+                <a:spcPts val="300"/>
+              </a:spcAft>
+              <a:buSzPct val="100000"/>
+              <a:buChar char="•"/>
             </a:pPr>
             <a:r>
               <a:rPr lang="en-US" sz="1200" dirty="0">
@@ -4249,32 +8658,10 @@
                 <a:ea typeface="Arial" pitchFamily="34" charset="-122"/>
                 <a:cs typeface="Arial" pitchFamily="34" charset="-120"/>
               </a:rPr>
-              <a:t>– Yesterday's problem: 73 × 11. 7 + 3 = 10. Why was this awkward?</a:t>
+              <a:t>Neighbour-sum drill: teacher calls a 2-digit number with digit-sum &lt; 10; class chorus the ×11 product.</a:t>
             </a:r>
             <a:endParaRPr lang="en-US" sz="1200" dirty="0"/>
           </a:p>
-        </p:txBody>
-      </p:sp>
-      <p:sp>
-        <p:nvSpPr>
-          <p:cNvPr id="5" name="Text 3"/>
-          <p:cNvSpPr/>
-          <p:nvPr/>
-        </p:nvSpPr>
-        <p:spPr>
-          <a:xfrm>
-            <a:off x="634901" y="1173063"/>
-            <a:ext cx="8102798" cy="281880"/>
-          </a:xfrm>
-          <a:prstGeom prst="rect">
-            <a:avLst/>
-          </a:prstGeom>
-          <a:noFill/>
-          <a:ln/>
-        </p:spPr>
-        <p:txBody>
-          <a:bodyPr wrap="square" lIns="0" tIns="0" rIns="0" bIns="0" rtlCol="0" anchor="t"/>
-          <a:lstStyle/>
           <a:p>
             <a:pPr algn="l" marL="342900" indent="-342900">
               <a:lnSpc>
@@ -4295,7 +8682,27 @@
                 <a:ea typeface="Arial" pitchFamily="34" charset="-122"/>
                 <a:cs typeface="Arial" pitchFamily="34" charset="-120"/>
               </a:rPr>
-              <a:t>"You can't put 10 in the middle of a 3-digit number. So what do we do? Carry the 1 — exactly like in standard addition."</a:t>
+              <a:t>"12 times 11!" → "132!" — "34 times 11!" → "374!" —</a:t>
+            </a:r>
+            <a:pPr algn="l" indent="0" marL="0">
+              <a:lnSpc>
+                <a:spcPts val="1620"/>
+              </a:lnSpc>
+              <a:spcAft>
+                <a:spcPts val="300"/>
+              </a:spcAft>
+              <a:buNone/>
+            </a:pPr>
+            <a:r>
+              <a:rPr lang="en-US" sz="1200" dirty="0">
+                <a:solidFill>
+                  <a:srgbClr val="1C2833"/>
+                </a:solidFill>
+                <a:latin typeface="Arial" pitchFamily="34" charset="0"/>
+                <a:ea typeface="Arial" pitchFamily="34" charset="-122"/>
+                <a:cs typeface="Arial" pitchFamily="34" charset="-120"/>
+              </a:rPr>
+              <a:t> 10 in a minute.</a:t>
             </a:r>
             <a:endParaRPr lang="en-US" sz="1200" dirty="0"/>
           </a:p>
@@ -4303,7 +8710,7 @@
       </p:sp>
       <p:sp>
         <p:nvSpPr>
-          <p:cNvPr id="6" name="Text 4"/>
+          <p:cNvPr id="5" name="Text 3"/>
           <p:cNvSpPr/>
           <p:nvPr/>
         </p:nvSpPr>
@@ -4453,7 +8860,7 @@
                 <a:ea typeface="Georgia" pitchFamily="34" charset="-122"/>
                 <a:cs typeface="Georgia" pitchFamily="34" charset="-120"/>
               </a:rPr>
-              <a:t>Core (15 min) — The carry case</a:t>
+              <a:t>Recall (3 min)</a:t>
             </a:r>
             <a:endParaRPr lang="en-US" sz="1800" dirty="0"/>
           </a:p>
@@ -4468,7 +8875,7 @@
         <p:spPr>
           <a:xfrm>
             <a:off x="634901" y="883593"/>
-            <a:ext cx="8102798" cy="281880"/>
+            <a:ext cx="8102798" cy="525661"/>
           </a:xfrm>
           <a:prstGeom prst="rect">
             <a:avLst/>
@@ -4491,7 +8898,7 @@
               <a:buChar char="•"/>
             </a:pPr>
             <a:r>
-              <a:rPr lang="en-US" sz="1200" b="1" dirty="0">
+              <a:rPr lang="en-US" sz="1200" dirty="0">
                 <a:solidFill>
                   <a:srgbClr val="1C2833"/>
                 </a:solidFill>
@@ -4499,310 +8906,23 @@
                 <a:ea typeface="Arial" pitchFamily="34" charset="-122"/>
                 <a:cs typeface="Arial" pitchFamily="34" charset="-120"/>
               </a:rPr>
-              <a:t>Demonstrate 73 × 11 fully:</a:t>
+              <a:t>Yesterday's problem: 73 × 11. 7 + 3 = 10. Why was this awkward?</a:t>
             </a:r>
             <a:endParaRPr lang="en-US" sz="1200" dirty="0"/>
           </a:p>
-        </p:txBody>
-      </p:sp>
-      <p:sp>
-        <p:nvSpPr>
-          <p:cNvPr id="5" name="Text 3"/>
-          <p:cNvSpPr/>
-          <p:nvPr/>
-        </p:nvSpPr>
-        <p:spPr>
-          <a:xfrm>
-            <a:off x="406301" y="1266974"/>
-            <a:ext cx="8331398" cy="1126778"/>
-          </a:xfrm>
-          <a:prstGeom prst="rect">
-            <a:avLst/>
-          </a:prstGeom>
-          <a:solidFill>
-            <a:srgbClr val="F4F8F9"/>
-          </a:solidFill>
-          <a:ln/>
-        </p:spPr>
-        <p:txBody>
-          <a:bodyPr wrap="square" rtlCol="0" anchor="ctr"/>
-          <a:lstStyle/>
-          <a:p>
-            <a:pPr indent="0" marL="0">
-              <a:buNone/>
-            </a:pPr>
-            <a:endParaRPr lang="en-US" dirty="0"/>
-          </a:p>
-        </p:txBody>
-      </p:sp>
-      <p:sp>
-        <p:nvSpPr>
-          <p:cNvPr id="6" name="Shape 4"/>
-          <p:cNvSpPr/>
-          <p:nvPr/>
-        </p:nvSpPr>
-        <p:spPr>
-          <a:xfrm>
-            <a:off x="430113" y="1266974"/>
-            <a:ext cx="0" cy="1126778"/>
-          </a:xfrm>
-          <a:prstGeom prst="line">
-            <a:avLst/>
-          </a:prstGeom>
-          <a:noFill/>
-          <a:ln w="47625">
-            <a:solidFill>
-              <a:srgbClr val="277884"/>
-            </a:solidFill>
-            <a:prstDash val="solid"/>
-          </a:ln>
-        </p:spPr>
-      </p:sp>
-      <p:sp>
-        <p:nvSpPr>
-          <p:cNvPr id="7" name="Text 5"/>
-          <p:cNvSpPr/>
-          <p:nvPr/>
-        </p:nvSpPr>
-        <p:spPr>
-          <a:xfrm>
-            <a:off x="631627" y="1393924"/>
-            <a:ext cx="8086939" cy="174575"/>
-          </a:xfrm>
-          <a:prstGeom prst="rect">
-            <a:avLst/>
-          </a:prstGeom>
-          <a:noFill/>
-          <a:ln/>
-        </p:spPr>
-        <p:txBody>
-          <a:bodyPr wrap="square" lIns="0" tIns="0" rIns="0" bIns="0" rtlCol="0" anchor="t"/>
-          <a:lstStyle/>
-          <a:p>
-            <a:pPr algn="l" indent="0" marL="0">
-              <a:lnSpc>
-                <a:spcPts val="1375"/>
-              </a:lnSpc>
-              <a:buNone/>
-            </a:pPr>
-            <a:r>
-              <a:rPr lang="en-US" sz="1100" dirty="0">
-                <a:solidFill>
-                  <a:srgbClr val="1C2833"/>
-                </a:solidFill>
-                <a:latin typeface="Courier New" pitchFamily="34" charset="0"/>
-                <a:ea typeface="Courier New" pitchFamily="34" charset="-122"/>
-                <a:cs typeface="Courier New" pitchFamily="34" charset="-120"/>
-              </a:rPr>
-              <a:t>Step 1: Split:    7  _  3</a:t>
-            </a:r>
-            <a:endParaRPr lang="en-US" sz="1100" dirty="0"/>
-          </a:p>
-        </p:txBody>
-      </p:sp>
-      <p:sp>
-        <p:nvSpPr>
-          <p:cNvPr id="8" name="Text 6"/>
-          <p:cNvSpPr/>
-          <p:nvPr/>
-        </p:nvSpPr>
-        <p:spPr>
-          <a:xfrm>
-            <a:off x="631627" y="1568500"/>
-            <a:ext cx="8086939" cy="174575"/>
-          </a:xfrm>
-          <a:prstGeom prst="rect">
-            <a:avLst/>
-          </a:prstGeom>
-          <a:noFill/>
-          <a:ln/>
-        </p:spPr>
-        <p:txBody>
-          <a:bodyPr wrap="square" lIns="0" tIns="0" rIns="0" bIns="0" rtlCol="0" anchor="t"/>
-          <a:lstStyle/>
-          <a:p>
-            <a:pPr algn="l" indent="0" marL="0">
-              <a:lnSpc>
-                <a:spcPts val="1375"/>
-              </a:lnSpc>
-              <a:buNone/>
-            </a:pPr>
-            <a:r>
-              <a:rPr lang="en-US" sz="1100" dirty="0">
-                <a:solidFill>
-                  <a:srgbClr val="1C2833"/>
-                </a:solidFill>
-                <a:latin typeface="Courier New" pitchFamily="34" charset="0"/>
-                <a:ea typeface="Courier New" pitchFamily="34" charset="-122"/>
-                <a:cs typeface="Courier New" pitchFamily="34" charset="-120"/>
-              </a:rPr>
-              <a:t>Step 2: Add:      7 + 3 = 10</a:t>
-            </a:r>
-            <a:endParaRPr lang="en-US" sz="1100" dirty="0"/>
-          </a:p>
-        </p:txBody>
-      </p:sp>
-      <p:sp>
-        <p:nvSpPr>
-          <p:cNvPr id="9" name="Text 7"/>
-          <p:cNvSpPr/>
-          <p:nvPr/>
-        </p:nvSpPr>
-        <p:spPr>
-          <a:xfrm>
-            <a:off x="631627" y="1743075"/>
-            <a:ext cx="8086939" cy="174575"/>
-          </a:xfrm>
-          <a:prstGeom prst="rect">
-            <a:avLst/>
-          </a:prstGeom>
-          <a:noFill/>
-          <a:ln/>
-        </p:spPr>
-        <p:txBody>
-          <a:bodyPr wrap="square" lIns="0" tIns="0" rIns="0" bIns="0" rtlCol="0" anchor="t"/>
-          <a:lstStyle/>
-          <a:p>
-            <a:pPr algn="l" indent="0" marL="0">
-              <a:lnSpc>
-                <a:spcPts val="1375"/>
-              </a:lnSpc>
-              <a:buNone/>
-            </a:pPr>
-            <a:r>
-              <a:rPr lang="en-US" sz="1100" dirty="0">
-                <a:solidFill>
-                  <a:srgbClr val="1C2833"/>
-                </a:solidFill>
-                <a:latin typeface="Courier New" pitchFamily="34" charset="0"/>
-                <a:ea typeface="Courier New" pitchFamily="34" charset="-122"/>
-                <a:cs typeface="Courier New" pitchFamily="34" charset="-120"/>
-              </a:rPr>
-              <a:t>Step 3: Write the units digit of the sum (0) in the middle:    7  0  3</a:t>
-            </a:r>
-            <a:endParaRPr lang="en-US" sz="1100" dirty="0"/>
-          </a:p>
-        </p:txBody>
-      </p:sp>
-      <p:sp>
-        <p:nvSpPr>
-          <p:cNvPr id="10" name="Text 8"/>
-          <p:cNvSpPr/>
-          <p:nvPr/>
-        </p:nvSpPr>
-        <p:spPr>
-          <a:xfrm>
-            <a:off x="631627" y="1917650"/>
-            <a:ext cx="8086939" cy="174575"/>
-          </a:xfrm>
-          <a:prstGeom prst="rect">
-            <a:avLst/>
-          </a:prstGeom>
-          <a:noFill/>
-          <a:ln/>
-        </p:spPr>
-        <p:txBody>
-          <a:bodyPr wrap="square" lIns="0" tIns="0" rIns="0" bIns="0" rtlCol="0" anchor="t"/>
-          <a:lstStyle/>
-          <a:p>
-            <a:pPr algn="l" indent="0" marL="0">
-              <a:lnSpc>
-                <a:spcPts val="1375"/>
-              </a:lnSpc>
-              <a:buNone/>
-            </a:pPr>
-            <a:r>
-              <a:rPr lang="en-US" sz="1100" dirty="0">
-                <a:solidFill>
-                  <a:srgbClr val="1C2833"/>
-                </a:solidFill>
-                <a:latin typeface="Courier New" pitchFamily="34" charset="0"/>
-                <a:ea typeface="Courier New" pitchFamily="34" charset="-122"/>
-                <a:cs typeface="Courier New" pitchFamily="34" charset="-120"/>
-              </a:rPr>
-              <a:t>Step 4: Carry the tens digit of the sum (1) into the leftmost digit: 7 + 1 = 8.</a:t>
-            </a:r>
-            <a:endParaRPr lang="en-US" sz="1100" dirty="0"/>
-          </a:p>
-        </p:txBody>
-      </p:sp>
-      <p:sp>
-        <p:nvSpPr>
-          <p:cNvPr id="11" name="Text 9"/>
-          <p:cNvSpPr/>
-          <p:nvPr/>
-        </p:nvSpPr>
-        <p:spPr>
-          <a:xfrm>
-            <a:off x="631627" y="2092226"/>
-            <a:ext cx="8086939" cy="174575"/>
-          </a:xfrm>
-          <a:prstGeom prst="rect">
-            <a:avLst/>
-          </a:prstGeom>
-          <a:noFill/>
-          <a:ln/>
-        </p:spPr>
-        <p:txBody>
-          <a:bodyPr wrap="square" lIns="0" tIns="0" rIns="0" bIns="0" rtlCol="0" anchor="t"/>
-          <a:lstStyle/>
-          <a:p>
-            <a:pPr algn="l" indent="0" marL="0">
-              <a:lnSpc>
-                <a:spcPts val="1375"/>
-              </a:lnSpc>
-              <a:buNone/>
-            </a:pPr>
-            <a:r>
-              <a:rPr lang="en-US" sz="1100" dirty="0">
-                <a:solidFill>
-                  <a:srgbClr val="1C2833"/>
-                </a:solidFill>
-                <a:latin typeface="Courier New" pitchFamily="34" charset="0"/>
-                <a:ea typeface="Courier New" pitchFamily="34" charset="-122"/>
-                <a:cs typeface="Courier New" pitchFamily="34" charset="-120"/>
-              </a:rPr>
-              <a:t>Step 5: Answer:   8  0  3   →   803.</a:t>
-            </a:r>
-            <a:endParaRPr lang="en-US" sz="1100" dirty="0"/>
-          </a:p>
-        </p:txBody>
-      </p:sp>
-      <p:sp>
-        <p:nvSpPr>
-          <p:cNvPr id="12" name="Text 10"/>
-          <p:cNvSpPr/>
-          <p:nvPr/>
-        </p:nvSpPr>
-        <p:spPr>
-          <a:xfrm>
-            <a:off x="406301" y="2482602"/>
-            <a:ext cx="8498026" cy="213271"/>
-          </a:xfrm>
-          <a:prstGeom prst="rect">
-            <a:avLst/>
-          </a:prstGeom>
-          <a:noFill/>
-          <a:ln/>
-        </p:spPr>
-        <p:txBody>
-          <a:bodyPr wrap="square" lIns="0" tIns="0" rIns="0" bIns="0" rtlCol="0" anchor="t"/>
-          <a:lstStyle/>
-          <a:p>
-            <a:pPr algn="l" indent="0" marL="0">
-              <a:lnSpc>
-                <a:spcPts val="1680"/>
-              </a:lnSpc>
-              <a:spcBef>
-                <a:spcPts val="300"/>
-              </a:spcBef>
-              <a:spcAft>
-                <a:spcPts val="300"/>
-              </a:spcAft>
-              <a:buNone/>
-            </a:pPr>
-            <a:r>
-              <a:rPr lang="en-US" sz="1200" dirty="0">
+          <a:p>
+            <a:pPr algn="l" marL="342900" indent="-342900">
+              <a:lnSpc>
+                <a:spcPts val="1620"/>
+              </a:lnSpc>
+              <a:spcAft>
+                <a:spcPts val="300"/>
+              </a:spcAft>
+              <a:buSzPct val="100000"/>
+              <a:buChar char="•"/>
+            </a:pPr>
+            <a:r>
+              <a:rPr lang="en-US" sz="1200" i="1" dirty="0">
                 <a:solidFill>
                   <a:srgbClr val="1C2833"/>
                 </a:solidFill>
@@ -4810,53 +8930,7 @@
                 <a:ea typeface="Arial" pitchFamily="34" charset="-122"/>
                 <a:cs typeface="Arial" pitchFamily="34" charset="-120"/>
               </a:rPr>
-              <a:t>Check: 73 × 11 = 73 × 10 + 73 = 730 + 73 = </a:t>
-            </a:r>
-            <a:pPr algn="l" indent="0" marL="0">
-              <a:lnSpc>
-                <a:spcPts val="1680"/>
-              </a:lnSpc>
-              <a:spcBef>
-                <a:spcPts val="300"/>
-              </a:spcBef>
-              <a:spcAft>
-                <a:spcPts val="300"/>
-              </a:spcAft>
-              <a:buNone/>
-            </a:pPr>
-            <a:r>
-              <a:rPr lang="en-US" sz="1200" b="1" dirty="0">
-                <a:solidFill>
-                  <a:srgbClr val="1C2833"/>
-                </a:solidFill>
-                <a:latin typeface="Arial" pitchFamily="34" charset="0"/>
-                <a:ea typeface="Arial" pitchFamily="34" charset="-122"/>
-                <a:cs typeface="Arial" pitchFamily="34" charset="-120"/>
-              </a:rPr>
-              <a:t>803</a:t>
-            </a:r>
-            <a:pPr algn="l" indent="0" marL="0">
-              <a:lnSpc>
-                <a:spcPts val="1680"/>
-              </a:lnSpc>
-              <a:spcBef>
-                <a:spcPts val="300"/>
-              </a:spcBef>
-              <a:spcAft>
-                <a:spcPts val="300"/>
-              </a:spcAft>
-              <a:buNone/>
-            </a:pPr>
-            <a:r>
-              <a:rPr lang="en-US" sz="1200" dirty="0">
-                <a:solidFill>
-                  <a:srgbClr val="1C2833"/>
-                </a:solidFill>
-                <a:latin typeface="Arial" pitchFamily="34" charset="0"/>
-                <a:ea typeface="Arial" pitchFamily="34" charset="-122"/>
-                <a:cs typeface="Arial" pitchFamily="34" charset="-120"/>
-              </a:rPr>
-              <a:t>. ✓</a:t>
+              <a:t>"You can't put 10 in the middle of a 3-digit number. So what do we do? Carry the 1 — exactly like in standard addition."</a:t>
             </a:r>
             <a:endParaRPr lang="en-US" sz="1200" dirty="0"/>
           </a:p>
@@ -4864,1282 +8938,13 @@
       </p:sp>
       <p:sp>
         <p:nvSpPr>
-          <p:cNvPr id="13" name="Text 11"/>
-          <p:cNvSpPr/>
-          <p:nvPr/>
-        </p:nvSpPr>
-        <p:spPr>
-          <a:xfrm>
-            <a:off x="634901" y="2784723"/>
-            <a:ext cx="8102798" cy="281880"/>
-          </a:xfrm>
-          <a:prstGeom prst="rect">
-            <a:avLst/>
-          </a:prstGeom>
-          <a:noFill/>
-          <a:ln/>
-        </p:spPr>
-        <p:txBody>
-          <a:bodyPr wrap="square" lIns="0" tIns="0" rIns="0" bIns="0" rtlCol="0" anchor="t"/>
-          <a:lstStyle/>
-          <a:p>
-            <a:pPr algn="l" marL="342900" indent="-342900">
-              <a:lnSpc>
-                <a:spcPts val="1620"/>
-              </a:lnSpc>
-              <a:spcAft>
-                <a:spcPts val="300"/>
-              </a:spcAft>
-              <a:buSzPct val="100000"/>
-              <a:buChar char="•"/>
-            </a:pPr>
-            <a:r>
-              <a:rPr lang="en-US" sz="1200" b="1" dirty="0">
-                <a:solidFill>
-                  <a:srgbClr val="1C2833"/>
-                </a:solidFill>
-                <a:latin typeface="Arial" pitchFamily="34" charset="0"/>
-                <a:ea typeface="Arial" pitchFamily="34" charset="-122"/>
-                <a:cs typeface="Arial" pitchFamily="34" charset="-120"/>
-              </a:rPr>
-              <a:t>Try 87 × 11:</a:t>
-            </a:r>
-            <a:endParaRPr lang="en-US" sz="1200" dirty="0"/>
-          </a:p>
-        </p:txBody>
-      </p:sp>
-      <p:sp>
-        <p:nvSpPr>
-          <p:cNvPr id="14" name="Text 12"/>
-          <p:cNvSpPr/>
-          <p:nvPr/>
-        </p:nvSpPr>
-        <p:spPr>
-          <a:xfrm>
-            <a:off x="406301" y="3168104"/>
-            <a:ext cx="8331398" cy="952202"/>
-          </a:xfrm>
-          <a:prstGeom prst="rect">
-            <a:avLst/>
-          </a:prstGeom>
-          <a:solidFill>
-            <a:srgbClr val="F4F8F9"/>
-          </a:solidFill>
-          <a:ln/>
-        </p:spPr>
-        <p:txBody>
-          <a:bodyPr wrap="square" rtlCol="0" anchor="ctr"/>
-          <a:lstStyle/>
-          <a:p>
-            <a:pPr indent="0" marL="0">
-              <a:buNone/>
-            </a:pPr>
-            <a:endParaRPr lang="en-US" dirty="0"/>
-          </a:p>
-        </p:txBody>
-      </p:sp>
-      <p:sp>
-        <p:nvSpPr>
-          <p:cNvPr id="15" name="Shape 13"/>
-          <p:cNvSpPr/>
-          <p:nvPr/>
-        </p:nvSpPr>
-        <p:spPr>
-          <a:xfrm>
-            <a:off x="430113" y="3168104"/>
-            <a:ext cx="0" cy="952202"/>
-          </a:xfrm>
-          <a:prstGeom prst="line">
-            <a:avLst/>
-          </a:prstGeom>
-          <a:noFill/>
-          <a:ln w="47625">
-            <a:solidFill>
-              <a:srgbClr val="277884"/>
-            </a:solidFill>
-            <a:prstDash val="solid"/>
-          </a:ln>
-        </p:spPr>
-      </p:sp>
-      <p:sp>
-        <p:nvSpPr>
-          <p:cNvPr id="16" name="Text 14"/>
-          <p:cNvSpPr/>
-          <p:nvPr/>
-        </p:nvSpPr>
-        <p:spPr>
-          <a:xfrm>
-            <a:off x="631627" y="3295055"/>
-            <a:ext cx="8086939" cy="174575"/>
-          </a:xfrm>
-          <a:prstGeom prst="rect">
-            <a:avLst/>
-          </a:prstGeom>
-          <a:noFill/>
-          <a:ln/>
-        </p:spPr>
-        <p:txBody>
-          <a:bodyPr wrap="square" lIns="0" tIns="0" rIns="0" bIns="0" rtlCol="0" anchor="t"/>
-          <a:lstStyle/>
-          <a:p>
-            <a:pPr algn="l" indent="0" marL="0">
-              <a:lnSpc>
-                <a:spcPts val="1375"/>
-              </a:lnSpc>
-              <a:buNone/>
-            </a:pPr>
-            <a:r>
-              <a:rPr lang="en-US" sz="1100" dirty="0">
-                <a:solidFill>
-                  <a:srgbClr val="1C2833"/>
-                </a:solidFill>
-                <a:latin typeface="Courier New" pitchFamily="34" charset="0"/>
-                <a:ea typeface="Courier New" pitchFamily="34" charset="-122"/>
-                <a:cs typeface="Courier New" pitchFamily="34" charset="-120"/>
-              </a:rPr>
-              <a:t>8  _  7</a:t>
-            </a:r>
-            <a:endParaRPr lang="en-US" sz="1100" dirty="0"/>
-          </a:p>
-        </p:txBody>
-      </p:sp>
-      <p:sp>
-        <p:nvSpPr>
-          <p:cNvPr id="17" name="Text 15"/>
-          <p:cNvSpPr/>
-          <p:nvPr/>
-        </p:nvSpPr>
-        <p:spPr>
-          <a:xfrm>
-            <a:off x="631627" y="3469630"/>
-            <a:ext cx="8086939" cy="174575"/>
-          </a:xfrm>
-          <a:prstGeom prst="rect">
-            <a:avLst/>
-          </a:prstGeom>
-          <a:noFill/>
-          <a:ln/>
-        </p:spPr>
-        <p:txBody>
-          <a:bodyPr wrap="square" lIns="0" tIns="0" rIns="0" bIns="0" rtlCol="0" anchor="t"/>
-          <a:lstStyle/>
-          <a:p>
-            <a:pPr algn="l" indent="0" marL="0">
-              <a:lnSpc>
-                <a:spcPts val="1375"/>
-              </a:lnSpc>
-              <a:buNone/>
-            </a:pPr>
-            <a:r>
-              <a:rPr lang="en-US" sz="1100" dirty="0">
-                <a:solidFill>
-                  <a:srgbClr val="1C2833"/>
-                </a:solidFill>
-                <a:latin typeface="Courier New" pitchFamily="34" charset="0"/>
-                <a:ea typeface="Courier New" pitchFamily="34" charset="-122"/>
-                <a:cs typeface="Courier New" pitchFamily="34" charset="-120"/>
-              </a:rPr>
-              <a:t>8 + 7 = 15</a:t>
-            </a:r>
-            <a:endParaRPr lang="en-US" sz="1100" dirty="0"/>
-          </a:p>
-        </p:txBody>
-      </p:sp>
-      <p:sp>
-        <p:nvSpPr>
-          <p:cNvPr id="18" name="Text 16"/>
-          <p:cNvSpPr/>
-          <p:nvPr/>
-        </p:nvSpPr>
-        <p:spPr>
-          <a:xfrm>
-            <a:off x="631627" y="3644205"/>
-            <a:ext cx="8086939" cy="174575"/>
-          </a:xfrm>
-          <a:prstGeom prst="rect">
-            <a:avLst/>
-          </a:prstGeom>
-          <a:noFill/>
-          <a:ln/>
-        </p:spPr>
-        <p:txBody>
-          <a:bodyPr wrap="square" lIns="0" tIns="0" rIns="0" bIns="0" rtlCol="0" anchor="t"/>
-          <a:lstStyle/>
-          <a:p>
-            <a:pPr algn="l" indent="0" marL="0">
-              <a:lnSpc>
-                <a:spcPts val="1375"/>
-              </a:lnSpc>
-              <a:buNone/>
-            </a:pPr>
-            <a:r>
-              <a:rPr lang="en-US" sz="1100" dirty="0">
-                <a:solidFill>
-                  <a:srgbClr val="1C2833"/>
-                </a:solidFill>
-                <a:latin typeface="Courier New" pitchFamily="34" charset="0"/>
-                <a:ea typeface="Courier New" pitchFamily="34" charset="-122"/>
-                <a:cs typeface="Courier New" pitchFamily="34" charset="-120"/>
-              </a:rPr>
-              <a:t>Middle = 5; carry 1 into the 8 → 9.</a:t>
-            </a:r>
-            <a:endParaRPr lang="en-US" sz="1100" dirty="0"/>
-          </a:p>
-        </p:txBody>
-      </p:sp>
-      <p:sp>
-        <p:nvSpPr>
-          <p:cNvPr id="19" name="Text 17"/>
-          <p:cNvSpPr/>
-          <p:nvPr/>
-        </p:nvSpPr>
-        <p:spPr>
-          <a:xfrm>
-            <a:off x="631627" y="3818781"/>
-            <a:ext cx="8086939" cy="174575"/>
-          </a:xfrm>
-          <a:prstGeom prst="rect">
-            <a:avLst/>
-          </a:prstGeom>
-          <a:noFill/>
-          <a:ln/>
-        </p:spPr>
-        <p:txBody>
-          <a:bodyPr wrap="square" lIns="0" tIns="0" rIns="0" bIns="0" rtlCol="0" anchor="t"/>
-          <a:lstStyle/>
-          <a:p>
-            <a:pPr algn="l" indent="0" marL="0">
-              <a:lnSpc>
-                <a:spcPts val="1375"/>
-              </a:lnSpc>
-              <a:buNone/>
-            </a:pPr>
-            <a:r>
-              <a:rPr lang="en-US" sz="1100" dirty="0">
-                <a:solidFill>
-                  <a:srgbClr val="1C2833"/>
-                </a:solidFill>
-                <a:latin typeface="Courier New" pitchFamily="34" charset="0"/>
-                <a:ea typeface="Courier New" pitchFamily="34" charset="-122"/>
-                <a:cs typeface="Courier New" pitchFamily="34" charset="-120"/>
-              </a:rPr>
-              <a:t>Answer: 9  5  7 → 957.</a:t>
-            </a:r>
-            <a:endParaRPr lang="en-US" sz="1100" dirty="0"/>
-          </a:p>
-        </p:txBody>
-      </p:sp>
-      <p:sp>
-        <p:nvSpPr>
-          <p:cNvPr id="20" name="Text 18"/>
-          <p:cNvSpPr/>
-          <p:nvPr/>
-        </p:nvSpPr>
-        <p:spPr>
-          <a:xfrm>
-            <a:off x="406301" y="4209157"/>
-            <a:ext cx="8498026" cy="213271"/>
-          </a:xfrm>
-          <a:prstGeom prst="rect">
-            <a:avLst/>
-          </a:prstGeom>
-          <a:noFill/>
-          <a:ln/>
-        </p:spPr>
-        <p:txBody>
-          <a:bodyPr wrap="square" lIns="0" tIns="0" rIns="0" bIns="0" rtlCol="0" anchor="t"/>
-          <a:lstStyle/>
-          <a:p>
-            <a:pPr algn="l" indent="0" marL="0">
-              <a:lnSpc>
-                <a:spcPts val="1680"/>
-              </a:lnSpc>
-              <a:spcBef>
-                <a:spcPts val="300"/>
-              </a:spcBef>
-              <a:spcAft>
-                <a:spcPts val="300"/>
-              </a:spcAft>
-              <a:buNone/>
-            </a:pPr>
-            <a:r>
-              <a:rPr lang="en-US" sz="1200" dirty="0">
-                <a:solidFill>
-                  <a:srgbClr val="1C2833"/>
-                </a:solidFill>
-                <a:latin typeface="Arial" pitchFamily="34" charset="0"/>
-                <a:ea typeface="Arial" pitchFamily="34" charset="-122"/>
-                <a:cs typeface="Arial" pitchFamily="34" charset="-120"/>
-              </a:rPr>
-              <a:t>Check: 87 × 11 = 870 + 87 = </a:t>
-            </a:r>
-            <a:pPr algn="l" indent="0" marL="0">
-              <a:lnSpc>
-                <a:spcPts val="1680"/>
-              </a:lnSpc>
-              <a:spcBef>
-                <a:spcPts val="300"/>
-              </a:spcBef>
-              <a:spcAft>
-                <a:spcPts val="300"/>
-              </a:spcAft>
-              <a:buNone/>
-            </a:pPr>
-            <a:r>
-              <a:rPr lang="en-US" sz="1200" b="1" dirty="0">
-                <a:solidFill>
-                  <a:srgbClr val="1C2833"/>
-                </a:solidFill>
-                <a:latin typeface="Arial" pitchFamily="34" charset="0"/>
-                <a:ea typeface="Arial" pitchFamily="34" charset="-122"/>
-                <a:cs typeface="Arial" pitchFamily="34" charset="-120"/>
-              </a:rPr>
-              <a:t>957</a:t>
-            </a:r>
-            <a:pPr algn="l" indent="0" marL="0">
-              <a:lnSpc>
-                <a:spcPts val="1680"/>
-              </a:lnSpc>
-              <a:spcBef>
-                <a:spcPts val="300"/>
-              </a:spcBef>
-              <a:spcAft>
-                <a:spcPts val="300"/>
-              </a:spcAft>
-              <a:buNone/>
-            </a:pPr>
-            <a:r>
-              <a:rPr lang="en-US" sz="1200" dirty="0">
-                <a:solidFill>
-                  <a:srgbClr val="1C2833"/>
-                </a:solidFill>
-                <a:latin typeface="Arial" pitchFamily="34" charset="0"/>
-                <a:ea typeface="Arial" pitchFamily="34" charset="-122"/>
-                <a:cs typeface="Arial" pitchFamily="34" charset="-120"/>
-              </a:rPr>
-              <a:t>. ✓</a:t>
-            </a:r>
-            <a:endParaRPr lang="en-US" sz="1200" dirty="0"/>
-          </a:p>
-        </p:txBody>
-      </p:sp>
-      <p:sp>
-        <p:nvSpPr>
-          <p:cNvPr id="21" name="Text 19"/>
-          <p:cNvSpPr/>
-          <p:nvPr/>
-        </p:nvSpPr>
-        <p:spPr>
-          <a:xfrm>
-            <a:off x="634901" y="4511278"/>
-            <a:ext cx="8102798" cy="281880"/>
-          </a:xfrm>
-          <a:prstGeom prst="rect">
-            <a:avLst/>
-          </a:prstGeom>
-          <a:noFill/>
-          <a:ln/>
-        </p:spPr>
-        <p:txBody>
-          <a:bodyPr wrap="square" lIns="0" tIns="0" rIns="0" bIns="0" rtlCol="0" anchor="t"/>
-          <a:lstStyle/>
-          <a:p>
-            <a:pPr algn="l" marL="342900" indent="-342900">
-              <a:lnSpc>
-                <a:spcPts val="1620"/>
-              </a:lnSpc>
-              <a:spcAft>
-                <a:spcPts val="300"/>
-              </a:spcAft>
-              <a:buSzPct val="100000"/>
-              <a:buChar char="•"/>
-            </a:pPr>
-            <a:r>
-              <a:rPr lang="en-US" sz="1200" b="1" dirty="0">
-                <a:solidFill>
-                  <a:srgbClr val="1C2833"/>
-                </a:solidFill>
-                <a:latin typeface="Arial" pitchFamily="34" charset="0"/>
-                <a:ea typeface="Arial" pitchFamily="34" charset="-122"/>
-                <a:cs typeface="Arial" pitchFamily="34" charset="-120"/>
-              </a:rPr>
-              <a:t>Try 99 × 11:</a:t>
-            </a:r>
-            <a:endParaRPr lang="en-US" sz="1200" dirty="0"/>
-          </a:p>
-        </p:txBody>
-      </p:sp>
-      <p:sp>
-        <p:nvSpPr>
-          <p:cNvPr id="22" name="Text 20"/>
-          <p:cNvSpPr/>
-          <p:nvPr/>
-        </p:nvSpPr>
-        <p:spPr>
-          <a:xfrm>
-            <a:off x="406301" y="4894659"/>
-            <a:ext cx="8331398" cy="1126778"/>
-          </a:xfrm>
-          <a:prstGeom prst="rect">
-            <a:avLst/>
-          </a:prstGeom>
-          <a:solidFill>
-            <a:srgbClr val="F4F8F9"/>
-          </a:solidFill>
-          <a:ln/>
-        </p:spPr>
-        <p:txBody>
-          <a:bodyPr wrap="square" rtlCol="0" anchor="ctr"/>
-          <a:lstStyle/>
-          <a:p>
-            <a:pPr indent="0" marL="0">
-              <a:buNone/>
-            </a:pPr>
-            <a:endParaRPr lang="en-US" dirty="0"/>
-          </a:p>
-        </p:txBody>
-      </p:sp>
-      <p:sp>
-        <p:nvSpPr>
-          <p:cNvPr id="23" name="Shape 21"/>
-          <p:cNvSpPr/>
-          <p:nvPr/>
-        </p:nvSpPr>
-        <p:spPr>
-          <a:xfrm>
-            <a:off x="430113" y="4894659"/>
-            <a:ext cx="0" cy="1126778"/>
-          </a:xfrm>
-          <a:prstGeom prst="line">
-            <a:avLst/>
-          </a:prstGeom>
-          <a:noFill/>
-          <a:ln w="47625">
-            <a:solidFill>
-              <a:srgbClr val="277884"/>
-            </a:solidFill>
-            <a:prstDash val="solid"/>
-          </a:ln>
-        </p:spPr>
-      </p:sp>
-      <p:sp>
-        <p:nvSpPr>
-          <p:cNvPr id="24" name="Text 22"/>
-          <p:cNvSpPr/>
-          <p:nvPr/>
-        </p:nvSpPr>
-        <p:spPr>
-          <a:xfrm>
-            <a:off x="631627" y="5021610"/>
-            <a:ext cx="8086939" cy="174575"/>
-          </a:xfrm>
-          <a:prstGeom prst="rect">
-            <a:avLst/>
-          </a:prstGeom>
-          <a:noFill/>
-          <a:ln/>
-        </p:spPr>
-        <p:txBody>
-          <a:bodyPr wrap="square" lIns="0" tIns="0" rIns="0" bIns="0" rtlCol="0" anchor="t"/>
-          <a:lstStyle/>
-          <a:p>
-            <a:pPr algn="l" indent="0" marL="0">
-              <a:lnSpc>
-                <a:spcPts val="1375"/>
-              </a:lnSpc>
-              <a:buNone/>
-            </a:pPr>
-            <a:r>
-              <a:rPr lang="en-US" sz="1100" dirty="0">
-                <a:solidFill>
-                  <a:srgbClr val="1C2833"/>
-                </a:solidFill>
-                <a:latin typeface="Courier New" pitchFamily="34" charset="0"/>
-                <a:ea typeface="Courier New" pitchFamily="34" charset="-122"/>
-                <a:cs typeface="Courier New" pitchFamily="34" charset="-120"/>
-              </a:rPr>
-              <a:t>9 _ 9</a:t>
-            </a:r>
-            <a:endParaRPr lang="en-US" sz="1100" dirty="0"/>
-          </a:p>
-        </p:txBody>
-      </p:sp>
-      <p:sp>
-        <p:nvSpPr>
-          <p:cNvPr id="25" name="Text 23"/>
-          <p:cNvSpPr/>
-          <p:nvPr/>
-        </p:nvSpPr>
-        <p:spPr>
-          <a:xfrm>
-            <a:off x="631627" y="5196185"/>
-            <a:ext cx="8086939" cy="174575"/>
-          </a:xfrm>
-          <a:prstGeom prst="rect">
-            <a:avLst/>
-          </a:prstGeom>
-          <a:noFill/>
-          <a:ln/>
-        </p:spPr>
-        <p:txBody>
-          <a:bodyPr wrap="square" lIns="0" tIns="0" rIns="0" bIns="0" rtlCol="0" anchor="t"/>
-          <a:lstStyle/>
-          <a:p>
-            <a:pPr algn="l" indent="0" marL="0">
-              <a:lnSpc>
-                <a:spcPts val="1375"/>
-              </a:lnSpc>
-              <a:buNone/>
-            </a:pPr>
-            <a:r>
-              <a:rPr lang="en-US" sz="1100" dirty="0">
-                <a:solidFill>
-                  <a:srgbClr val="1C2833"/>
-                </a:solidFill>
-                <a:latin typeface="Courier New" pitchFamily="34" charset="0"/>
-                <a:ea typeface="Courier New" pitchFamily="34" charset="-122"/>
-                <a:cs typeface="Courier New" pitchFamily="34" charset="-120"/>
-              </a:rPr>
-              <a:t>9 + 9 = 18</a:t>
-            </a:r>
-            <a:endParaRPr lang="en-US" sz="1100" dirty="0"/>
-          </a:p>
-        </p:txBody>
-      </p:sp>
-      <p:sp>
-        <p:nvSpPr>
-          <p:cNvPr id="26" name="Text 24"/>
-          <p:cNvSpPr/>
-          <p:nvPr/>
-        </p:nvSpPr>
-        <p:spPr>
-          <a:xfrm>
-            <a:off x="631627" y="5370761"/>
-            <a:ext cx="8086939" cy="174575"/>
-          </a:xfrm>
-          <a:prstGeom prst="rect">
-            <a:avLst/>
-          </a:prstGeom>
-          <a:noFill/>
-          <a:ln/>
-        </p:spPr>
-        <p:txBody>
-          <a:bodyPr wrap="square" lIns="0" tIns="0" rIns="0" bIns="0" rtlCol="0" anchor="t"/>
-          <a:lstStyle/>
-          <a:p>
-            <a:pPr algn="l" indent="0" marL="0">
-              <a:lnSpc>
-                <a:spcPts val="1375"/>
-              </a:lnSpc>
-              <a:buNone/>
-            </a:pPr>
-            <a:r>
-              <a:rPr lang="en-US" sz="1100" dirty="0">
-                <a:solidFill>
-                  <a:srgbClr val="1C2833"/>
-                </a:solidFill>
-                <a:latin typeface="Courier New" pitchFamily="34" charset="0"/>
-                <a:ea typeface="Courier New" pitchFamily="34" charset="-122"/>
-                <a:cs typeface="Courier New" pitchFamily="34" charset="-120"/>
-              </a:rPr>
-              <a:t>Middle = 8; carry 1 into the 9 → 10.</a:t>
-            </a:r>
-            <a:endParaRPr lang="en-US" sz="1100" dirty="0"/>
-          </a:p>
-        </p:txBody>
-      </p:sp>
-      <p:sp>
-        <p:nvSpPr>
-          <p:cNvPr id="27" name="Text 25"/>
-          <p:cNvSpPr/>
-          <p:nvPr/>
-        </p:nvSpPr>
-        <p:spPr>
-          <a:xfrm>
-            <a:off x="631627" y="5545336"/>
-            <a:ext cx="8086939" cy="174575"/>
-          </a:xfrm>
-          <a:prstGeom prst="rect">
-            <a:avLst/>
-          </a:prstGeom>
-          <a:noFill/>
-          <a:ln/>
-        </p:spPr>
-        <p:txBody>
-          <a:bodyPr wrap="square" lIns="0" tIns="0" rIns="0" bIns="0" rtlCol="0" anchor="t"/>
-          <a:lstStyle/>
-          <a:p>
-            <a:pPr algn="l" indent="0" marL="0">
-              <a:lnSpc>
-                <a:spcPts val="1375"/>
-              </a:lnSpc>
-              <a:buNone/>
-            </a:pPr>
-            <a:r>
-              <a:rPr lang="en-US" sz="1100" dirty="0">
-                <a:solidFill>
-                  <a:srgbClr val="1C2833"/>
-                </a:solidFill>
-                <a:latin typeface="Courier New" pitchFamily="34" charset="0"/>
-                <a:ea typeface="Courier New" pitchFamily="34" charset="-122"/>
-                <a:cs typeface="Courier New" pitchFamily="34" charset="-120"/>
-              </a:rPr>
-              <a:t>But 10 isn't a single digit — so it becomes a "1" carried further: leftmost = 0, with a 1 carried to the left of that.</a:t>
-            </a:r>
-            <a:endParaRPr lang="en-US" sz="1100" dirty="0"/>
-          </a:p>
-        </p:txBody>
-      </p:sp>
-      <p:sp>
-        <p:nvSpPr>
-          <p:cNvPr id="28" name="Text 26"/>
-          <p:cNvSpPr/>
-          <p:nvPr/>
-        </p:nvSpPr>
-        <p:spPr>
-          <a:xfrm>
-            <a:off x="631627" y="5719911"/>
-            <a:ext cx="8086939" cy="174575"/>
-          </a:xfrm>
-          <a:prstGeom prst="rect">
-            <a:avLst/>
-          </a:prstGeom>
-          <a:noFill/>
-          <a:ln/>
-        </p:spPr>
-        <p:txBody>
-          <a:bodyPr wrap="square" lIns="0" tIns="0" rIns="0" bIns="0" rtlCol="0" anchor="t"/>
-          <a:lstStyle/>
-          <a:p>
-            <a:pPr algn="l" indent="0" marL="0">
-              <a:lnSpc>
-                <a:spcPts val="1375"/>
-              </a:lnSpc>
-              <a:buNone/>
-            </a:pPr>
-            <a:r>
-              <a:rPr lang="en-US" sz="1100" dirty="0">
-                <a:solidFill>
-                  <a:srgbClr val="1C2833"/>
-                </a:solidFill>
-                <a:latin typeface="Courier New" pitchFamily="34" charset="0"/>
-                <a:ea typeface="Courier New" pitchFamily="34" charset="-122"/>
-                <a:cs typeface="Courier New" pitchFamily="34" charset="-120"/>
-              </a:rPr>
-              <a:t>Answer: 1  0  8  9 → 1089.</a:t>
-            </a:r>
-            <a:endParaRPr lang="en-US" sz="1100" dirty="0"/>
-          </a:p>
-        </p:txBody>
-      </p:sp>
-      <p:sp>
-        <p:nvSpPr>
-          <p:cNvPr id="29" name="Text 27"/>
-          <p:cNvSpPr/>
-          <p:nvPr/>
-        </p:nvSpPr>
-        <p:spPr>
-          <a:xfrm>
-            <a:off x="406301" y="6110288"/>
-            <a:ext cx="8498026" cy="213271"/>
-          </a:xfrm>
-          <a:prstGeom prst="rect">
-            <a:avLst/>
-          </a:prstGeom>
-          <a:noFill/>
-          <a:ln/>
-        </p:spPr>
-        <p:txBody>
-          <a:bodyPr wrap="square" lIns="0" tIns="0" rIns="0" bIns="0" rtlCol="0" anchor="t"/>
-          <a:lstStyle/>
-          <a:p>
-            <a:pPr algn="l" indent="0" marL="0">
-              <a:lnSpc>
-                <a:spcPts val="1680"/>
-              </a:lnSpc>
-              <a:spcBef>
-                <a:spcPts val="300"/>
-              </a:spcBef>
-              <a:spcAft>
-                <a:spcPts val="300"/>
-              </a:spcAft>
-              <a:buNone/>
-            </a:pPr>
-            <a:r>
-              <a:rPr lang="en-US" sz="1200" dirty="0">
-                <a:solidFill>
-                  <a:srgbClr val="1C2833"/>
-                </a:solidFill>
-                <a:latin typeface="Arial" pitchFamily="34" charset="0"/>
-                <a:ea typeface="Arial" pitchFamily="34" charset="-122"/>
-                <a:cs typeface="Arial" pitchFamily="34" charset="-120"/>
-              </a:rPr>
-              <a:t>Check: 99 × 11 = 990 + 99 = </a:t>
-            </a:r>
-            <a:pPr algn="l" indent="0" marL="0">
-              <a:lnSpc>
-                <a:spcPts val="1680"/>
-              </a:lnSpc>
-              <a:spcBef>
-                <a:spcPts val="300"/>
-              </a:spcBef>
-              <a:spcAft>
-                <a:spcPts val="300"/>
-              </a:spcAft>
-              <a:buNone/>
-            </a:pPr>
-            <a:r>
-              <a:rPr lang="en-US" sz="1200" b="1" dirty="0">
-                <a:solidFill>
-                  <a:srgbClr val="1C2833"/>
-                </a:solidFill>
-                <a:latin typeface="Arial" pitchFamily="34" charset="0"/>
-                <a:ea typeface="Arial" pitchFamily="34" charset="-122"/>
-                <a:cs typeface="Arial" pitchFamily="34" charset="-120"/>
-              </a:rPr>
-              <a:t>1089</a:t>
-            </a:r>
-            <a:pPr algn="l" indent="0" marL="0">
-              <a:lnSpc>
-                <a:spcPts val="1680"/>
-              </a:lnSpc>
-              <a:spcBef>
-                <a:spcPts val="300"/>
-              </a:spcBef>
-              <a:spcAft>
-                <a:spcPts val="300"/>
-              </a:spcAft>
-              <a:buNone/>
-            </a:pPr>
-            <a:r>
-              <a:rPr lang="en-US" sz="1200" dirty="0">
-                <a:solidFill>
-                  <a:srgbClr val="1C2833"/>
-                </a:solidFill>
-                <a:latin typeface="Arial" pitchFamily="34" charset="0"/>
-                <a:ea typeface="Arial" pitchFamily="34" charset="-122"/>
-                <a:cs typeface="Arial" pitchFamily="34" charset="-120"/>
-              </a:rPr>
-              <a:t>. ✓ (4-digit answer because the carry cascaded.)</a:t>
-            </a:r>
-            <a:endParaRPr lang="en-US" sz="1200" dirty="0"/>
-          </a:p>
-        </p:txBody>
-      </p:sp>
-      <p:sp>
-        <p:nvSpPr>
-          <p:cNvPr id="30" name="Text 28"/>
-          <p:cNvSpPr/>
-          <p:nvPr/>
-        </p:nvSpPr>
-        <p:spPr>
-          <a:xfrm>
-            <a:off x="634901" y="6412409"/>
-            <a:ext cx="8102798" cy="281880"/>
-          </a:xfrm>
-          <a:prstGeom prst="rect">
-            <a:avLst/>
-          </a:prstGeom>
-          <a:noFill/>
-          <a:ln/>
-        </p:spPr>
-        <p:txBody>
-          <a:bodyPr wrap="square" lIns="0" tIns="0" rIns="0" bIns="0" rtlCol="0" anchor="t"/>
-          <a:lstStyle/>
-          <a:p>
-            <a:pPr algn="l" marL="342900" indent="-342900">
-              <a:lnSpc>
-                <a:spcPts val="1620"/>
-              </a:lnSpc>
-              <a:spcAft>
-                <a:spcPts val="300"/>
-              </a:spcAft>
-              <a:buSzPct val="100000"/>
-              <a:buChar char="•"/>
-            </a:pPr>
-            <a:r>
-              <a:rPr lang="en-US" sz="1200" b="1" dirty="0">
-                <a:solidFill>
-                  <a:srgbClr val="1C2833"/>
-                </a:solidFill>
-                <a:latin typeface="Arial" pitchFamily="34" charset="0"/>
-                <a:ea typeface="Arial" pitchFamily="34" charset="-122"/>
-                <a:cs typeface="Arial" pitchFamily="34" charset="-120"/>
-              </a:rPr>
-              <a:t>The full procedure</a:t>
-            </a:r>
-            <a:pPr algn="l" indent="0" marL="0">
-              <a:lnSpc>
-                <a:spcPts val="1620"/>
-              </a:lnSpc>
-              <a:spcAft>
-                <a:spcPts val="300"/>
-              </a:spcAft>
-              <a:buNone/>
-            </a:pPr>
-            <a:r>
-              <a:rPr lang="en-US" sz="1200" dirty="0">
-                <a:solidFill>
-                  <a:srgbClr val="1C2833"/>
-                </a:solidFill>
-                <a:latin typeface="Arial" pitchFamily="34" charset="0"/>
-                <a:ea typeface="Arial" pitchFamily="34" charset="-122"/>
-                <a:cs typeface="Arial" pitchFamily="34" charset="-120"/>
-              </a:rPr>
-              <a:t> (boxed on the board):</a:t>
-            </a:r>
-            <a:endParaRPr lang="en-US" sz="1200" dirty="0"/>
-          </a:p>
-        </p:txBody>
-      </p:sp>
-      <p:sp>
-        <p:nvSpPr>
-          <p:cNvPr id="31" name="Text 29"/>
-          <p:cNvSpPr/>
-          <p:nvPr/>
-        </p:nvSpPr>
-        <p:spPr>
-          <a:xfrm>
-            <a:off x="406301" y="6783139"/>
-            <a:ext cx="8498026" cy="426541"/>
-          </a:xfrm>
-          <a:prstGeom prst="rect">
-            <a:avLst/>
-          </a:prstGeom>
-          <a:noFill/>
-          <a:ln/>
-        </p:spPr>
-        <p:txBody>
-          <a:bodyPr wrap="square" lIns="0" tIns="0" rIns="0" bIns="0" rtlCol="0" anchor="t"/>
-          <a:lstStyle/>
-          <a:p>
-            <a:pPr algn="l" indent="0" marL="0">
-              <a:lnSpc>
-                <a:spcPts val="1680"/>
-              </a:lnSpc>
-              <a:spcBef>
-                <a:spcPts val="300"/>
-              </a:spcBef>
-              <a:spcAft>
-                <a:spcPts val="300"/>
-              </a:spcAft>
-              <a:buNone/>
-            </a:pPr>
-            <a:r>
-              <a:rPr lang="en-US" sz="1200" dirty="0">
-                <a:solidFill>
-                  <a:srgbClr val="1C2833"/>
-                </a:solidFill>
-                <a:latin typeface="Arial" pitchFamily="34" charset="0"/>
-                <a:ea typeface="Arial" pitchFamily="34" charset="-122"/>
-                <a:cs typeface="Arial" pitchFamily="34" charset="-120"/>
-              </a:rPr>
-              <a:t>&gt; *</a:t>
-            </a:r>
-            <a:pPr algn="l" indent="0" marL="0">
-              <a:lnSpc>
-                <a:spcPts val="1680"/>
-              </a:lnSpc>
-              <a:spcBef>
-                <a:spcPts val="300"/>
-              </a:spcBef>
-              <a:spcAft>
-                <a:spcPts val="300"/>
-              </a:spcAft>
-              <a:buNone/>
-            </a:pPr>
-            <a:r>
-              <a:rPr lang="en-US" sz="1200" i="1" dirty="0">
-                <a:solidFill>
-                  <a:srgbClr val="1C2833"/>
-                </a:solidFill>
-                <a:latin typeface="Arial" pitchFamily="34" charset="0"/>
-                <a:ea typeface="Arial" pitchFamily="34" charset="-122"/>
-                <a:cs typeface="Arial" pitchFamily="34" charset="-120"/>
-              </a:rPr>
-              <a:t>For any 2-digit number</a:t>
-            </a:r>
-            <a:pPr algn="l" indent="0" marL="0">
-              <a:lnSpc>
-                <a:spcPts val="1680"/>
-              </a:lnSpc>
-              <a:spcBef>
-                <a:spcPts val="300"/>
-              </a:spcBef>
-              <a:spcAft>
-                <a:spcPts val="300"/>
-              </a:spcAft>
-              <a:buNone/>
-            </a:pPr>
-            <a:r>
-              <a:rPr lang="en-US" sz="1200" dirty="0">
-                <a:solidFill>
-                  <a:srgbClr val="1C2833"/>
-                </a:solidFill>
-                <a:latin typeface="Arial" pitchFamily="34" charset="0"/>
-                <a:ea typeface="Arial" pitchFamily="34" charset="-122"/>
-                <a:cs typeface="Arial" pitchFamily="34" charset="-120"/>
-              </a:rPr>
-              <a:t>ab</a:t>
-            </a:r>
-            <a:pPr algn="l" indent="0" marL="0">
-              <a:lnSpc>
-                <a:spcPts val="1680"/>
-              </a:lnSpc>
-              <a:spcBef>
-                <a:spcPts val="300"/>
-              </a:spcBef>
-              <a:spcAft>
-                <a:spcPts val="300"/>
-              </a:spcAft>
-              <a:buNone/>
-            </a:pPr>
-            <a:r>
-              <a:rPr lang="en-US" sz="1200" i="1" dirty="0">
-                <a:solidFill>
-                  <a:srgbClr val="1C2833"/>
-                </a:solidFill>
-                <a:latin typeface="Arial" pitchFamily="34" charset="0"/>
-                <a:ea typeface="Arial" pitchFamily="34" charset="-122"/>
-                <a:cs typeface="Arial" pitchFamily="34" charset="-120"/>
-              </a:rPr>
-              <a:t> × 11:</a:t>
-            </a:r>
-            <a:pPr algn="l" indent="0" marL="0">
-              <a:lnSpc>
-                <a:spcPts val="1680"/>
-              </a:lnSpc>
-              <a:spcBef>
-                <a:spcPts val="300"/>
-              </a:spcBef>
-              <a:spcAft>
-                <a:spcPts val="300"/>
-              </a:spcAft>
-              <a:buNone/>
-            </a:pPr>
-            <a:r>
-              <a:rPr lang="en-US" sz="1200" i="1" dirty="0">
-                <a:solidFill>
-                  <a:srgbClr val="1C2833"/>
-                </a:solidFill>
-                <a:latin typeface="Arial" pitchFamily="34" charset="0"/>
-                <a:ea typeface="Arial" pitchFamily="34" charset="-122"/>
-                <a:cs typeface="Arial" pitchFamily="34" charset="-120"/>
-              </a:rPr>
-              <a:t> &gt; 1. Compute</a:t>
-            </a:r>
-            <a:pPr algn="l" indent="0" marL="0">
-              <a:lnSpc>
-                <a:spcPts val="1680"/>
-              </a:lnSpc>
-              <a:spcBef>
-                <a:spcPts val="300"/>
-              </a:spcBef>
-              <a:spcAft>
-                <a:spcPts val="300"/>
-              </a:spcAft>
-              <a:buNone/>
-            </a:pPr>
-            <a:r>
-              <a:rPr lang="en-US" sz="1200" dirty="0">
-                <a:solidFill>
-                  <a:srgbClr val="1C2833"/>
-                </a:solidFill>
-                <a:latin typeface="Arial" pitchFamily="34" charset="0"/>
-                <a:ea typeface="Arial" pitchFamily="34" charset="-122"/>
-                <a:cs typeface="Arial" pitchFamily="34" charset="-120"/>
-              </a:rPr>
-              <a:t>a</a:t>
-            </a:r>
-            <a:pPr algn="l" indent="0" marL="0">
-              <a:lnSpc>
-                <a:spcPts val="1680"/>
-              </a:lnSpc>
-              <a:spcBef>
-                <a:spcPts val="300"/>
-              </a:spcBef>
-              <a:spcAft>
-                <a:spcPts val="300"/>
-              </a:spcAft>
-              <a:buNone/>
-            </a:pPr>
-            <a:r>
-              <a:rPr lang="en-US" sz="1200" i="1" dirty="0">
-                <a:solidFill>
-                  <a:srgbClr val="1C2833"/>
-                </a:solidFill>
-                <a:latin typeface="Arial" pitchFamily="34" charset="0"/>
-                <a:ea typeface="Arial" pitchFamily="34" charset="-122"/>
-                <a:cs typeface="Arial" pitchFamily="34" charset="-120"/>
-              </a:rPr>
-              <a:t> +</a:t>
-            </a:r>
-            <a:pPr algn="l" indent="0" marL="0">
-              <a:lnSpc>
-                <a:spcPts val="1680"/>
-              </a:lnSpc>
-              <a:spcBef>
-                <a:spcPts val="300"/>
-              </a:spcBef>
-              <a:spcAft>
-                <a:spcPts val="300"/>
-              </a:spcAft>
-              <a:buNone/>
-            </a:pPr>
-            <a:r>
-              <a:rPr lang="en-US" sz="1200" dirty="0">
-                <a:solidFill>
-                  <a:srgbClr val="1C2833"/>
-                </a:solidFill>
-                <a:latin typeface="Arial" pitchFamily="34" charset="0"/>
-                <a:ea typeface="Arial" pitchFamily="34" charset="-122"/>
-                <a:cs typeface="Arial" pitchFamily="34" charset="-120"/>
-              </a:rPr>
-              <a:t>b</a:t>
-            </a:r>
-            <a:pPr algn="l" indent="0" marL="0">
-              <a:lnSpc>
-                <a:spcPts val="1680"/>
-              </a:lnSpc>
-              <a:spcBef>
-                <a:spcPts val="300"/>
-              </a:spcBef>
-              <a:spcAft>
-                <a:spcPts val="300"/>
-              </a:spcAft>
-              <a:buNone/>
-            </a:pPr>
-            <a:r>
-              <a:rPr lang="en-US" sz="1200" i="1" dirty="0">
-                <a:solidFill>
-                  <a:srgbClr val="1C2833"/>
-                </a:solidFill>
-                <a:latin typeface="Arial" pitchFamily="34" charset="0"/>
-                <a:ea typeface="Arial" pitchFamily="34" charset="-122"/>
-                <a:cs typeface="Arial" pitchFamily="34" charset="-120"/>
-              </a:rPr>
-              <a:t>. &gt; 2. If the sum is &lt; 10: answer is</a:t>
-            </a:r>
-            <a:pPr algn="l" indent="0" marL="0">
-              <a:lnSpc>
-                <a:spcPts val="1680"/>
-              </a:lnSpc>
-              <a:spcBef>
-                <a:spcPts val="300"/>
-              </a:spcBef>
-              <a:spcAft>
-                <a:spcPts val="300"/>
-              </a:spcAft>
-              <a:buNone/>
-            </a:pPr>
-            <a:r>
-              <a:rPr lang="en-US" sz="1200" dirty="0">
-                <a:solidFill>
-                  <a:srgbClr val="1C2833"/>
-                </a:solidFill>
-                <a:latin typeface="Arial" pitchFamily="34" charset="0"/>
-                <a:ea typeface="Arial" pitchFamily="34" charset="-122"/>
-                <a:cs typeface="Arial" pitchFamily="34" charset="-120"/>
-              </a:rPr>
-              <a:t>a</a:t>
-            </a:r>
-            <a:pPr algn="l" indent="0" marL="0">
-              <a:lnSpc>
-                <a:spcPts val="1680"/>
-              </a:lnSpc>
-              <a:spcBef>
-                <a:spcPts val="300"/>
-              </a:spcBef>
-              <a:spcAft>
-                <a:spcPts val="300"/>
-              </a:spcAft>
-              <a:buNone/>
-            </a:pPr>
-            <a:r>
-              <a:rPr lang="en-US" sz="1200" i="1" dirty="0">
-                <a:solidFill>
-                  <a:srgbClr val="1C2833"/>
-                </a:solidFill>
-                <a:latin typeface="Arial" pitchFamily="34" charset="0"/>
-                <a:ea typeface="Arial" pitchFamily="34" charset="-122"/>
-                <a:cs typeface="Arial" pitchFamily="34" charset="-120"/>
-              </a:rPr>
-              <a:t> (</a:t>
-            </a:r>
-            <a:pPr algn="l" indent="0" marL="0">
-              <a:lnSpc>
-                <a:spcPts val="1680"/>
-              </a:lnSpc>
-              <a:spcBef>
-                <a:spcPts val="300"/>
-              </a:spcBef>
-              <a:spcAft>
-                <a:spcPts val="300"/>
-              </a:spcAft>
-              <a:buNone/>
-            </a:pPr>
-            <a:r>
-              <a:rPr lang="en-US" sz="1200" dirty="0">
-                <a:solidFill>
-                  <a:srgbClr val="1C2833"/>
-                </a:solidFill>
-                <a:latin typeface="Arial" pitchFamily="34" charset="0"/>
-                <a:ea typeface="Arial" pitchFamily="34" charset="-122"/>
-                <a:cs typeface="Arial" pitchFamily="34" charset="-120"/>
-              </a:rPr>
-              <a:t>a+b</a:t>
-            </a:r>
-            <a:pPr algn="l" indent="0" marL="0">
-              <a:lnSpc>
-                <a:spcPts val="1680"/>
-              </a:lnSpc>
-              <a:spcBef>
-                <a:spcPts val="300"/>
-              </a:spcBef>
-              <a:spcAft>
-                <a:spcPts val="300"/>
-              </a:spcAft>
-              <a:buNone/>
-            </a:pPr>
-            <a:r>
-              <a:rPr lang="en-US" sz="1200" i="1" dirty="0">
-                <a:solidFill>
-                  <a:srgbClr val="1C2833"/>
-                </a:solidFill>
-                <a:latin typeface="Arial" pitchFamily="34" charset="0"/>
-                <a:ea typeface="Arial" pitchFamily="34" charset="-122"/>
-                <a:cs typeface="Arial" pitchFamily="34" charset="-120"/>
-              </a:rPr>
-              <a:t>)</a:t>
-            </a:r>
-            <a:pPr algn="l" indent="0" marL="0">
-              <a:lnSpc>
-                <a:spcPts val="1680"/>
-              </a:lnSpc>
-              <a:spcBef>
-                <a:spcPts val="300"/>
-              </a:spcBef>
-              <a:spcAft>
-                <a:spcPts val="300"/>
-              </a:spcAft>
-              <a:buNone/>
-            </a:pPr>
-            <a:r>
-              <a:rPr lang="en-US" sz="1200" dirty="0">
-                <a:solidFill>
-                  <a:srgbClr val="1C2833"/>
-                </a:solidFill>
-                <a:latin typeface="Arial" pitchFamily="34" charset="0"/>
-                <a:ea typeface="Arial" pitchFamily="34" charset="-122"/>
-                <a:cs typeface="Arial" pitchFamily="34" charset="-120"/>
-              </a:rPr>
-              <a:t>b</a:t>
-            </a:r>
-            <a:pPr algn="l" indent="0" marL="0">
-              <a:lnSpc>
-                <a:spcPts val="1680"/>
-              </a:lnSpc>
-              <a:spcBef>
-                <a:spcPts val="300"/>
-              </a:spcBef>
-              <a:spcAft>
-                <a:spcPts val="300"/>
-              </a:spcAft>
-              <a:buNone/>
-            </a:pPr>
-            <a:r>
-              <a:rPr lang="en-US" sz="1200" i="1" dirty="0">
-                <a:solidFill>
-                  <a:srgbClr val="1C2833"/>
-                </a:solidFill>
-                <a:latin typeface="Arial" pitchFamily="34" charset="0"/>
-                <a:ea typeface="Arial" pitchFamily="34" charset="-122"/>
-                <a:cs typeface="Arial" pitchFamily="34" charset="-120"/>
-              </a:rPr>
-              <a:t>. &gt; 3. If the sum is ≥ 10: middle digit = units digit of sum; add 1 to</a:t>
-            </a:r>
-            <a:pPr algn="l" indent="0" marL="0">
-              <a:lnSpc>
-                <a:spcPts val="1680"/>
-              </a:lnSpc>
-              <a:spcBef>
-                <a:spcPts val="300"/>
-              </a:spcBef>
-              <a:spcAft>
-                <a:spcPts val="300"/>
-              </a:spcAft>
-              <a:buNone/>
-            </a:pPr>
-            <a:r>
-              <a:rPr lang="en-US" sz="1200" dirty="0">
-                <a:solidFill>
-                  <a:srgbClr val="1C2833"/>
-                </a:solidFill>
-                <a:latin typeface="Arial" pitchFamily="34" charset="0"/>
-                <a:ea typeface="Arial" pitchFamily="34" charset="-122"/>
-                <a:cs typeface="Arial" pitchFamily="34" charset="-120"/>
-              </a:rPr>
-              <a:t>a</a:t>
-            </a:r>
-            <a:pPr algn="l" indent="0" marL="0">
-              <a:lnSpc>
-                <a:spcPts val="1680"/>
-              </a:lnSpc>
-              <a:spcBef>
-                <a:spcPts val="300"/>
-              </a:spcBef>
-              <a:spcAft>
-                <a:spcPts val="300"/>
-              </a:spcAft>
-              <a:buNone/>
-            </a:pPr>
-            <a:r>
-              <a:rPr lang="en-US" sz="1200" i="1" dirty="0">
-                <a:solidFill>
-                  <a:srgbClr val="1C2833"/>
-                </a:solidFill>
-                <a:latin typeface="Arial" pitchFamily="34" charset="0"/>
-                <a:ea typeface="Arial" pitchFamily="34" charset="-122"/>
-                <a:cs typeface="Arial" pitchFamily="34" charset="-120"/>
-              </a:rPr>
-              <a:t>. &gt; 4. If the new</a:t>
-            </a:r>
-            <a:pPr algn="l" indent="0" marL="0">
-              <a:lnSpc>
-                <a:spcPts val="1680"/>
-              </a:lnSpc>
-              <a:spcBef>
-                <a:spcPts val="300"/>
-              </a:spcBef>
-              <a:spcAft>
-                <a:spcPts val="300"/>
-              </a:spcAft>
-              <a:buNone/>
-            </a:pPr>
-            <a:r>
-              <a:rPr lang="en-US" sz="1200" dirty="0">
-                <a:solidFill>
-                  <a:srgbClr val="1C2833"/>
-                </a:solidFill>
-                <a:latin typeface="Arial" pitchFamily="34" charset="0"/>
-                <a:ea typeface="Arial" pitchFamily="34" charset="-122"/>
-                <a:cs typeface="Arial" pitchFamily="34" charset="-120"/>
-              </a:rPr>
-              <a:t>a* is ≥ 10 (only happens at 99): cascade the carry.</a:t>
-            </a:r>
-            <a:endParaRPr lang="en-US" sz="1200" dirty="0"/>
-          </a:p>
-        </p:txBody>
-      </p:sp>
-      <p:sp>
-        <p:nvSpPr>
-          <p:cNvPr id="32" name="Text 30"/>
-          <p:cNvSpPr/>
-          <p:nvPr/>
-        </p:nvSpPr>
-        <p:spPr>
-          <a:xfrm>
-            <a:off x="406301" y="7362081"/>
+          <p:cNvPr id="5" name="Text 3"/>
+          <p:cNvSpPr/>
+          <p:nvPr/>
+        </p:nvSpPr>
+        <p:spPr>
+          <a:xfrm>
+            <a:off x="406301" y="4434929"/>
             <a:ext cx="8498026" cy="213271"/>
           </a:xfrm>
           <a:prstGeom prst="rect">
@@ -6283,7 +9088,7 @@
                 <a:ea typeface="Georgia" pitchFamily="34" charset="-122"/>
                 <a:cs typeface="Georgia" pitchFamily="34" charset="-120"/>
               </a:rPr>
-              <a:t>Activity (17 min) — Mixed practice</a:t>
+              <a:t>Core (15 min) — The carry case</a:t>
             </a:r>
             <a:endParaRPr lang="en-US" sz="1800" dirty="0"/>
           </a:p>
@@ -6297,8 +9102,8 @@
         </p:nvSpPr>
         <p:spPr>
           <a:xfrm>
-            <a:off x="406301" y="870942"/>
-            <a:ext cx="8498026" cy="213271"/>
+            <a:off x="634901" y="883593"/>
+            <a:ext cx="8102798" cy="281880"/>
           </a:xfrm>
           <a:prstGeom prst="rect">
             <a:avLst/>
@@ -6310,20 +9115,18 @@
           <a:bodyPr wrap="square" lIns="0" tIns="0" rIns="0" bIns="0" rtlCol="0" anchor="t"/>
           <a:lstStyle/>
           <a:p>
-            <a:pPr algn="l" indent="0" marL="0">
-              <a:lnSpc>
-                <a:spcPts val="1680"/>
-              </a:lnSpc>
-              <a:spcBef>
-                <a:spcPts val="300"/>
-              </a:spcBef>
-              <a:spcAft>
-                <a:spcPts val="300"/>
-              </a:spcAft>
-              <a:buNone/>
-            </a:pPr>
-            <a:r>
-              <a:rPr lang="en-US" sz="1200" dirty="0">
+            <a:pPr algn="l" marL="342900" indent="-342900">
+              <a:lnSpc>
+                <a:spcPts val="1620"/>
+              </a:lnSpc>
+              <a:spcAft>
+                <a:spcPts val="300"/>
+              </a:spcAft>
+              <a:buSzPct val="100000"/>
+              <a:buChar char="•"/>
+            </a:pPr>
+            <a:r>
+              <a:rPr lang="en-US" sz="1200" b="1" dirty="0">
                 <a:solidFill>
                   <a:srgbClr val="1C2833"/>
                 </a:solidFill>
@@ -6331,7 +9134,7 @@
                 <a:ea typeface="Arial" pitchFamily="34" charset="-122"/>
                 <a:cs typeface="Arial" pitchFamily="34" charset="-120"/>
               </a:rPr>
-              <a:t>– Worksheet of 12 problems, half no-carry, half carry:</a:t>
+              <a:t>Demonstrate 73 × 11 fully:</a:t>
             </a:r>
             <a:endParaRPr lang="en-US" sz="1200" dirty="0"/>
           </a:p>
@@ -6340,233 +9143,6 @@
       <p:sp>
         <p:nvSpPr>
           <p:cNvPr id="5" name="Text 3"/>
-          <p:cNvSpPr/>
-          <p:nvPr/>
-        </p:nvSpPr>
-        <p:spPr>
-          <a:xfrm>
-            <a:off x="406301" y="1173063"/>
-            <a:ext cx="8331398" cy="777627"/>
-          </a:xfrm>
-          <a:prstGeom prst="rect">
-            <a:avLst/>
-          </a:prstGeom>
-          <a:solidFill>
-            <a:srgbClr val="F4F8F9"/>
-          </a:solidFill>
-          <a:ln/>
-        </p:spPr>
-        <p:txBody>
-          <a:bodyPr wrap="square" rtlCol="0" anchor="ctr"/>
-          <a:lstStyle/>
-          <a:p>
-            <a:pPr indent="0" marL="0">
-              <a:buNone/>
-            </a:pPr>
-            <a:endParaRPr lang="en-US" dirty="0"/>
-          </a:p>
-        </p:txBody>
-      </p:sp>
-      <p:sp>
-        <p:nvSpPr>
-          <p:cNvPr id="6" name="Shape 4"/>
-          <p:cNvSpPr/>
-          <p:nvPr/>
-        </p:nvSpPr>
-        <p:spPr>
-          <a:xfrm>
-            <a:off x="430113" y="1173063"/>
-            <a:ext cx="0" cy="777627"/>
-          </a:xfrm>
-          <a:prstGeom prst="line">
-            <a:avLst/>
-          </a:prstGeom>
-          <a:noFill/>
-          <a:ln w="47625">
-            <a:solidFill>
-              <a:srgbClr val="277884"/>
-            </a:solidFill>
-            <a:prstDash val="solid"/>
-          </a:ln>
-        </p:spPr>
-      </p:sp>
-      <p:sp>
-        <p:nvSpPr>
-          <p:cNvPr id="7" name="Text 5"/>
-          <p:cNvSpPr/>
-          <p:nvPr/>
-        </p:nvSpPr>
-        <p:spPr>
-          <a:xfrm>
-            <a:off x="631627" y="1300014"/>
-            <a:ext cx="8086939" cy="174575"/>
-          </a:xfrm>
-          <a:prstGeom prst="rect">
-            <a:avLst/>
-          </a:prstGeom>
-          <a:noFill/>
-          <a:ln/>
-        </p:spPr>
-        <p:txBody>
-          <a:bodyPr wrap="square" lIns="0" tIns="0" rIns="0" bIns="0" rtlCol="0" anchor="t"/>
-          <a:lstStyle/>
-          <a:p>
-            <a:pPr algn="l" indent="0" marL="0">
-              <a:lnSpc>
-                <a:spcPts val="1375"/>
-              </a:lnSpc>
-              <a:buNone/>
-            </a:pPr>
-            <a:r>
-              <a:rPr lang="en-US" sz="1100" dirty="0">
-                <a:solidFill>
-                  <a:srgbClr val="1C2833"/>
-                </a:solidFill>
-                <a:latin typeface="Courier New" pitchFamily="34" charset="0"/>
-                <a:ea typeface="Courier New" pitchFamily="34" charset="-122"/>
-                <a:cs typeface="Courier New" pitchFamily="34" charset="-120"/>
-              </a:rPr>
-              <a:t>21 × 11    35 × 11    47 × 11    58 × 11</a:t>
-            </a:r>
-            <a:endParaRPr lang="en-US" sz="1100" dirty="0"/>
-          </a:p>
-        </p:txBody>
-      </p:sp>
-      <p:sp>
-        <p:nvSpPr>
-          <p:cNvPr id="8" name="Text 6"/>
-          <p:cNvSpPr/>
-          <p:nvPr/>
-        </p:nvSpPr>
-        <p:spPr>
-          <a:xfrm>
-            <a:off x="631627" y="1474589"/>
-            <a:ext cx="8086939" cy="174575"/>
-          </a:xfrm>
-          <a:prstGeom prst="rect">
-            <a:avLst/>
-          </a:prstGeom>
-          <a:noFill/>
-          <a:ln/>
-        </p:spPr>
-        <p:txBody>
-          <a:bodyPr wrap="square" lIns="0" tIns="0" rIns="0" bIns="0" rtlCol="0" anchor="t"/>
-          <a:lstStyle/>
-          <a:p>
-            <a:pPr algn="l" indent="0" marL="0">
-              <a:lnSpc>
-                <a:spcPts val="1375"/>
-              </a:lnSpc>
-              <a:buNone/>
-            </a:pPr>
-            <a:r>
-              <a:rPr lang="en-US" sz="1100" dirty="0">
-                <a:solidFill>
-                  <a:srgbClr val="1C2833"/>
-                </a:solidFill>
-                <a:latin typeface="Courier New" pitchFamily="34" charset="0"/>
-                <a:ea typeface="Courier New" pitchFamily="34" charset="-122"/>
-                <a:cs typeface="Courier New" pitchFamily="34" charset="-120"/>
-              </a:rPr>
-              <a:t>62 × 11    74 × 11    83 × 11    89 × 11</a:t>
-            </a:r>
-            <a:endParaRPr lang="en-US" sz="1100" dirty="0"/>
-          </a:p>
-        </p:txBody>
-      </p:sp>
-      <p:sp>
-        <p:nvSpPr>
-          <p:cNvPr id="9" name="Text 7"/>
-          <p:cNvSpPr/>
-          <p:nvPr/>
-        </p:nvSpPr>
-        <p:spPr>
-          <a:xfrm>
-            <a:off x="631627" y="1649164"/>
-            <a:ext cx="8086939" cy="174575"/>
-          </a:xfrm>
-          <a:prstGeom prst="rect">
-            <a:avLst/>
-          </a:prstGeom>
-          <a:noFill/>
-          <a:ln/>
-        </p:spPr>
-        <p:txBody>
-          <a:bodyPr wrap="square" lIns="0" tIns="0" rIns="0" bIns="0" rtlCol="0" anchor="t"/>
-          <a:lstStyle/>
-          <a:p>
-            <a:pPr algn="l" indent="0" marL="0">
-              <a:lnSpc>
-                <a:spcPts val="1375"/>
-              </a:lnSpc>
-              <a:buNone/>
-            </a:pPr>
-            <a:r>
-              <a:rPr lang="en-US" sz="1100" dirty="0">
-                <a:solidFill>
-                  <a:srgbClr val="1C2833"/>
-                </a:solidFill>
-                <a:latin typeface="Courier New" pitchFamily="34" charset="0"/>
-                <a:ea typeface="Courier New" pitchFamily="34" charset="-122"/>
-                <a:cs typeface="Courier New" pitchFamily="34" charset="-120"/>
-              </a:rPr>
-              <a:t>91 × 11    99 × 11    18 × 11    27 × 11</a:t>
-            </a:r>
-            <a:endParaRPr lang="en-US" sz="1100" dirty="0"/>
-          </a:p>
-        </p:txBody>
-      </p:sp>
-      <p:sp>
-        <p:nvSpPr>
-          <p:cNvPr id="10" name="Text 8"/>
-          <p:cNvSpPr/>
-          <p:nvPr/>
-        </p:nvSpPr>
-        <p:spPr>
-          <a:xfrm>
-            <a:off x="406301" y="2039541"/>
-            <a:ext cx="8498026" cy="426541"/>
-          </a:xfrm>
-          <a:prstGeom prst="rect">
-            <a:avLst/>
-          </a:prstGeom>
-          <a:noFill/>
-          <a:ln/>
-        </p:spPr>
-        <p:txBody>
-          <a:bodyPr wrap="square" lIns="0" tIns="0" rIns="0" bIns="0" rtlCol="0" anchor="t"/>
-          <a:lstStyle/>
-          <a:p>
-            <a:pPr algn="l" indent="0" marL="0">
-              <a:lnSpc>
-                <a:spcPts val="1680"/>
-              </a:lnSpc>
-              <a:spcBef>
-                <a:spcPts val="300"/>
-              </a:spcBef>
-              <a:spcAft>
-                <a:spcPts val="300"/>
-              </a:spcAft>
-              <a:buNone/>
-            </a:pPr>
-            <a:r>
-              <a:rPr lang="en-US" sz="1200" dirty="0">
-                <a:solidFill>
-                  <a:srgbClr val="1C2833"/>
-                </a:solidFill>
-                <a:latin typeface="Arial" pitchFamily="34" charset="0"/>
-                <a:ea typeface="Arial" pitchFamily="34" charset="-122"/>
-                <a:cs typeface="Arial" pitchFamily="34" charset="-120"/>
-              </a:rPr>
-              <a:t>– Round 1 (8 min): solo, untimed. Self-check with long multiplication on any 3 of them. – Round 2 (8 min): paired. Partner calls a problem; you answer aloud. Goal: under 5 seconds per problem.</a:t>
-            </a:r>
-            <a:endParaRPr lang="en-US" sz="1200" dirty="0"/>
-          </a:p>
-        </p:txBody>
-      </p:sp>
-      <p:sp>
-        <p:nvSpPr>
-          <p:cNvPr id="11" name="Text 9"/>
           <p:cNvSpPr/>
           <p:nvPr/>
         </p:nvSpPr>
@@ -6716,7 +9292,7 @@
                 <a:ea typeface="Georgia" pitchFamily="34" charset="-122"/>
                 <a:cs typeface="Georgia" pitchFamily="34" charset="-120"/>
               </a:rPr>
-              <a:t>Wrap-up (5 min)</a:t>
+              <a:t>Core (15 min) — The carry case (cont.)</a:t>
             </a:r>
             <a:endParaRPr lang="en-US" sz="1800" dirty="0"/>
           </a:p>
@@ -6730,8 +9306,271 @@
         </p:nvSpPr>
         <p:spPr>
           <a:xfrm>
-            <a:off x="406301" y="870942"/>
-            <a:ext cx="8498026" cy="426541"/>
+            <a:off x="406301" y="883593"/>
+            <a:ext cx="8331398" cy="1126778"/>
+          </a:xfrm>
+          <a:prstGeom prst="rect">
+            <a:avLst/>
+          </a:prstGeom>
+          <a:solidFill>
+            <a:srgbClr val="F4F8F9"/>
+          </a:solidFill>
+          <a:ln/>
+        </p:spPr>
+        <p:txBody>
+          <a:bodyPr wrap="square" rtlCol="0" anchor="ctr"/>
+          <a:lstStyle/>
+          <a:p>
+            <a:pPr indent="0" marL="0">
+              <a:buNone/>
+            </a:pPr>
+            <a:endParaRPr lang="en-US" dirty="0"/>
+          </a:p>
+        </p:txBody>
+      </p:sp>
+      <p:sp>
+        <p:nvSpPr>
+          <p:cNvPr id="5" name="Shape 3"/>
+          <p:cNvSpPr/>
+          <p:nvPr/>
+        </p:nvSpPr>
+        <p:spPr>
+          <a:xfrm>
+            <a:off x="430113" y="883593"/>
+            <a:ext cx="0" cy="1126778"/>
+          </a:xfrm>
+          <a:prstGeom prst="line">
+            <a:avLst/>
+          </a:prstGeom>
+          <a:noFill/>
+          <a:ln w="47625">
+            <a:solidFill>
+              <a:srgbClr val="277884"/>
+            </a:solidFill>
+            <a:prstDash val="solid"/>
+          </a:ln>
+        </p:spPr>
+      </p:sp>
+      <p:sp>
+        <p:nvSpPr>
+          <p:cNvPr id="6" name="Text 4"/>
+          <p:cNvSpPr/>
+          <p:nvPr/>
+        </p:nvSpPr>
+        <p:spPr>
+          <a:xfrm>
+            <a:off x="631627" y="1010543"/>
+            <a:ext cx="8086939" cy="174575"/>
+          </a:xfrm>
+          <a:prstGeom prst="rect">
+            <a:avLst/>
+          </a:prstGeom>
+          <a:noFill/>
+          <a:ln/>
+        </p:spPr>
+        <p:txBody>
+          <a:bodyPr wrap="square" lIns="0" tIns="0" rIns="0" bIns="0" rtlCol="0" anchor="t"/>
+          <a:lstStyle/>
+          <a:p>
+            <a:pPr algn="l" indent="0" marL="0">
+              <a:lnSpc>
+                <a:spcPts val="1375"/>
+              </a:lnSpc>
+              <a:buNone/>
+            </a:pPr>
+            <a:r>
+              <a:rPr lang="en-US" sz="1100" dirty="0">
+                <a:solidFill>
+                  <a:srgbClr val="1C2833"/>
+                </a:solidFill>
+                <a:latin typeface="Courier New" pitchFamily="34" charset="0"/>
+                <a:ea typeface="Courier New" pitchFamily="34" charset="-122"/>
+                <a:cs typeface="Courier New" pitchFamily="34" charset="-120"/>
+              </a:rPr>
+              <a:t>Step 1: Split:    7  _  3</a:t>
+            </a:r>
+            <a:endParaRPr lang="en-US" sz="1100" dirty="0"/>
+          </a:p>
+        </p:txBody>
+      </p:sp>
+      <p:sp>
+        <p:nvSpPr>
+          <p:cNvPr id="7" name="Text 5"/>
+          <p:cNvSpPr/>
+          <p:nvPr/>
+        </p:nvSpPr>
+        <p:spPr>
+          <a:xfrm>
+            <a:off x="631627" y="1185118"/>
+            <a:ext cx="8086939" cy="174575"/>
+          </a:xfrm>
+          <a:prstGeom prst="rect">
+            <a:avLst/>
+          </a:prstGeom>
+          <a:noFill/>
+          <a:ln/>
+        </p:spPr>
+        <p:txBody>
+          <a:bodyPr wrap="square" lIns="0" tIns="0" rIns="0" bIns="0" rtlCol="0" anchor="t"/>
+          <a:lstStyle/>
+          <a:p>
+            <a:pPr algn="l" indent="0" marL="0">
+              <a:lnSpc>
+                <a:spcPts val="1375"/>
+              </a:lnSpc>
+              <a:buNone/>
+            </a:pPr>
+            <a:r>
+              <a:rPr lang="en-US" sz="1100" dirty="0">
+                <a:solidFill>
+                  <a:srgbClr val="1C2833"/>
+                </a:solidFill>
+                <a:latin typeface="Courier New" pitchFamily="34" charset="0"/>
+                <a:ea typeface="Courier New" pitchFamily="34" charset="-122"/>
+                <a:cs typeface="Courier New" pitchFamily="34" charset="-120"/>
+              </a:rPr>
+              <a:t>Step 2: Add:      7 + 3 = 10</a:t>
+            </a:r>
+            <a:endParaRPr lang="en-US" sz="1100" dirty="0"/>
+          </a:p>
+        </p:txBody>
+      </p:sp>
+      <p:sp>
+        <p:nvSpPr>
+          <p:cNvPr id="8" name="Text 6"/>
+          <p:cNvSpPr/>
+          <p:nvPr/>
+        </p:nvSpPr>
+        <p:spPr>
+          <a:xfrm>
+            <a:off x="631627" y="1359694"/>
+            <a:ext cx="8086939" cy="174575"/>
+          </a:xfrm>
+          <a:prstGeom prst="rect">
+            <a:avLst/>
+          </a:prstGeom>
+          <a:noFill/>
+          <a:ln/>
+        </p:spPr>
+        <p:txBody>
+          <a:bodyPr wrap="square" lIns="0" tIns="0" rIns="0" bIns="0" rtlCol="0" anchor="t"/>
+          <a:lstStyle/>
+          <a:p>
+            <a:pPr algn="l" indent="0" marL="0">
+              <a:lnSpc>
+                <a:spcPts val="1375"/>
+              </a:lnSpc>
+              <a:buNone/>
+            </a:pPr>
+            <a:r>
+              <a:rPr lang="en-US" sz="1100" dirty="0">
+                <a:solidFill>
+                  <a:srgbClr val="1C2833"/>
+                </a:solidFill>
+                <a:latin typeface="Courier New" pitchFamily="34" charset="0"/>
+                <a:ea typeface="Courier New" pitchFamily="34" charset="-122"/>
+                <a:cs typeface="Courier New" pitchFamily="34" charset="-120"/>
+              </a:rPr>
+              <a:t>Step 3: Write the units digit of the sum (0) in the middle:    7  0  3</a:t>
+            </a:r>
+            <a:endParaRPr lang="en-US" sz="1100" dirty="0"/>
+          </a:p>
+        </p:txBody>
+      </p:sp>
+      <p:sp>
+        <p:nvSpPr>
+          <p:cNvPr id="9" name="Text 7"/>
+          <p:cNvSpPr/>
+          <p:nvPr/>
+        </p:nvSpPr>
+        <p:spPr>
+          <a:xfrm>
+            <a:off x="631627" y="1534269"/>
+            <a:ext cx="8086939" cy="174575"/>
+          </a:xfrm>
+          <a:prstGeom prst="rect">
+            <a:avLst/>
+          </a:prstGeom>
+          <a:noFill/>
+          <a:ln/>
+        </p:spPr>
+        <p:txBody>
+          <a:bodyPr wrap="square" lIns="0" tIns="0" rIns="0" bIns="0" rtlCol="0" anchor="t"/>
+          <a:lstStyle/>
+          <a:p>
+            <a:pPr algn="l" indent="0" marL="0">
+              <a:lnSpc>
+                <a:spcPts val="1375"/>
+              </a:lnSpc>
+              <a:buNone/>
+            </a:pPr>
+            <a:r>
+              <a:rPr lang="en-US" sz="1100" dirty="0">
+                <a:solidFill>
+                  <a:srgbClr val="1C2833"/>
+                </a:solidFill>
+                <a:latin typeface="Courier New" pitchFamily="34" charset="0"/>
+                <a:ea typeface="Courier New" pitchFamily="34" charset="-122"/>
+                <a:cs typeface="Courier New" pitchFamily="34" charset="-120"/>
+              </a:rPr>
+              <a:t>Step 4: Carry the tens digit of the sum (1) into the leftmost digit: 7 + 1 = 8.</a:t>
+            </a:r>
+            <a:endParaRPr lang="en-US" sz="1100" dirty="0"/>
+          </a:p>
+        </p:txBody>
+      </p:sp>
+      <p:sp>
+        <p:nvSpPr>
+          <p:cNvPr id="10" name="Text 8"/>
+          <p:cNvSpPr/>
+          <p:nvPr/>
+        </p:nvSpPr>
+        <p:spPr>
+          <a:xfrm>
+            <a:off x="631627" y="1708845"/>
+            <a:ext cx="8086939" cy="174575"/>
+          </a:xfrm>
+          <a:prstGeom prst="rect">
+            <a:avLst/>
+          </a:prstGeom>
+          <a:noFill/>
+          <a:ln/>
+        </p:spPr>
+        <p:txBody>
+          <a:bodyPr wrap="square" lIns="0" tIns="0" rIns="0" bIns="0" rtlCol="0" anchor="t"/>
+          <a:lstStyle/>
+          <a:p>
+            <a:pPr algn="l" indent="0" marL="0">
+              <a:lnSpc>
+                <a:spcPts val="1375"/>
+              </a:lnSpc>
+              <a:buNone/>
+            </a:pPr>
+            <a:r>
+              <a:rPr lang="en-US" sz="1100" dirty="0">
+                <a:solidFill>
+                  <a:srgbClr val="1C2833"/>
+                </a:solidFill>
+                <a:latin typeface="Courier New" pitchFamily="34" charset="0"/>
+                <a:ea typeface="Courier New" pitchFamily="34" charset="-122"/>
+                <a:cs typeface="Courier New" pitchFamily="34" charset="-120"/>
+              </a:rPr>
+              <a:t>Step 5: Answer:   8  0  3   →   803.</a:t>
+            </a:r>
+            <a:endParaRPr lang="en-US" sz="1100" dirty="0"/>
+          </a:p>
+        </p:txBody>
+      </p:sp>
+      <p:sp>
+        <p:nvSpPr>
+          <p:cNvPr id="11" name="Text 9"/>
+          <p:cNvSpPr/>
+          <p:nvPr/>
+        </p:nvSpPr>
+        <p:spPr>
+          <a:xfrm>
+            <a:off x="406301" y="2099221"/>
+            <a:ext cx="8498026" cy="213271"/>
           </a:xfrm>
           <a:prstGeom prst="rect">
             <a:avLst/>
@@ -6764,7 +9603,7 @@
                 <a:ea typeface="Arial" pitchFamily="34" charset="-122"/>
                 <a:cs typeface="Arial" pitchFamily="34" charset="-120"/>
               </a:rPr>
-              <a:t>– Quick chorus: </a:t>
+              <a:t>Check: 73 × 11 = 73 × 10 + 73 = 730 + 73 = </a:t>
             </a:r>
             <a:pPr algn="l" indent="0" marL="0">
               <a:lnSpc>
@@ -6779,7 +9618,7 @@
               <a:buNone/>
             </a:pPr>
             <a:r>
-              <a:rPr lang="en-US" sz="1200" i="1" dirty="0">
+              <a:rPr lang="en-US" sz="1200" b="1" dirty="0">
                 <a:solidFill>
                   <a:srgbClr val="1C2833"/>
                 </a:solidFill>
@@ -6787,7 +9626,7 @@
                 <a:ea typeface="Arial" pitchFamily="34" charset="-122"/>
                 <a:cs typeface="Arial" pitchFamily="34" charset="-120"/>
               </a:rPr>
-              <a:t>"What does the trick break into?"</a:t>
+              <a:t>803</a:t>
             </a:r>
             <a:pPr algn="l" indent="0" marL="0">
               <a:lnSpc>
@@ -6810,30 +9649,7 @@
                 <a:ea typeface="Arial" pitchFamily="34" charset="-122"/>
                 <a:cs typeface="Arial" pitchFamily="34" charset="-120"/>
               </a:rPr>
-              <a:t> — Split, add, drop (and carry if needed). – Tease Day 3: </a:t>
-            </a:r>
-            <a:pPr algn="l" indent="0" marL="0">
-              <a:lnSpc>
-                <a:spcPts val="1680"/>
-              </a:lnSpc>
-              <a:spcBef>
-                <a:spcPts val="300"/>
-              </a:spcBef>
-              <a:spcAft>
-                <a:spcPts val="300"/>
-              </a:spcAft>
-              <a:buNone/>
-            </a:pPr>
-            <a:r>
-              <a:rPr lang="en-US" sz="1200" i="1" dirty="0">
-                <a:solidFill>
-                  <a:srgbClr val="1C2833"/>
-                </a:solidFill>
-                <a:latin typeface="Arial" pitchFamily="34" charset="0"/>
-                <a:ea typeface="Arial" pitchFamily="34" charset="-122"/>
-                <a:cs typeface="Arial" pitchFamily="34" charset="-120"/>
-              </a:rPr>
-              <a:t>"Tomorrow we PROVE why this works. You'll write the algebra yourself."</a:t>
+              <a:t>. ✓</a:t>
             </a:r>
             <a:endParaRPr lang="en-US" sz="1200" dirty="0"/>
           </a:p>
@@ -6841,7 +9657,7 @@
       </p:sp>
       <p:sp>
         <p:nvSpPr>
-          <p:cNvPr id="5" name="Text 3"/>
+          <p:cNvPr id="12" name="Text 10"/>
           <p:cNvSpPr/>
           <p:nvPr/>
         </p:nvSpPr>
@@ -6991,7 +9807,7 @@
                 <a:ea typeface="Georgia" pitchFamily="34" charset="-122"/>
                 <a:cs typeface="Georgia" pitchFamily="34" charset="-120"/>
               </a:rPr>
-              <a:t>Student-facing content</a:t>
+              <a:t>Core (15 min) — The carry case (cont.)</a:t>
             </a:r>
             <a:endParaRPr lang="en-US" sz="1800" dirty="0"/>
           </a:p>
@@ -7005,8 +9821,54 @@
         </p:nvSpPr>
         <p:spPr>
           <a:xfrm>
-            <a:off x="406301" y="883593"/>
-            <a:ext cx="8331398" cy="1612106"/>
+            <a:off x="634901" y="883593"/>
+            <a:ext cx="8102798" cy="281880"/>
+          </a:xfrm>
+          <a:prstGeom prst="rect">
+            <a:avLst/>
+          </a:prstGeom>
+          <a:noFill/>
+          <a:ln/>
+        </p:spPr>
+        <p:txBody>
+          <a:bodyPr wrap="square" lIns="0" tIns="0" rIns="0" bIns="0" rtlCol="0" anchor="t"/>
+          <a:lstStyle/>
+          <a:p>
+            <a:pPr algn="l" marL="342900" indent="-342900">
+              <a:lnSpc>
+                <a:spcPts val="1620"/>
+              </a:lnSpc>
+              <a:spcAft>
+                <a:spcPts val="300"/>
+              </a:spcAft>
+              <a:buSzPct val="100000"/>
+              <a:buChar char="•"/>
+            </a:pPr>
+            <a:r>
+              <a:rPr lang="en-US" sz="1200" b="1" dirty="0">
+                <a:solidFill>
+                  <a:srgbClr val="1C2833"/>
+                </a:solidFill>
+                <a:latin typeface="Arial" pitchFamily="34" charset="0"/>
+                <a:ea typeface="Arial" pitchFamily="34" charset="-122"/>
+                <a:cs typeface="Arial" pitchFamily="34" charset="-120"/>
+              </a:rPr>
+              <a:t>Try 87 × 11:</a:t>
+            </a:r>
+            <a:endParaRPr lang="en-US" sz="1200" dirty="0"/>
+          </a:p>
+        </p:txBody>
+      </p:sp>
+      <p:sp>
+        <p:nvSpPr>
+          <p:cNvPr id="5" name="Text 3"/>
+          <p:cNvSpPr/>
+          <p:nvPr/>
+        </p:nvSpPr>
+        <p:spPr>
+          <a:xfrm>
+            <a:off x="406301" y="1266974"/>
+            <a:ext cx="8331398" cy="952202"/>
           </a:xfrm>
           <a:prstGeom prst="rect">
             <a:avLst/>
@@ -7029,22 +9891,22 @@
       </p:sp>
       <p:sp>
         <p:nvSpPr>
-          <p:cNvPr id="5" name="Shape 3"/>
-          <p:cNvSpPr/>
-          <p:nvPr/>
-        </p:nvSpPr>
-        <p:spPr>
-          <a:xfrm>
-            <a:off x="434876" y="883593"/>
-            <a:ext cx="0" cy="1612106"/>
+          <p:cNvPr id="6" name="Shape 4"/>
+          <p:cNvSpPr/>
+          <p:nvPr/>
+        </p:nvSpPr>
+        <p:spPr>
+          <a:xfrm>
+            <a:off x="430113" y="1266974"/>
+            <a:ext cx="0" cy="952202"/>
           </a:xfrm>
           <a:prstGeom prst="line">
             <a:avLst/>
           </a:prstGeom>
           <a:noFill/>
-          <a:ln w="57150">
+          <a:ln w="47625">
             <a:solidFill>
-              <a:srgbClr val="FE4447"/>
+              <a:srgbClr val="277884"/>
             </a:solidFill>
             <a:prstDash val="solid"/>
           </a:ln>
@@ -7052,14 +9914,14 @@
       </p:sp>
       <p:sp>
         <p:nvSpPr>
-          <p:cNvPr id="6" name="Text 4"/>
-          <p:cNvSpPr/>
-          <p:nvPr/>
-        </p:nvSpPr>
-        <p:spPr>
-          <a:xfrm>
-            <a:off x="692051" y="1074093"/>
-            <a:ext cx="7973389" cy="230981"/>
+          <p:cNvPr id="7" name="Text 5"/>
+          <p:cNvSpPr/>
+          <p:nvPr/>
+        </p:nvSpPr>
+        <p:spPr>
+          <a:xfrm>
+            <a:off x="631627" y="1393924"/>
+            <a:ext cx="8086939" cy="174575"/>
           </a:xfrm>
           <a:prstGeom prst="rect">
             <a:avLst/>
@@ -7073,41 +9935,35 @@
           <a:p>
             <a:pPr algn="l" indent="0" marL="0">
               <a:lnSpc>
-                <a:spcPts val="1820"/>
-              </a:lnSpc>
-              <a:spcBef>
-                <a:spcPts val="300"/>
-              </a:spcBef>
-              <a:spcAft>
-                <a:spcPts val="300"/>
-              </a:spcAft>
-              <a:buNone/>
-            </a:pPr>
-            <a:r>
-              <a:rPr lang="en-US" sz="1300" b="1" i="1" dirty="0">
-                <a:solidFill>
-                  <a:srgbClr val="1C2833"/>
-                </a:solidFill>
-                <a:latin typeface="Georgia" pitchFamily="34" charset="0"/>
-                <a:ea typeface="Georgia" pitchFamily="34" charset="-122"/>
-                <a:cs typeface="Georgia" pitchFamily="34" charset="-120"/>
-              </a:rPr>
-              <a:t>The ×11 Trick (with carry)</a:t>
-            </a:r>
-            <a:endParaRPr lang="en-US" sz="1300" dirty="0"/>
-          </a:p>
-        </p:txBody>
-      </p:sp>
-      <p:sp>
-        <p:nvSpPr>
-          <p:cNvPr id="7" name="Text 5"/>
-          <p:cNvSpPr/>
-          <p:nvPr/>
-        </p:nvSpPr>
-        <p:spPr>
-          <a:xfrm>
-            <a:off x="692051" y="1343174"/>
-            <a:ext cx="7973389" cy="461963"/>
+                <a:spcPts val="1375"/>
+              </a:lnSpc>
+              <a:buNone/>
+            </a:pPr>
+            <a:r>
+              <a:rPr lang="en-US" sz="1100" dirty="0">
+                <a:solidFill>
+                  <a:srgbClr val="1C2833"/>
+                </a:solidFill>
+                <a:latin typeface="Courier New" pitchFamily="34" charset="0"/>
+                <a:ea typeface="Courier New" pitchFamily="34" charset="-122"/>
+                <a:cs typeface="Courier New" pitchFamily="34" charset="-120"/>
+              </a:rPr>
+              <a:t>8  _  7</a:t>
+            </a:r>
+            <a:endParaRPr lang="en-US" sz="1100" dirty="0"/>
+          </a:p>
+        </p:txBody>
+      </p:sp>
+      <p:sp>
+        <p:nvSpPr>
+          <p:cNvPr id="8" name="Text 6"/>
+          <p:cNvSpPr/>
+          <p:nvPr/>
+        </p:nvSpPr>
+        <p:spPr>
+          <a:xfrm>
+            <a:off x="631627" y="1568500"/>
+            <a:ext cx="8086939" cy="174575"/>
           </a:xfrm>
           <a:prstGeom prst="rect">
             <a:avLst/>
@@ -7121,133 +9977,35 @@
           <a:p>
             <a:pPr algn="l" indent="0" marL="0">
               <a:lnSpc>
-                <a:spcPts val="1820"/>
-              </a:lnSpc>
-              <a:spcBef>
-                <a:spcPts val="300"/>
-              </a:spcBef>
-              <a:spcAft>
-                <a:spcPts val="300"/>
-              </a:spcAft>
-              <a:buNone/>
-            </a:pPr>
-            <a:r>
-              <a:rPr lang="en-US" sz="1300" dirty="0">
-                <a:solidFill>
-                  <a:srgbClr val="1C2833"/>
-                </a:solidFill>
-                <a:latin typeface="Georgia" pitchFamily="34" charset="0"/>
-                <a:ea typeface="Georgia" pitchFamily="34" charset="-122"/>
-                <a:cs typeface="Georgia" pitchFamily="34" charset="-120"/>
-              </a:rPr>
-              <a:t>1. Split the digits. 2. Add them. 3. </a:t>
-            </a:r>
-            <a:pPr algn="l" indent="0" marL="0">
-              <a:lnSpc>
-                <a:spcPts val="1820"/>
-              </a:lnSpc>
-              <a:spcBef>
-                <a:spcPts val="300"/>
-              </a:spcBef>
-              <a:spcAft>
-                <a:spcPts val="300"/>
-              </a:spcAft>
-              <a:buNone/>
-            </a:pPr>
-            <a:r>
-              <a:rPr lang="en-US" sz="1300" b="1" i="1" dirty="0">
-                <a:solidFill>
-                  <a:srgbClr val="1C2833"/>
-                </a:solidFill>
-                <a:latin typeface="Georgia" pitchFamily="34" charset="0"/>
-                <a:ea typeface="Georgia" pitchFamily="34" charset="-122"/>
-                <a:cs typeface="Georgia" pitchFamily="34" charset="-120"/>
-              </a:rPr>
-              <a:t>If the sum &lt; 10:</a:t>
-            </a:r>
-            <a:pPr algn="l" indent="0" marL="0">
-              <a:lnSpc>
-                <a:spcPts val="1820"/>
-              </a:lnSpc>
-              <a:spcBef>
-                <a:spcPts val="300"/>
-              </a:spcBef>
-              <a:spcAft>
-                <a:spcPts val="300"/>
-              </a:spcAft>
-              <a:buNone/>
-            </a:pPr>
-            <a:r>
-              <a:rPr lang="en-US" sz="1300" dirty="0">
-                <a:solidFill>
-                  <a:srgbClr val="1C2833"/>
-                </a:solidFill>
-                <a:latin typeface="Georgia" pitchFamily="34" charset="0"/>
-                <a:ea typeface="Georgia" pitchFamily="34" charset="-122"/>
-                <a:cs typeface="Georgia" pitchFamily="34" charset="-120"/>
-              </a:rPr>
-              <a:t> drop it in the middle. Done. 4. </a:t>
-            </a:r>
-            <a:pPr algn="l" indent="0" marL="0">
-              <a:lnSpc>
-                <a:spcPts val="1820"/>
-              </a:lnSpc>
-              <a:spcBef>
-                <a:spcPts val="300"/>
-              </a:spcBef>
-              <a:spcAft>
-                <a:spcPts val="300"/>
-              </a:spcAft>
-              <a:buNone/>
-            </a:pPr>
-            <a:r>
-              <a:rPr lang="en-US" sz="1300" b="1" i="1" dirty="0">
-                <a:solidFill>
-                  <a:srgbClr val="1C2833"/>
-                </a:solidFill>
-                <a:latin typeface="Georgia" pitchFamily="34" charset="0"/>
-                <a:ea typeface="Georgia" pitchFamily="34" charset="-122"/>
-                <a:cs typeface="Georgia" pitchFamily="34" charset="-120"/>
-              </a:rPr>
-              <a:t>If the sum ≥ 10:</a:t>
-            </a:r>
-            <a:pPr algn="l" indent="0" marL="0">
-              <a:lnSpc>
-                <a:spcPts val="1820"/>
-              </a:lnSpc>
-              <a:spcBef>
-                <a:spcPts val="300"/>
-              </a:spcBef>
-              <a:spcAft>
-                <a:spcPts val="300"/>
-              </a:spcAft>
-              <a:buNone/>
-            </a:pPr>
-            <a:r>
-              <a:rPr lang="en-US" sz="1300" dirty="0">
-                <a:solidFill>
-                  <a:srgbClr val="1C2833"/>
-                </a:solidFill>
-                <a:latin typeface="Georgia" pitchFamily="34" charset="0"/>
-                <a:ea typeface="Georgia" pitchFamily="34" charset="-122"/>
-                <a:cs typeface="Georgia" pitchFamily="34" charset="-120"/>
-              </a:rPr>
-              <a:t> keep the units digit of the sum as the middle; add 1 to the leftmost digit.</a:t>
-            </a:r>
-            <a:endParaRPr lang="en-US" sz="1300" dirty="0"/>
-          </a:p>
-        </p:txBody>
-      </p:sp>
-      <p:sp>
-        <p:nvSpPr>
-          <p:cNvPr id="8" name="Text 6"/>
-          <p:cNvSpPr/>
-          <p:nvPr/>
-        </p:nvSpPr>
-        <p:spPr>
-          <a:xfrm>
-            <a:off x="692051" y="1843236"/>
-            <a:ext cx="7973389" cy="461963"/>
+                <a:spcPts val="1375"/>
+              </a:lnSpc>
+              <a:buNone/>
+            </a:pPr>
+            <a:r>
+              <a:rPr lang="en-US" sz="1100" dirty="0">
+                <a:solidFill>
+                  <a:srgbClr val="1C2833"/>
+                </a:solidFill>
+                <a:latin typeface="Courier New" pitchFamily="34" charset="0"/>
+                <a:ea typeface="Courier New" pitchFamily="34" charset="-122"/>
+                <a:cs typeface="Courier New" pitchFamily="34" charset="-120"/>
+              </a:rPr>
+              <a:t>8 + 7 = 15</a:t>
+            </a:r>
+            <a:endParaRPr lang="en-US" sz="1100" dirty="0"/>
+          </a:p>
+        </p:txBody>
+      </p:sp>
+      <p:sp>
+        <p:nvSpPr>
+          <p:cNvPr id="9" name="Text 7"/>
+          <p:cNvSpPr/>
+          <p:nvPr/>
+        </p:nvSpPr>
+        <p:spPr>
+          <a:xfrm>
+            <a:off x="631627" y="1743075"/>
+            <a:ext cx="8086939" cy="174575"/>
           </a:xfrm>
           <a:prstGeom prst="rect">
             <a:avLst/>
@@ -7261,379 +10019,70 @@
           <a:p>
             <a:pPr algn="l" indent="0" marL="0">
               <a:lnSpc>
-                <a:spcPts val="1820"/>
-              </a:lnSpc>
-              <a:spcBef>
-                <a:spcPts val="300"/>
-              </a:spcBef>
-              <a:spcAft>
-                <a:spcPts val="300"/>
-              </a:spcAft>
-              <a:buNone/>
-            </a:pPr>
-            <a:r>
-              <a:rPr lang="en-US" sz="1300" dirty="0">
-                <a:solidFill>
-                  <a:srgbClr val="1C2833"/>
-                </a:solidFill>
-                <a:latin typeface="Georgia" pitchFamily="34" charset="0"/>
-                <a:ea typeface="Georgia" pitchFamily="34" charset="-122"/>
-                <a:cs typeface="Georgia" pitchFamily="34" charset="-120"/>
-              </a:rPr>
-              <a:t>Examples: - 45 × 11: 4+5=9 → 4</a:t>
-            </a:r>
-            <a:pPr algn="l" indent="0" marL="0">
-              <a:lnSpc>
-                <a:spcPts val="1820"/>
-              </a:lnSpc>
-              <a:spcBef>
-                <a:spcPts val="300"/>
-              </a:spcBef>
-              <a:spcAft>
-                <a:spcPts val="300"/>
-              </a:spcAft>
-              <a:buNone/>
-            </a:pPr>
-            <a:r>
-              <a:rPr lang="en-US" sz="1300" b="1" i="1" dirty="0">
-                <a:solidFill>
-                  <a:srgbClr val="1C2833"/>
-                </a:solidFill>
-                <a:latin typeface="Georgia" pitchFamily="34" charset="0"/>
-                <a:ea typeface="Georgia" pitchFamily="34" charset="-122"/>
-                <a:cs typeface="Georgia" pitchFamily="34" charset="-120"/>
-              </a:rPr>
-              <a:t>9</a:t>
-            </a:r>
-            <a:pPr algn="l" indent="0" marL="0">
-              <a:lnSpc>
-                <a:spcPts val="1820"/>
-              </a:lnSpc>
-              <a:spcBef>
-                <a:spcPts val="300"/>
-              </a:spcBef>
-              <a:spcAft>
-                <a:spcPts val="300"/>
-              </a:spcAft>
-              <a:buNone/>
-            </a:pPr>
-            <a:r>
-              <a:rPr lang="en-US" sz="1300" dirty="0">
-                <a:solidFill>
-                  <a:srgbClr val="1C2833"/>
-                </a:solidFill>
-                <a:latin typeface="Georgia" pitchFamily="34" charset="0"/>
-                <a:ea typeface="Georgia" pitchFamily="34" charset="-122"/>
-                <a:cs typeface="Georgia" pitchFamily="34" charset="-120"/>
-              </a:rPr>
-              <a:t>5 = </a:t>
-            </a:r>
-            <a:pPr algn="l" indent="0" marL="0">
-              <a:lnSpc>
-                <a:spcPts val="1820"/>
-              </a:lnSpc>
-              <a:spcBef>
-                <a:spcPts val="300"/>
-              </a:spcBef>
-              <a:spcAft>
-                <a:spcPts val="300"/>
-              </a:spcAft>
-              <a:buNone/>
-            </a:pPr>
-            <a:r>
-              <a:rPr lang="en-US" sz="1300" b="1" i="1" dirty="0">
-                <a:solidFill>
-                  <a:srgbClr val="1C2833"/>
-                </a:solidFill>
-                <a:latin typeface="Georgia" pitchFamily="34" charset="0"/>
-                <a:ea typeface="Georgia" pitchFamily="34" charset="-122"/>
-                <a:cs typeface="Georgia" pitchFamily="34" charset="-120"/>
-              </a:rPr>
-              <a:t>495</a:t>
-            </a:r>
-            <a:pPr algn="l" indent="0" marL="0">
-              <a:lnSpc>
-                <a:spcPts val="1820"/>
-              </a:lnSpc>
-              <a:spcBef>
-                <a:spcPts val="300"/>
-              </a:spcBef>
-              <a:spcAft>
-                <a:spcPts val="300"/>
-              </a:spcAft>
-              <a:buNone/>
-            </a:pPr>
-            <a:r>
-              <a:rPr lang="en-US" sz="1300" dirty="0">
-                <a:solidFill>
-                  <a:srgbClr val="1C2833"/>
-                </a:solidFill>
-                <a:latin typeface="Georgia" pitchFamily="34" charset="0"/>
-                <a:ea typeface="Georgia" pitchFamily="34" charset="-122"/>
-                <a:cs typeface="Georgia" pitchFamily="34" charset="-120"/>
-              </a:rPr>
-              <a:t> - 87 × 11: 8+7=15 → 8</a:t>
-            </a:r>
-            <a:pPr algn="l" indent="0" marL="0">
-              <a:lnSpc>
-                <a:spcPts val="1820"/>
-              </a:lnSpc>
-              <a:spcBef>
-                <a:spcPts val="300"/>
-              </a:spcBef>
-              <a:spcAft>
-                <a:spcPts val="300"/>
-              </a:spcAft>
-              <a:buNone/>
-            </a:pPr>
-            <a:r>
-              <a:rPr lang="en-US" sz="1300" b="1" i="1" dirty="0">
-                <a:solidFill>
-                  <a:srgbClr val="1C2833"/>
-                </a:solidFill>
-                <a:latin typeface="Georgia" pitchFamily="34" charset="0"/>
-                <a:ea typeface="Georgia" pitchFamily="34" charset="-122"/>
-                <a:cs typeface="Georgia" pitchFamily="34" charset="-120"/>
-              </a:rPr>
-              <a:t>(1)5</a:t>
-            </a:r>
-            <a:pPr algn="l" indent="0" marL="0">
-              <a:lnSpc>
-                <a:spcPts val="1820"/>
-              </a:lnSpc>
-              <a:spcBef>
-                <a:spcPts val="300"/>
-              </a:spcBef>
-              <a:spcAft>
-                <a:spcPts val="300"/>
-              </a:spcAft>
-              <a:buNone/>
-            </a:pPr>
-            <a:r>
-              <a:rPr lang="en-US" sz="1300" dirty="0">
-                <a:solidFill>
-                  <a:srgbClr val="1C2833"/>
-                </a:solidFill>
-                <a:latin typeface="Georgia" pitchFamily="34" charset="0"/>
-                <a:ea typeface="Georgia" pitchFamily="34" charset="-122"/>
-                <a:cs typeface="Georgia" pitchFamily="34" charset="-120"/>
-              </a:rPr>
-              <a:t>7 → </a:t>
-            </a:r>
-            <a:pPr algn="l" indent="0" marL="0">
-              <a:lnSpc>
-                <a:spcPts val="1820"/>
-              </a:lnSpc>
-              <a:spcBef>
-                <a:spcPts val="300"/>
-              </a:spcBef>
-              <a:spcAft>
-                <a:spcPts val="300"/>
-              </a:spcAft>
-              <a:buNone/>
-            </a:pPr>
-            <a:r>
-              <a:rPr lang="en-US" sz="1300" b="1" i="1" dirty="0">
-                <a:solidFill>
-                  <a:srgbClr val="1C2833"/>
-                </a:solidFill>
-                <a:latin typeface="Georgia" pitchFamily="34" charset="0"/>
-                <a:ea typeface="Georgia" pitchFamily="34" charset="-122"/>
-                <a:cs typeface="Georgia" pitchFamily="34" charset="-120"/>
-              </a:rPr>
-              <a:t>9</a:t>
-            </a:r>
-            <a:pPr algn="l" indent="0" marL="0">
-              <a:lnSpc>
-                <a:spcPts val="1820"/>
-              </a:lnSpc>
-              <a:spcBef>
-                <a:spcPts val="300"/>
-              </a:spcBef>
-              <a:spcAft>
-                <a:spcPts val="300"/>
-              </a:spcAft>
-              <a:buNone/>
-            </a:pPr>
-            <a:r>
-              <a:rPr lang="en-US" sz="1300" dirty="0">
-                <a:solidFill>
-                  <a:srgbClr val="1C2833"/>
-                </a:solidFill>
-                <a:latin typeface="Georgia" pitchFamily="34" charset="0"/>
-                <a:ea typeface="Georgia" pitchFamily="34" charset="-122"/>
-                <a:cs typeface="Georgia" pitchFamily="34" charset="-120"/>
-              </a:rPr>
-              <a:t>57 = </a:t>
-            </a:r>
-            <a:pPr algn="l" indent="0" marL="0">
-              <a:lnSpc>
-                <a:spcPts val="1820"/>
-              </a:lnSpc>
-              <a:spcBef>
-                <a:spcPts val="300"/>
-              </a:spcBef>
-              <a:spcAft>
-                <a:spcPts val="300"/>
-              </a:spcAft>
-              <a:buNone/>
-            </a:pPr>
-            <a:r>
-              <a:rPr lang="en-US" sz="1300" b="1" i="1" dirty="0">
-                <a:solidFill>
-                  <a:srgbClr val="1C2833"/>
-                </a:solidFill>
-                <a:latin typeface="Georgia" pitchFamily="34" charset="0"/>
-                <a:ea typeface="Georgia" pitchFamily="34" charset="-122"/>
-                <a:cs typeface="Georgia" pitchFamily="34" charset="-120"/>
-              </a:rPr>
-              <a:t>957</a:t>
-            </a:r>
-            <a:pPr algn="l" indent="0" marL="0">
-              <a:lnSpc>
-                <a:spcPts val="1820"/>
-              </a:lnSpc>
-              <a:spcBef>
-                <a:spcPts val="300"/>
-              </a:spcBef>
-              <a:spcAft>
-                <a:spcPts val="300"/>
-              </a:spcAft>
-              <a:buNone/>
-            </a:pPr>
-            <a:r>
-              <a:rPr lang="en-US" sz="1300" dirty="0">
-                <a:solidFill>
-                  <a:srgbClr val="1C2833"/>
-                </a:solidFill>
-                <a:latin typeface="Georgia" pitchFamily="34" charset="0"/>
-                <a:ea typeface="Georgia" pitchFamily="34" charset="-122"/>
-                <a:cs typeface="Georgia" pitchFamily="34" charset="-120"/>
-              </a:rPr>
-              <a:t> - 99 × 11: 9+9=18 → 9</a:t>
-            </a:r>
-            <a:pPr algn="l" indent="0" marL="0">
-              <a:lnSpc>
-                <a:spcPts val="1820"/>
-              </a:lnSpc>
-              <a:spcBef>
-                <a:spcPts val="300"/>
-              </a:spcBef>
-              <a:spcAft>
-                <a:spcPts val="300"/>
-              </a:spcAft>
-              <a:buNone/>
-            </a:pPr>
-            <a:r>
-              <a:rPr lang="en-US" sz="1300" b="1" i="1" dirty="0">
-                <a:solidFill>
-                  <a:srgbClr val="1C2833"/>
-                </a:solidFill>
-                <a:latin typeface="Georgia" pitchFamily="34" charset="0"/>
-                <a:ea typeface="Georgia" pitchFamily="34" charset="-122"/>
-                <a:cs typeface="Georgia" pitchFamily="34" charset="-120"/>
-              </a:rPr>
-              <a:t>(1)8</a:t>
-            </a:r>
-            <a:pPr algn="l" indent="0" marL="0">
-              <a:lnSpc>
-                <a:spcPts val="1820"/>
-              </a:lnSpc>
-              <a:spcBef>
-                <a:spcPts val="300"/>
-              </a:spcBef>
-              <a:spcAft>
-                <a:spcPts val="300"/>
-              </a:spcAft>
-              <a:buNone/>
-            </a:pPr>
-            <a:r>
-              <a:rPr lang="en-US" sz="1300" dirty="0">
-                <a:solidFill>
-                  <a:srgbClr val="1C2833"/>
-                </a:solidFill>
-                <a:latin typeface="Georgia" pitchFamily="34" charset="0"/>
-                <a:ea typeface="Georgia" pitchFamily="34" charset="-122"/>
-                <a:cs typeface="Georgia" pitchFamily="34" charset="-120"/>
-              </a:rPr>
-              <a:t>9 → cascade → 1</a:t>
-            </a:r>
-            <a:pPr algn="l" indent="0" marL="0">
-              <a:lnSpc>
-                <a:spcPts val="1820"/>
-              </a:lnSpc>
-              <a:spcBef>
-                <a:spcPts val="300"/>
-              </a:spcBef>
-              <a:spcAft>
-                <a:spcPts val="300"/>
-              </a:spcAft>
-              <a:buNone/>
-            </a:pPr>
-            <a:r>
-              <a:rPr lang="en-US" sz="1300" b="1" i="1" dirty="0">
-                <a:solidFill>
-                  <a:srgbClr val="1C2833"/>
-                </a:solidFill>
-                <a:latin typeface="Georgia" pitchFamily="34" charset="0"/>
-                <a:ea typeface="Georgia" pitchFamily="34" charset="-122"/>
-                <a:cs typeface="Georgia" pitchFamily="34" charset="-120"/>
-              </a:rPr>
-              <a:t>0</a:t>
-            </a:r>
-            <a:pPr algn="l" indent="0" marL="0">
-              <a:lnSpc>
-                <a:spcPts val="1820"/>
-              </a:lnSpc>
-              <a:spcBef>
-                <a:spcPts val="300"/>
-              </a:spcBef>
-              <a:spcAft>
-                <a:spcPts val="300"/>
-              </a:spcAft>
-              <a:buNone/>
-            </a:pPr>
-            <a:r>
-              <a:rPr lang="en-US" sz="1300" dirty="0">
-                <a:solidFill>
-                  <a:srgbClr val="1C2833"/>
-                </a:solidFill>
-                <a:latin typeface="Georgia" pitchFamily="34" charset="0"/>
-                <a:ea typeface="Georgia" pitchFamily="34" charset="-122"/>
-                <a:cs typeface="Georgia" pitchFamily="34" charset="-120"/>
-              </a:rPr>
-              <a:t>89 = </a:t>
-            </a:r>
-            <a:pPr algn="l" indent="0" marL="0">
-              <a:lnSpc>
-                <a:spcPts val="1820"/>
-              </a:lnSpc>
-              <a:spcBef>
-                <a:spcPts val="300"/>
-              </a:spcBef>
-              <a:spcAft>
-                <a:spcPts val="300"/>
-              </a:spcAft>
-              <a:buNone/>
-            </a:pPr>
-            <a:r>
-              <a:rPr lang="en-US" sz="1300" b="1" i="1" dirty="0">
-                <a:solidFill>
-                  <a:srgbClr val="1C2833"/>
-                </a:solidFill>
-                <a:latin typeface="Georgia" pitchFamily="34" charset="0"/>
-                <a:ea typeface="Georgia" pitchFamily="34" charset="-122"/>
-                <a:cs typeface="Georgia" pitchFamily="34" charset="-120"/>
-              </a:rPr>
-              <a:t>1089</a:t>
-            </a:r>
-            <a:endParaRPr lang="en-US" sz="1300" dirty="0"/>
-          </a:p>
-        </p:txBody>
-      </p:sp>
-      <p:sp>
-        <p:nvSpPr>
-          <p:cNvPr id="9" name="Text 7"/>
+                <a:spcPts val="1375"/>
+              </a:lnSpc>
+              <a:buNone/>
+            </a:pPr>
+            <a:r>
+              <a:rPr lang="en-US" sz="1100" dirty="0">
+                <a:solidFill>
+                  <a:srgbClr val="1C2833"/>
+                </a:solidFill>
+                <a:latin typeface="Courier New" pitchFamily="34" charset="0"/>
+                <a:ea typeface="Courier New" pitchFamily="34" charset="-122"/>
+                <a:cs typeface="Courier New" pitchFamily="34" charset="-120"/>
+              </a:rPr>
+              <a:t>Middle = 5; carry 1 into the 8 → 9.</a:t>
+            </a:r>
+            <a:endParaRPr lang="en-US" sz="1100" dirty="0"/>
+          </a:p>
+        </p:txBody>
+      </p:sp>
+      <p:sp>
+        <p:nvSpPr>
+          <p:cNvPr id="10" name="Text 8"/>
+          <p:cNvSpPr/>
+          <p:nvPr/>
+        </p:nvSpPr>
+        <p:spPr>
+          <a:xfrm>
+            <a:off x="631627" y="1917650"/>
+            <a:ext cx="8086939" cy="174575"/>
+          </a:xfrm>
+          <a:prstGeom prst="rect">
+            <a:avLst/>
+          </a:prstGeom>
+          <a:noFill/>
+          <a:ln/>
+        </p:spPr>
+        <p:txBody>
+          <a:bodyPr wrap="square" lIns="0" tIns="0" rIns="0" bIns="0" rtlCol="0" anchor="t"/>
+          <a:lstStyle/>
+          <a:p>
+            <a:pPr algn="l" indent="0" marL="0">
+              <a:lnSpc>
+                <a:spcPts val="1375"/>
+              </a:lnSpc>
+              <a:buNone/>
+            </a:pPr>
+            <a:r>
+              <a:rPr lang="en-US" sz="1100" dirty="0">
+                <a:solidFill>
+                  <a:srgbClr val="1C2833"/>
+                </a:solidFill>
+                <a:latin typeface="Courier New" pitchFamily="34" charset="0"/>
+                <a:ea typeface="Courier New" pitchFamily="34" charset="-122"/>
+                <a:cs typeface="Courier New" pitchFamily="34" charset="-120"/>
+              </a:rPr>
+              <a:t>Answer: 9  5  7 → 957.</a:t>
+            </a:r>
+            <a:endParaRPr lang="en-US" sz="1100" dirty="0"/>
+          </a:p>
+        </p:txBody>
+      </p:sp>
+      <p:sp>
+        <p:nvSpPr>
+          <p:cNvPr id="11" name="Text 9"/>
           <p:cNvSpPr/>
           <p:nvPr/>
         </p:nvSpPr>
